--- a/docs/apresentacao/apresentacao-final-av2-equipe01.pptx
+++ b/docs/apresentacao/apresentacao-final-av2-equipe01.pptx
@@ -23,6 +23,7 @@
     <p:sldId id="267" r:id="rId18"/>
     <p:sldId id="276" r:id="rId27"/>
     <p:sldId id="268" r:id="rId19"/>
+    <p:sldId id="278" r:id="rId29"/>
     <p:sldId id="269" r:id="rId20"/>
     <p:sldId id="270" r:id="rId21"/>
     <p:sldId id="271" r:id="rId22"/>
@@ -15719,7 +15720,7 @@
                 </a:solidFill>
                 <a:latin typeface="Calibri"/>
               </a:rPr>
-              <a:t>GITHUB ACTIONS</a:t>
+              <a:t>INTEGRAÇÃO CONTÍNUA · 1/2</a:t>
             </a:r>
           </a:p>
         </p:txBody>
@@ -15758,7 +15759,7 @@
                 </a:solidFill>
                 <a:latin typeface="Calibri"/>
               </a:rPr>
-              <a:t>Pipeline de integração contínua</a:t>
+              <a:t>GitHub Actions — três jobs, um portão</a:t>
             </a:r>
           </a:p>
         </p:txBody>
@@ -15848,14 +15849,128 @@
       </p:sp>
       <p:sp>
         <p:nvSpPr>
-          <p:cNvPr id="7" name="Rounded Rectangle 6"/>
+          <p:cNvPr id="20" name="TextBox 19"/>
+          <p:cNvSpPr txBox="1"/>
+          <p:nvPr/>
+        </p:nvSpPr>
+        <p:spPr>
+          <a:xfrm>
+            <a:off x="548640" y="6473952"/>
+            <a:ext cx="8229600" cy="320040"/>
+          </a:xfrm>
+          <a:prstGeom prst="rect">
+            <a:avLst/>
+          </a:prstGeom>
+          <a:noFill/>
+        </p:spPr>
+        <p:txBody>
+          <a:bodyPr wrap="square" anchor="t">
+            <a:spAutoFit/>
+          </a:bodyPr>
+          <a:lstStyle/>
+          <a:p>
+            <a:pPr algn="l">
+              <a:lnSpc>
+                <a:spcPct val="115000"/>
+              </a:lnSpc>
+            </a:pPr>
+            <a:r>
+              <a:rPr sz="1000" b="0" i="0">
+                <a:solidFill>
+                  <a:srgbClr val="8A9399"/>
+                </a:solidFill>
+                <a:latin typeface="Calibri"/>
+              </a:rPr>
+              <a:t>Clínica Médica MVP · Equipe 01 · AV2 Engenharia de Software Moderna</a:t>
+            </a:r>
+          </a:p>
+        </p:txBody>
+      </p:sp>
+      <p:sp>
+        <p:nvSpPr>
+          <p:cNvPr id="21" name="TextBox 20"/>
+          <p:cNvSpPr txBox="1"/>
+          <p:nvPr/>
+        </p:nvSpPr>
+        <p:spPr>
+          <a:xfrm>
+            <a:off x="548640" y="1444752"/>
+            <a:ext cx="11091672" cy="365760"/>
+          </a:xfrm>
+          <a:prstGeom prst="rect">
+            <a:avLst/>
+          </a:prstGeom>
+          <a:noFill/>
+        </p:spPr>
+        <p:txBody>
+          <a:bodyPr wrap="square">
+            <a:spAutoFit/>
+          </a:bodyPr>
+          <a:lstStyle/>
+          <a:p>
+            <a:pPr>
+              <a:lnSpc>
+                <a:spcPct val="115000"/>
+              </a:lnSpc>
+            </a:pPr>
+            <a:r>
+              <a:rPr sz="1400" b="0" i="0">
+                <a:solidFill>
+                  <a:srgbClr val="495257"/>
+                </a:solidFill>
+                <a:latin typeface="Calibri"/>
+              </a:rPr>
+              <a:t>Dispara em todo push e em todo PR para </a:t>
+            </a:r>
+            <a:r>
+              <a:rPr sz="1400" b="1" i="0">
+                <a:solidFill>
+                  <a:srgbClr val="495257"/>
+                </a:solidFill>
+                <a:latin typeface="Calibri"/>
+              </a:rPr>
+              <a:t>main</a:t>
+            </a:r>
+            <a:r>
+              <a:rPr sz="1400" b="0" i="0">
+                <a:solidFill>
+                  <a:srgbClr val="495257"/>
+                </a:solidFill>
+                <a:latin typeface="Calibri"/>
+              </a:rPr>
+              <a:t> e </a:t>
+            </a:r>
+            <a:r>
+              <a:rPr sz="1400" b="1" i="0">
+                <a:solidFill>
+                  <a:srgbClr val="495257"/>
+                </a:solidFill>
+                <a:latin typeface="Calibri"/>
+              </a:rPr>
+              <a:t>develop</a:t>
+            </a:r>
+            <a:r>
+              <a:rPr sz="1400" b="0" i="0">
+                <a:solidFill>
+                  <a:srgbClr val="495257"/>
+                </a:solidFill>
+                <a:latin typeface="Calibri"/>
+              </a:rPr>
+              <a:t>. Os três jobs correm em paralelo; o quality-gate só fica verde se os três ficarem.</a:t>
+            </a:r>
+          </a:p>
+        </p:txBody>
+      </p:sp>
+      <p:sp>
+        <p:nvSpPr>
+          <p:cNvPr id="22" name="Rounded Rectangle 21"/>
           <p:cNvSpPr/>
           <p:nvPr/>
         </p:nvSpPr>
         <p:spPr>
           <a:xfrm>
-            <a:off x="548640" y="1645920"/>
-            <a:ext cx="3429000" cy="1554480"/>
+            <a:off x="548640" y="1847088"/>
+            <a:ext cx="3520440" cy="1883664"/>
           </a:xfrm>
           <a:prstGeom prst="roundRect">
             <a:avLst/>
@@ -15892,27 +16007,27 @@
       </p:sp>
       <p:sp>
         <p:nvSpPr>
-          <p:cNvPr id="8" name="TextBox 7"/>
-          <p:cNvSpPr txBox="1"/>
-          <p:nvPr/>
-        </p:nvSpPr>
-        <p:spPr>
-          <a:xfrm>
-            <a:off x="731520" y="1810512"/>
-            <a:ext cx="3063240" cy="365760"/>
-          </a:xfrm>
-          <a:prstGeom prst="rect">
-            <a:avLst/>
-          </a:prstGeom>
-          <a:noFill/>
-        </p:spPr>
-        <p:txBody>
-          <a:bodyPr wrap="square" anchor="t">
+          <p:cNvPr id="23" name="TextBox 22"/>
+          <p:cNvSpPr txBox="1"/>
+          <p:nvPr/>
+        </p:nvSpPr>
+        <p:spPr>
+          <a:xfrm>
+            <a:off x="731520" y="1920240"/>
+            <a:ext cx="3154680" cy="365760"/>
+          </a:xfrm>
+          <a:prstGeom prst="rect">
+            <a:avLst/>
+          </a:prstGeom>
+          <a:noFill/>
+        </p:spPr>
+        <p:txBody>
+          <a:bodyPr wrap="square">
             <a:spAutoFit/>
           </a:bodyPr>
           <a:lstStyle/>
           <a:p>
-            <a:pPr algn="l">
+            <a:pPr>
               <a:lnSpc>
                 <a:spcPct val="115000"/>
               </a:lnSpc>
@@ -15931,54 +16046,140 @@
       </p:sp>
       <p:sp>
         <p:nvSpPr>
-          <p:cNvPr id="9" name="TextBox 8"/>
-          <p:cNvSpPr txBox="1"/>
-          <p:nvPr/>
-        </p:nvSpPr>
-        <p:spPr>
-          <a:xfrm>
-            <a:off x="731520" y="2212848"/>
-            <a:ext cx="3063240" cy="822960"/>
-          </a:xfrm>
-          <a:prstGeom prst="rect">
-            <a:avLst/>
-          </a:prstGeom>
-          <a:noFill/>
-        </p:spPr>
-        <p:txBody>
-          <a:bodyPr wrap="square" anchor="t">
+          <p:cNvPr id="24" name="TextBox 23"/>
+          <p:cNvSpPr txBox="1"/>
+          <p:nvPr/>
+        </p:nvSpPr>
+        <p:spPr>
+          <a:xfrm>
+            <a:off x="731520" y="2304288"/>
+            <a:ext cx="3154680" cy="292608"/>
+          </a:xfrm>
+          <a:prstGeom prst="rect">
+            <a:avLst/>
+          </a:prstGeom>
+          <a:noFill/>
+        </p:spPr>
+        <p:txBody>
+          <a:bodyPr wrap="square">
             <a:spAutoFit/>
           </a:bodyPr>
           <a:lstStyle/>
           <a:p>
-            <a:pPr algn="l">
-              <a:lnSpc>
-                <a:spcPct val="125000"/>
-              </a:lnSpc>
-            </a:pPr>
-            <a:r>
-              <a:rPr sz="1200" b="0" i="0">
+            <a:pPr>
+              <a:lnSpc>
+                <a:spcPct val="115000"/>
+              </a:lnSpc>
+            </a:pPr>
+            <a:r>
+              <a:rPr sz="1050" b="0" i="0">
                 <a:solidFill>
                   <a:srgbClr val="E7F5F4"/>
                 </a:solidFill>
                 <a:latin typeface="Calibri"/>
               </a:rPr>
-              <a:t>ruff · alembic upgrade
-head · pytest --cov</a:t>
-            </a:r>
-          </a:p>
-        </p:txBody>
-      </p:sp>
-      <p:sp>
-        <p:nvSpPr>
-          <p:cNvPr id="10" name="Rounded Rectangle 9"/>
+              <a:t>FastAPI + pytest · PostgreSQL 16</a:t>
+            </a:r>
+          </a:p>
+        </p:txBody>
+      </p:sp>
+      <p:sp>
+        <p:nvSpPr>
+          <p:cNvPr id="25" name="TextBox 24"/>
+          <p:cNvSpPr txBox="1"/>
+          <p:nvPr/>
+        </p:nvSpPr>
+        <p:spPr>
+          <a:xfrm>
+            <a:off x="731520" y="2615184"/>
+            <a:ext cx="3154680" cy="1014984"/>
+          </a:xfrm>
+          <a:prstGeom prst="rect">
+            <a:avLst/>
+          </a:prstGeom>
+          <a:noFill/>
+        </p:spPr>
+        <p:txBody>
+          <a:bodyPr wrap="square">
+            <a:spAutoFit/>
+          </a:bodyPr>
+          <a:lstStyle/>
+          <a:p>
+            <a:pPr>
+              <a:lnSpc>
+                <a:spcPct val="130000"/>
+              </a:lnSpc>
+            </a:pPr>
+            <a:r>
+              <a:rPr sz="1150" b="0" i="0">
+                <a:solidFill>
+                  <a:srgbClr val="E7F5F4"/>
+                </a:solidFill>
+                <a:latin typeface="Calibri"/>
+              </a:rPr>
+              <a:t>•  ruff check · ruff format --check</a:t>
+            </a:r>
+          </a:p>
+          <a:p>
+            <a:pPr>
+              <a:lnSpc>
+                <a:spcPct val="130000"/>
+              </a:lnSpc>
+            </a:pPr>
+            <a:r>
+              <a:rPr sz="1150" b="0" i="0">
+                <a:solidFill>
+                  <a:srgbClr val="E7F5F4"/>
+                </a:solidFill>
+                <a:latin typeface="Calibri"/>
+              </a:rPr>
+              <a:t>•  alembic upgrade head</a:t>
+            </a:r>
+          </a:p>
+          <a:p>
+            <a:pPr>
+              <a:lnSpc>
+                <a:spcPct val="130000"/>
+              </a:lnSpc>
+            </a:pPr>
+            <a:r>
+              <a:rPr sz="1150" b="0" i="0">
+                <a:solidFill>
+                  <a:srgbClr val="E7F5F4"/>
+                </a:solidFill>
+                <a:latin typeface="Calibri"/>
+              </a:rPr>
+              <a:t>•  pytest unit + integração</a:t>
+            </a:r>
+          </a:p>
+          <a:p>
+            <a:pPr>
+              <a:lnSpc>
+                <a:spcPct val="130000"/>
+              </a:lnSpc>
+            </a:pPr>
+            <a:r>
+              <a:rPr sz="1150" b="0" i="0">
+                <a:solidFill>
+                  <a:srgbClr val="E7F5F4"/>
+                </a:solidFill>
+                <a:latin typeface="Calibri"/>
+              </a:rPr>
+              <a:t>•  coverage.xml publicado como artifact</a:t>
+            </a:r>
+          </a:p>
+        </p:txBody>
+      </p:sp>
+      <p:sp>
+        <p:nvSpPr>
+          <p:cNvPr id="26" name="Rounded Rectangle 25"/>
           <p:cNvSpPr/>
           <p:nvPr/>
         </p:nvSpPr>
         <p:spPr>
           <a:xfrm>
-            <a:off x="4114800" y="1645920"/>
-            <a:ext cx="3429000" cy="1554480"/>
+            <a:off x="4334256" y="1847088"/>
+            <a:ext cx="3520440" cy="1883664"/>
           </a:xfrm>
           <a:prstGeom prst="roundRect">
             <a:avLst/>
@@ -16015,27 +16216,27 @@
       </p:sp>
       <p:sp>
         <p:nvSpPr>
-          <p:cNvPr id="11" name="TextBox 10"/>
-          <p:cNvSpPr txBox="1"/>
-          <p:nvPr/>
-        </p:nvSpPr>
-        <p:spPr>
-          <a:xfrm>
-            <a:off x="4297680" y="1810512"/>
-            <a:ext cx="3063240" cy="365760"/>
-          </a:xfrm>
-          <a:prstGeom prst="rect">
-            <a:avLst/>
-          </a:prstGeom>
-          <a:noFill/>
-        </p:spPr>
-        <p:txBody>
-          <a:bodyPr wrap="square" anchor="t">
+          <p:cNvPr id="27" name="TextBox 26"/>
+          <p:cNvSpPr txBox="1"/>
+          <p:nvPr/>
+        </p:nvSpPr>
+        <p:spPr>
+          <a:xfrm>
+            <a:off x="4517136" y="1920240"/>
+            <a:ext cx="3154680" cy="365760"/>
+          </a:xfrm>
+          <a:prstGeom prst="rect">
+            <a:avLst/>
+          </a:prstGeom>
+          <a:noFill/>
+        </p:spPr>
+        <p:txBody>
+          <a:bodyPr wrap="square">
             <a:spAutoFit/>
           </a:bodyPr>
           <a:lstStyle/>
           <a:p>
-            <a:pPr algn="l">
+            <a:pPr>
               <a:lnSpc>
                 <a:spcPct val="115000"/>
               </a:lnSpc>
@@ -16054,54 +16255,140 @@
       </p:sp>
       <p:sp>
         <p:nvSpPr>
-          <p:cNvPr id="12" name="TextBox 11"/>
-          <p:cNvSpPr txBox="1"/>
-          <p:nvPr/>
-        </p:nvSpPr>
-        <p:spPr>
-          <a:xfrm>
-            <a:off x="4297680" y="2212848"/>
-            <a:ext cx="3063240" cy="822960"/>
-          </a:xfrm>
-          <a:prstGeom prst="rect">
-            <a:avLst/>
-          </a:prstGeom>
-          <a:noFill/>
-        </p:spPr>
-        <p:txBody>
-          <a:bodyPr wrap="square" anchor="t">
+          <p:cNvPr id="28" name="TextBox 27"/>
+          <p:cNvSpPr txBox="1"/>
+          <p:nvPr/>
+        </p:nvSpPr>
+        <p:spPr>
+          <a:xfrm>
+            <a:off x="4517136" y="2304288"/>
+            <a:ext cx="3154680" cy="292608"/>
+          </a:xfrm>
+          <a:prstGeom prst="rect">
+            <a:avLst/>
+          </a:prstGeom>
+          <a:noFill/>
+        </p:spPr>
+        <p:txBody>
+          <a:bodyPr wrap="square">
             <a:spAutoFit/>
           </a:bodyPr>
           <a:lstStyle/>
           <a:p>
-            <a:pPr algn="l">
-              <a:lnSpc>
-                <a:spcPct val="125000"/>
-              </a:lnSpc>
-            </a:pPr>
-            <a:r>
-              <a:rPr sz="1200" b="0" i="0">
+            <a:pPr>
+              <a:lnSpc>
+                <a:spcPct val="115000"/>
+              </a:lnSpc>
+            </a:pPr>
+            <a:r>
+              <a:rPr sz="1050" b="0" i="0">
                 <a:solidFill>
                   <a:srgbClr val="E7F5F4"/>
                 </a:solidFill>
                 <a:latin typeface="Calibri"/>
               </a:rPr>
-              <a:t>eslint · tsc · vitest
-· next build</a:t>
-            </a:r>
-          </a:p>
-        </p:txBody>
-      </p:sp>
-      <p:sp>
-        <p:nvSpPr>
-          <p:cNvPr id="13" name="Rounded Rectangle 12"/>
+              <a:t>Next.js + Vitest · Node 22</a:t>
+            </a:r>
+          </a:p>
+        </p:txBody>
+      </p:sp>
+      <p:sp>
+        <p:nvSpPr>
+          <p:cNvPr id="29" name="TextBox 28"/>
+          <p:cNvSpPr txBox="1"/>
+          <p:nvPr/>
+        </p:nvSpPr>
+        <p:spPr>
+          <a:xfrm>
+            <a:off x="4517136" y="2615184"/>
+            <a:ext cx="3154680" cy="1014984"/>
+          </a:xfrm>
+          <a:prstGeom prst="rect">
+            <a:avLst/>
+          </a:prstGeom>
+          <a:noFill/>
+        </p:spPr>
+        <p:txBody>
+          <a:bodyPr wrap="square">
+            <a:spAutoFit/>
+          </a:bodyPr>
+          <a:lstStyle/>
+          <a:p>
+            <a:pPr>
+              <a:lnSpc>
+                <a:spcPct val="130000"/>
+              </a:lnSpc>
+            </a:pPr>
+            <a:r>
+              <a:rPr sz="1150" b="0" i="0">
+                <a:solidFill>
+                  <a:srgbClr val="E7F5F4"/>
+                </a:solidFill>
+                <a:latin typeface="Calibri"/>
+              </a:rPr>
+              <a:t>•  yarn lint · yarn format:check</a:t>
+            </a:r>
+          </a:p>
+          <a:p>
+            <a:pPr>
+              <a:lnSpc>
+                <a:spcPct val="130000"/>
+              </a:lnSpc>
+            </a:pPr>
+            <a:r>
+              <a:rPr sz="1150" b="0" i="0">
+                <a:solidFill>
+                  <a:srgbClr val="E7F5F4"/>
+                </a:solidFill>
+                <a:latin typeface="Calibri"/>
+              </a:rPr>
+              <a:t>•  yarn typecheck (typegen + tsc)</a:t>
+            </a:r>
+          </a:p>
+          <a:p>
+            <a:pPr>
+              <a:lnSpc>
+                <a:spcPct val="130000"/>
+              </a:lnSpc>
+            </a:pPr>
+            <a:r>
+              <a:rPr sz="1150" b="0" i="0">
+                <a:solidFill>
+                  <a:srgbClr val="E7F5F4"/>
+                </a:solidFill>
+                <a:latin typeface="Calibri"/>
+              </a:rPr>
+              <a:t>•  yarn test --coverage (Vitest)</a:t>
+            </a:r>
+          </a:p>
+          <a:p>
+            <a:pPr>
+              <a:lnSpc>
+                <a:spcPct val="130000"/>
+              </a:lnSpc>
+            </a:pPr>
+            <a:r>
+              <a:rPr sz="1150" b="0" i="0">
+                <a:solidFill>
+                  <a:srgbClr val="E7F5F4"/>
+                </a:solidFill>
+                <a:latin typeface="Calibri"/>
+              </a:rPr>
+              <a:t>•  yarn build (produção)</a:t>
+            </a:r>
+          </a:p>
+        </p:txBody>
+      </p:sp>
+      <p:sp>
+        <p:nvSpPr>
+          <p:cNvPr id="30" name="Rounded Rectangle 29"/>
           <p:cNvSpPr/>
           <p:nvPr/>
         </p:nvSpPr>
         <p:spPr>
           <a:xfrm>
-            <a:off x="7680960" y="1645920"/>
-            <a:ext cx="3429000" cy="1554480"/>
+            <a:off x="8119872" y="1847088"/>
+            <a:ext cx="3520440" cy="1883664"/>
           </a:xfrm>
           <a:prstGeom prst="roundRect">
             <a:avLst/>
@@ -16138,27 +16425,27 @@
       </p:sp>
       <p:sp>
         <p:nvSpPr>
-          <p:cNvPr id="14" name="TextBox 13"/>
-          <p:cNvSpPr txBox="1"/>
-          <p:nvPr/>
-        </p:nvSpPr>
-        <p:spPr>
-          <a:xfrm>
-            <a:off x="7863840" y="1810512"/>
-            <a:ext cx="3063240" cy="365760"/>
-          </a:xfrm>
-          <a:prstGeom prst="rect">
-            <a:avLst/>
-          </a:prstGeom>
-          <a:noFill/>
-        </p:spPr>
-        <p:txBody>
-          <a:bodyPr wrap="square" anchor="t">
+          <p:cNvPr id="31" name="TextBox 30"/>
+          <p:cNvSpPr txBox="1"/>
+          <p:nvPr/>
+        </p:nvSpPr>
+        <p:spPr>
+          <a:xfrm>
+            <a:off x="8302752" y="1920240"/>
+            <a:ext cx="3154680" cy="365760"/>
+          </a:xfrm>
+          <a:prstGeom prst="rect">
+            <a:avLst/>
+          </a:prstGeom>
+          <a:noFill/>
+        </p:spPr>
+        <p:txBody>
+          <a:bodyPr wrap="square">
             <a:spAutoFit/>
           </a:bodyPr>
           <a:lstStyle/>
           <a:p>
-            <a:pPr algn="l">
+            <a:pPr>
               <a:lnSpc>
                 <a:spcPct val="115000"/>
               </a:lnSpc>
@@ -16177,54 +16464,280 @@
       </p:sp>
       <p:sp>
         <p:nvSpPr>
-          <p:cNvPr id="15" name="TextBox 14"/>
-          <p:cNvSpPr txBox="1"/>
-          <p:nvPr/>
-        </p:nvSpPr>
-        <p:spPr>
-          <a:xfrm>
-            <a:off x="7863840" y="2212848"/>
-            <a:ext cx="3063240" cy="822960"/>
-          </a:xfrm>
-          <a:prstGeom prst="rect">
-            <a:avLst/>
-          </a:prstGeom>
-          <a:noFill/>
-        </p:spPr>
-        <p:txBody>
-          <a:bodyPr wrap="square" anchor="t">
+          <p:cNvPr id="32" name="TextBox 31"/>
+          <p:cNvSpPr txBox="1"/>
+          <p:nvPr/>
+        </p:nvSpPr>
+        <p:spPr>
+          <a:xfrm>
+            <a:off x="8302752" y="2304288"/>
+            <a:ext cx="3154680" cy="292608"/>
+          </a:xfrm>
+          <a:prstGeom prst="rect">
+            <a:avLst/>
+          </a:prstGeom>
+          <a:noFill/>
+        </p:spPr>
+        <p:txBody>
+          <a:bodyPr wrap="square">
             <a:spAutoFit/>
           </a:bodyPr>
           <a:lstStyle/>
           <a:p>
-            <a:pPr algn="l">
-              <a:lnSpc>
-                <a:spcPct val="125000"/>
-              </a:lnSpc>
-            </a:pPr>
-            <a:r>
-              <a:rPr sz="1200" b="0" i="0">
+            <a:pPr>
+              <a:lnSpc>
+                <a:spcPct val="115000"/>
+              </a:lnSpc>
+            </a:pPr>
+            <a:r>
+              <a:rPr sz="1050" b="0" i="0">
                 <a:solidFill>
                   <a:srgbClr val="E7F5F4"/>
                 </a:solidFill>
                 <a:latin typeface="Calibri"/>
               </a:rPr>
-              <a:t>sobe stack do zero ·
-seed rodado 2×</a:t>
-            </a:r>
-          </a:p>
-        </p:txBody>
-      </p:sp>
-      <p:sp>
-        <p:nvSpPr>
-          <p:cNvPr id="16" name="Down Arrow 15"/>
+              <a:t>o stack inteiro subindo do zero</a:t>
+            </a:r>
+          </a:p>
+        </p:txBody>
+      </p:sp>
+      <p:sp>
+        <p:nvSpPr>
+          <p:cNvPr id="33" name="TextBox 32"/>
+          <p:cNvSpPr txBox="1"/>
+          <p:nvPr/>
+        </p:nvSpPr>
+        <p:spPr>
+          <a:xfrm>
+            <a:off x="8302752" y="2615184"/>
+            <a:ext cx="3154680" cy="1014984"/>
+          </a:xfrm>
+          <a:prstGeom prst="rect">
+            <a:avLst/>
+          </a:prstGeom>
+          <a:noFill/>
+        </p:spPr>
+        <p:txBody>
+          <a:bodyPr wrap="square">
+            <a:spAutoFit/>
+          </a:bodyPr>
+          <a:lstStyle/>
+          <a:p>
+            <a:pPr>
+              <a:lnSpc>
+                <a:spcPct val="130000"/>
+              </a:lnSpc>
+            </a:pPr>
+            <a:r>
+              <a:rPr sz="1150" b="0" i="0">
+                <a:solidFill>
+                  <a:srgbClr val="E7F5F4"/>
+                </a:solidFill>
+                <a:latin typeface="Calibri"/>
+              </a:rPr>
+              <a:t>•  compose config --quiet</a:t>
+            </a:r>
+          </a:p>
+          <a:p>
+            <a:pPr>
+              <a:lnSpc>
+                <a:spcPct val="130000"/>
+              </a:lnSpc>
+            </a:pPr>
+            <a:r>
+              <a:rPr sz="1150" b="0" i="0">
+                <a:solidFill>
+                  <a:srgbClr val="E7F5F4"/>
+                </a:solidFill>
+                <a:latin typeface="Calibri"/>
+              </a:rPr>
+              <a:t>•  up --build + curl /health</a:t>
+            </a:r>
+          </a:p>
+          <a:p>
+            <a:pPr>
+              <a:lnSpc>
+                <a:spcPct val="130000"/>
+              </a:lnSpc>
+            </a:pPr>
+            <a:r>
+              <a:rPr sz="1150" b="0" i="0">
+                <a:solidFill>
+                  <a:srgbClr val="E7F5F4"/>
+                </a:solidFill>
+                <a:latin typeface="Calibri"/>
+              </a:rPr>
+              <a:t>•  alembic upgrade + alembic current</a:t>
+            </a:r>
+          </a:p>
+          <a:p>
+            <a:pPr>
+              <a:lnSpc>
+                <a:spcPct val="130000"/>
+              </a:lnSpc>
+            </a:pPr>
+            <a:r>
+              <a:rPr sz="1150" b="0" i="0">
+                <a:solidFill>
+                  <a:srgbClr val="E7F5F4"/>
+                </a:solidFill>
+                <a:latin typeface="Calibri"/>
+              </a:rPr>
+              <a:t>•  seed × 2 → idempotência (ADR-004)</a:t>
+            </a:r>
+          </a:p>
+        </p:txBody>
+      </p:sp>
+      <p:cxnSp>
+        <p:nvCxnSpPr>
+          <p:cNvPr id="34" name="Connector 33"/>
+          <p:cNvCxnSpPr/>
+          <p:nvPr/>
+        </p:nvCxnSpPr>
+        <p:spPr>
+          <a:xfrm>
+            <a:off x="2308860" y="3730752"/>
+            <a:ext cx="0" cy="310896"/>
+          </a:xfrm>
+          <a:prstGeom prst="line">
+            <a:avLst/>
+          </a:prstGeom>
+          <a:ln w="19050">
+            <a:solidFill>
+              <a:srgbClr val="B1D1CF"/>
+            </a:solidFill>
+          </a:ln>
+        </p:spPr>
+        <p:style>
+          <a:lnRef idx="2">
+            <a:schemeClr val="accent1"/>
+          </a:lnRef>
+          <a:fillRef idx="0">
+            <a:schemeClr val="accent1"/>
+          </a:fillRef>
+          <a:effectRef idx="1">
+            <a:schemeClr val="accent1"/>
+          </a:effectRef>
+          <a:fontRef idx="minor">
+            <a:schemeClr val="tx1"/>
+          </a:fontRef>
+        </p:style>
+      </p:cxnSp>
+      <p:cxnSp>
+        <p:nvCxnSpPr>
+          <p:cNvPr id="35" name="Connector 34"/>
+          <p:cNvCxnSpPr/>
+          <p:nvPr/>
+        </p:nvCxnSpPr>
+        <p:spPr>
+          <a:xfrm>
+            <a:off x="6094476" y="3730752"/>
+            <a:ext cx="0" cy="310896"/>
+          </a:xfrm>
+          <a:prstGeom prst="line">
+            <a:avLst/>
+          </a:prstGeom>
+          <a:ln w="19050">
+            <a:solidFill>
+              <a:srgbClr val="B1D1CF"/>
+            </a:solidFill>
+          </a:ln>
+        </p:spPr>
+        <p:style>
+          <a:lnRef idx="2">
+            <a:schemeClr val="accent1"/>
+          </a:lnRef>
+          <a:fillRef idx="0">
+            <a:schemeClr val="accent1"/>
+          </a:fillRef>
+          <a:effectRef idx="1">
+            <a:schemeClr val="accent1"/>
+          </a:effectRef>
+          <a:fontRef idx="minor">
+            <a:schemeClr val="tx1"/>
+          </a:fontRef>
+        </p:style>
+      </p:cxnSp>
+      <p:cxnSp>
+        <p:nvCxnSpPr>
+          <p:cNvPr id="36" name="Connector 35"/>
+          <p:cNvCxnSpPr/>
+          <p:nvPr/>
+        </p:nvCxnSpPr>
+        <p:spPr>
+          <a:xfrm>
+            <a:off x="9880092" y="3730752"/>
+            <a:ext cx="0" cy="310896"/>
+          </a:xfrm>
+          <a:prstGeom prst="line">
+            <a:avLst/>
+          </a:prstGeom>
+          <a:ln w="19050">
+            <a:solidFill>
+              <a:srgbClr val="B1D1CF"/>
+            </a:solidFill>
+          </a:ln>
+        </p:spPr>
+        <p:style>
+          <a:lnRef idx="2">
+            <a:schemeClr val="accent1"/>
+          </a:lnRef>
+          <a:fillRef idx="0">
+            <a:schemeClr val="accent1"/>
+          </a:fillRef>
+          <a:effectRef idx="1">
+            <a:schemeClr val="accent1"/>
+          </a:effectRef>
+          <a:fontRef idx="minor">
+            <a:schemeClr val="tx1"/>
+          </a:fontRef>
+        </p:style>
+      </p:cxnSp>
+      <p:cxnSp>
+        <p:nvCxnSpPr>
+          <p:cNvPr id="37" name="Connector 36"/>
+          <p:cNvCxnSpPr/>
+          <p:nvPr/>
+        </p:nvCxnSpPr>
+        <p:spPr>
+          <a:xfrm>
+            <a:off x="2308860" y="4041648"/>
+            <a:ext cx="7571232" cy="0"/>
+          </a:xfrm>
+          <a:prstGeom prst="line">
+            <a:avLst/>
+          </a:prstGeom>
+          <a:ln w="19050">
+            <a:solidFill>
+              <a:srgbClr val="B1D1CF"/>
+            </a:solidFill>
+          </a:ln>
+        </p:spPr>
+        <p:style>
+          <a:lnRef idx="2">
+            <a:schemeClr val="accent1"/>
+          </a:lnRef>
+          <a:fillRef idx="0">
+            <a:schemeClr val="accent1"/>
+          </a:fillRef>
+          <a:effectRef idx="1">
+            <a:schemeClr val="accent1"/>
+          </a:effectRef>
+          <a:fontRef idx="minor">
+            <a:schemeClr val="tx1"/>
+          </a:fontRef>
+        </p:style>
+      </p:cxnSp>
+      <p:sp>
+        <p:nvSpPr>
+          <p:cNvPr id="38" name="Down Arrow 37"/>
           <p:cNvSpPr/>
           <p:nvPr/>
         </p:nvSpPr>
         <p:spPr>
           <a:xfrm>
-            <a:off x="5120640" y="3429000"/>
-            <a:ext cx="1920240" cy="457200"/>
+            <a:off x="5893308" y="4041648"/>
+            <a:ext cx="402336" cy="384048"/>
           </a:xfrm>
           <a:prstGeom prst="downArrow">
             <a:avLst/>
@@ -16261,14 +16774,14 @@
       </p:sp>
       <p:sp>
         <p:nvSpPr>
-          <p:cNvPr id="17" name="Rounded Rectangle 16"/>
+          <p:cNvPr id="39" name="Rounded Rectangle 38"/>
           <p:cNvSpPr/>
           <p:nvPr/>
         </p:nvSpPr>
         <p:spPr>
           <a:xfrm>
-            <a:off x="3291840" y="3977639"/>
-            <a:ext cx="5577840" cy="777240"/>
+            <a:off x="2788920" y="4443984"/>
+            <a:ext cx="6611112" cy="868680"/>
           </a:xfrm>
           <a:prstGeom prst="roundRect">
             <a:avLst/>
@@ -16305,53 +16818,14 @@
       </p:sp>
       <p:sp>
         <p:nvSpPr>
-          <p:cNvPr id="18" name="TextBox 17"/>
-          <p:cNvSpPr txBox="1"/>
-          <p:nvPr/>
-        </p:nvSpPr>
-        <p:spPr>
-          <a:xfrm>
-            <a:off x="3291840" y="4023360"/>
-            <a:ext cx="5577840" cy="685800"/>
-          </a:xfrm>
-          <a:prstGeom prst="rect">
-            <a:avLst/>
-          </a:prstGeom>
-          <a:noFill/>
-        </p:spPr>
-        <p:txBody>
-          <a:bodyPr wrap="square" anchor="ctr">
-            <a:spAutoFit/>
-          </a:bodyPr>
-          <a:lstStyle/>
-          <a:p>
-            <a:pPr algn="ctr">
-              <a:lnSpc>
-                <a:spcPct val="115000"/>
-              </a:lnSpc>
-            </a:pPr>
-            <a:r>
-              <a:rPr sz="1400" b="1" i="0">
-                <a:solidFill>
-                  <a:srgbClr val="FFFFFF"/>
-                </a:solidFill>
-                <a:latin typeface="Calibri"/>
-              </a:rPr>
-              <a:t>quality-gate — required status check de main e develop</a:t>
-            </a:r>
-          </a:p>
-        </p:txBody>
-      </p:sp>
-      <p:sp>
-        <p:nvSpPr>
-          <p:cNvPr id="19" name="TextBox 18"/>
-          <p:cNvSpPr txBox="1"/>
-          <p:nvPr/>
-        </p:nvSpPr>
-        <p:spPr>
-          <a:xfrm>
-            <a:off x="548640" y="5029200"/>
-            <a:ext cx="10972800" cy="1280160"/>
+          <p:cNvPr id="40" name="TextBox 39"/>
+          <p:cNvSpPr txBox="1"/>
+          <p:nvPr/>
+        </p:nvSpPr>
+        <p:spPr>
+          <a:xfrm>
+            <a:off x="2971800" y="4544568"/>
+            <a:ext cx="6245352" cy="347472"/>
           </a:xfrm>
           <a:prstGeom prst="rect">
             <a:avLst/>
@@ -16364,80 +16838,175 @@
           </a:bodyPr>
           <a:lstStyle/>
           <a:p>
+            <a:pPr algn="ctr">
+              <a:lnSpc>
+                <a:spcPct val="115000"/>
+              </a:lnSpc>
+            </a:pPr>
+            <a:r>
+              <a:rPr sz="1400" b="1" i="0">
+                <a:solidFill>
+                  <a:srgbClr val="FFFFFF"/>
+                </a:solidFill>
+                <a:latin typeface="Calibri"/>
+              </a:rPr>
+              <a:t>quality-gate — required status check de main e develop</a:t>
+            </a:r>
+          </a:p>
+        </p:txBody>
+      </p:sp>
+      <p:sp>
+        <p:nvSpPr>
+          <p:cNvPr id="41" name="TextBox 40"/>
+          <p:cNvSpPr txBox="1"/>
+          <p:nvPr/>
+        </p:nvSpPr>
+        <p:spPr>
+          <a:xfrm>
+            <a:off x="2971800" y="4901184"/>
+            <a:ext cx="6245352" cy="292608"/>
+          </a:xfrm>
+          <a:prstGeom prst="rect">
+            <a:avLst/>
+          </a:prstGeom>
+          <a:noFill/>
+        </p:spPr>
+        <p:txBody>
+          <a:bodyPr wrap="square">
+            <a:spAutoFit/>
+          </a:bodyPr>
+          <a:lstStyle/>
+          <a:p>
+            <a:pPr algn="ctr">
+              <a:lnSpc>
+                <a:spcPct val="115000"/>
+              </a:lnSpc>
+            </a:pPr>
+            <a:r>
+              <a:rPr sz="1100" b="0" i="0">
+                <a:solidFill>
+                  <a:srgbClr val="B1D1CF"/>
+                </a:solidFill>
+                <a:latin typeface="Calibri"/>
+              </a:rPr>
+              <a:t>needs: [backend, frontend, docker]  ·  if: always()</a:t>
+            </a:r>
+          </a:p>
+        </p:txBody>
+      </p:sp>
+      <p:sp>
+        <p:nvSpPr>
+          <p:cNvPr id="42" name="Rounded Rectangle 41"/>
+          <p:cNvSpPr/>
+          <p:nvPr/>
+        </p:nvSpPr>
+        <p:spPr>
+          <a:xfrm>
+            <a:off x="548640" y="5440680"/>
+            <a:ext cx="11091672" cy="749808"/>
+          </a:xfrm>
+          <a:prstGeom prst="roundRect">
+            <a:avLst/>
+          </a:prstGeom>
+          <a:solidFill>
+            <a:srgbClr val="E7F5F4"/>
+          </a:solidFill>
+          <a:ln>
+            <a:noFill/>
+          </a:ln>
+          <a:effectLst/>
+        </p:spPr>
+        <p:style>
+          <a:lnRef idx="1">
+            <a:schemeClr val="accent1"/>
+          </a:lnRef>
+          <a:fillRef idx="3">
+            <a:schemeClr val="accent1"/>
+          </a:fillRef>
+          <a:effectRef idx="2">
+            <a:schemeClr val="accent1"/>
+          </a:effectRef>
+          <a:fontRef idx="minor">
+            <a:schemeClr val="lt1"/>
+          </a:fontRef>
+        </p:style>
+        <p:txBody>
+          <a:bodyPr rtlCol="0" anchor="ctr"/>
+          <a:lstStyle/>
+          <a:p>
+            <a:pPr algn="ctr"/>
+          </a:p>
+        </p:txBody>
+      </p:sp>
+      <p:sp>
+        <p:nvSpPr>
+          <p:cNvPr id="43" name="TextBox 42"/>
+          <p:cNvSpPr txBox="1"/>
+          <p:nvPr/>
+        </p:nvSpPr>
+        <p:spPr>
+          <a:xfrm>
+            <a:off x="822960" y="5504688"/>
+            <a:ext cx="10561320" cy="640080"/>
+          </a:xfrm>
+          <a:prstGeom prst="rect">
+            <a:avLst/>
+          </a:prstGeom>
+          <a:noFill/>
+        </p:spPr>
+        <p:txBody>
+          <a:bodyPr wrap="square">
+            <a:spAutoFit/>
+          </a:bodyPr>
+          <a:lstStyle/>
+          <a:p>
             <a:pPr>
               <a:lnSpc>
-                <a:spcPct val="112000"/>
-              </a:lnSpc>
-              <a:spcAft>
-                <a:spcPts val="1000"/>
-              </a:spcAft>
-            </a:pPr>
-            <a:r>
-              <a:rPr sz="1350">
+                <a:spcPct val="115000"/>
+              </a:lnSpc>
+            </a:pPr>
+            <a:r>
+              <a:rPr sz="1150" b="1" i="0">
+                <a:solidFill>
+                  <a:srgbClr val="212529"/>
+                </a:solidFill>
+                <a:latin typeface="Calibri"/>
+              </a:rPr>
+              <a:t>Um portão, não três: </a:t>
+            </a:r>
+            <a:r>
+              <a:rPr sz="1150" b="0" i="0">
                 <a:solidFill>
                   <a:srgbClr val="495257"/>
                 </a:solidFill>
                 <a:latin typeface="Calibri"/>
               </a:rPr>
-              <a:t>•  Sem o quality-gate como required check, a proteção de ramo é decorativa — é ele que de fato impede merge de código quebrado</a:t>
+              <a:t>a proteção de ramo exige um único check; se um job novo entrar no pipeline, basta somá-lo ao needs.</a:t>
             </a:r>
           </a:p>
           <a:p>
             <a:pPr>
               <a:lnSpc>
-                <a:spcPct val="112000"/>
-              </a:lnSpc>
-              <a:spcAft>
-                <a:spcPts val="1000"/>
-              </a:spcAft>
-            </a:pPr>
-            <a:r>
-              <a:rPr sz="1350">
+                <a:spcPct val="115000"/>
+              </a:lnSpc>
+            </a:pPr>
+            <a:r>
+              <a:rPr sz="1150" b="1" i="0">
+                <a:solidFill>
+                  <a:srgbClr val="212529"/>
+                </a:solidFill>
+                <a:latin typeface="Calibri"/>
+              </a:rPr>
+              <a:t>Sem esse required check a proteção de ramo é decorativa: </a:t>
+            </a:r>
+            <a:r>
+              <a:rPr sz="1150" b="0" i="0">
                 <a:solidFill>
                   <a:srgbClr val="495257"/>
                 </a:solidFill>
                 <a:latin typeface="Calibri"/>
               </a:rPr>
-              <a:t>•  O seed rodar 2× no job docker não é redundância: é o teste da idempotência prometida no ADR-004</a:t>
-            </a:r>
-          </a:p>
-        </p:txBody>
-      </p:sp>
-      <p:sp>
-        <p:nvSpPr>
-          <p:cNvPr id="20" name="TextBox 19"/>
-          <p:cNvSpPr txBox="1"/>
-          <p:nvPr/>
-        </p:nvSpPr>
-        <p:spPr>
-          <a:xfrm>
-            <a:off x="548640" y="6473952"/>
-            <a:ext cx="8229600" cy="320040"/>
-          </a:xfrm>
-          <a:prstGeom prst="rect">
-            <a:avLst/>
-          </a:prstGeom>
-          <a:noFill/>
-        </p:spPr>
-        <p:txBody>
-          <a:bodyPr wrap="square" anchor="t">
-            <a:spAutoFit/>
-          </a:bodyPr>
-          <a:lstStyle/>
-          <a:p>
-            <a:pPr algn="l">
-              <a:lnSpc>
-                <a:spcPct val="115000"/>
-              </a:lnSpc>
-            </a:pPr>
-            <a:r>
-              <a:rPr sz="1000" b="0" i="0">
-                <a:solidFill>
-                  <a:srgbClr val="8A9399"/>
-                </a:solidFill>
-                <a:latin typeface="Calibri"/>
-              </a:rPr>
-              <a:t>Clínica Médica MVP · Equipe 01 · AV2 Engenharia de Software Moderna</a:t>
+              <a:t>é ele que de fato impede o merge de código quebrado.</a:t>
             </a:r>
           </a:p>
         </p:txBody>
@@ -16456,7 +17025,7 @@
     <p:bg>
       <p:bgPr>
         <a:solidFill>
-          <a:srgbClr val="12635F"/>
+          <a:srgbClr val="FFFFFF"/>
         </a:solidFill>
         <a:effectLst/>
       </p:bgPr>
@@ -16483,6 +17052,808 @@
             <a:avLst/>
           </a:prstGeom>
           <a:solidFill>
+            <a:srgbClr val="28726F"/>
+          </a:solidFill>
+          <a:ln>
+            <a:noFill/>
+          </a:ln>
+          <a:effectLst/>
+        </p:spPr>
+        <p:style>
+          <a:lnRef idx="1">
+            <a:schemeClr val="accent1"/>
+          </a:lnRef>
+          <a:fillRef idx="3">
+            <a:schemeClr val="accent1"/>
+          </a:fillRef>
+          <a:effectRef idx="2">
+            <a:schemeClr val="accent1"/>
+          </a:effectRef>
+          <a:fontRef idx="minor">
+            <a:schemeClr val="lt1"/>
+          </a:fontRef>
+        </p:style>
+        <p:txBody>
+          <a:bodyPr rtlCol="0" anchor="ctr"/>
+          <a:lstStyle/>
+          <a:p>
+            <a:pPr algn="ctr"/>
+          </a:p>
+        </p:txBody>
+      </p:sp>
+      <p:sp>
+        <p:nvSpPr>
+          <p:cNvPr id="3" name="TextBox 2"/>
+          <p:cNvSpPr txBox="1"/>
+          <p:nvPr/>
+        </p:nvSpPr>
+        <p:spPr>
+          <a:xfrm>
+            <a:off x="548640" y="292608"/>
+            <a:ext cx="9144000" cy="320040"/>
+          </a:xfrm>
+          <a:prstGeom prst="rect">
+            <a:avLst/>
+          </a:prstGeom>
+          <a:noFill/>
+        </p:spPr>
+        <p:txBody>
+          <a:bodyPr wrap="square" anchor="t">
+            <a:spAutoFit/>
+          </a:bodyPr>
+          <a:lstStyle/>
+          <a:p>
+            <a:pPr algn="l">
+              <a:lnSpc>
+                <a:spcPct val="115000"/>
+              </a:lnSpc>
+            </a:pPr>
+            <a:r>
+              <a:rPr sz="1300" b="1" i="0">
+                <a:solidFill>
+                  <a:srgbClr val="44938F"/>
+                </a:solidFill>
+                <a:latin typeface="Calibri"/>
+              </a:rPr>
+              <a:t>INTEGRAÇÃO CONTÍNUA · 2/2</a:t>
+            </a:r>
+          </a:p>
+        </p:txBody>
+      </p:sp>
+      <p:sp>
+        <p:nvSpPr>
+          <p:cNvPr id="4" name="TextBox 3"/>
+          <p:cNvSpPr txBox="1"/>
+          <p:nvPr/>
+        </p:nvSpPr>
+        <p:spPr>
+          <a:xfrm>
+            <a:off x="548640" y="566928"/>
+            <a:ext cx="10515600" cy="822960"/>
+          </a:xfrm>
+          <a:prstGeom prst="rect">
+            <a:avLst/>
+          </a:prstGeom>
+          <a:noFill/>
+        </p:spPr>
+        <p:txBody>
+          <a:bodyPr wrap="square" anchor="t">
+            <a:spAutoFit/>
+          </a:bodyPr>
+          <a:lstStyle/>
+          <a:p>
+            <a:pPr algn="l">
+              <a:lnSpc>
+                <a:spcPct val="115000"/>
+              </a:lnSpc>
+            </a:pPr>
+            <a:r>
+              <a:rPr sz="3000" b="1" i="0">
+                <a:solidFill>
+                  <a:srgbClr val="212529"/>
+                </a:solidFill>
+                <a:latin typeface="Calibri"/>
+              </a:rPr>
+              <a:t>O gate provado — o vermelho que virou verde</a:t>
+            </a:r>
+          </a:p>
+        </p:txBody>
+      </p:sp>
+      <p:sp>
+        <p:nvSpPr>
+          <p:cNvPr id="5" name="Rectangle 4"/>
+          <p:cNvSpPr/>
+          <p:nvPr/>
+        </p:nvSpPr>
+        <p:spPr>
+          <a:xfrm>
+            <a:off x="548640" y="1280160"/>
+            <a:ext cx="1005840" cy="44450"/>
+          </a:xfrm>
+          <a:prstGeom prst="rect">
+            <a:avLst/>
+          </a:prstGeom>
+          <a:solidFill>
+            <a:srgbClr val="28726F"/>
+          </a:solidFill>
+          <a:ln>
+            <a:noFill/>
+          </a:ln>
+          <a:effectLst/>
+        </p:spPr>
+        <p:style>
+          <a:lnRef idx="1">
+            <a:schemeClr val="accent1"/>
+          </a:lnRef>
+          <a:fillRef idx="3">
+            <a:schemeClr val="accent1"/>
+          </a:fillRef>
+          <a:effectRef idx="2">
+            <a:schemeClr val="accent1"/>
+          </a:effectRef>
+          <a:fontRef idx="minor">
+            <a:schemeClr val="lt1"/>
+          </a:fontRef>
+        </p:style>
+        <p:txBody>
+          <a:bodyPr rtlCol="0" anchor="ctr"/>
+          <a:lstStyle/>
+          <a:p>
+            <a:pPr algn="ctr"/>
+          </a:p>
+        </p:txBody>
+      </p:sp>
+      <p:sp>
+        <p:nvSpPr>
+          <p:cNvPr id="6" name="TextBox 5"/>
+          <p:cNvSpPr txBox="1"/>
+          <p:nvPr/>
+        </p:nvSpPr>
+        <p:spPr>
+          <a:xfrm>
+            <a:off x="11247120" y="6473952"/>
+            <a:ext cx="640080" cy="320040"/>
+          </a:xfrm>
+          <a:prstGeom prst="rect">
+            <a:avLst/>
+          </a:prstGeom>
+          <a:noFill/>
+        </p:spPr>
+        <p:txBody>
+          <a:bodyPr wrap="square" anchor="t">
+            <a:spAutoFit/>
+          </a:bodyPr>
+          <a:lstStyle/>
+          <a:p>
+            <a:pPr algn="r">
+              <a:lnSpc>
+                <a:spcPct val="115000"/>
+              </a:lnSpc>
+            </a:pPr>
+            <a:r>
+              <a:rPr sz="1100" b="0" i="0">
+                <a:solidFill>
+                  <a:srgbClr val="8A9399"/>
+                </a:solidFill>
+                <a:latin typeface="Calibri"/>
+              </a:rPr>
+              <a:t>19</a:t>
+            </a:r>
+          </a:p>
+        </p:txBody>
+      </p:sp>
+      <p:sp>
+        <p:nvSpPr>
+          <p:cNvPr id="20" name="TextBox 19"/>
+          <p:cNvSpPr txBox="1"/>
+          <p:nvPr/>
+        </p:nvSpPr>
+        <p:spPr>
+          <a:xfrm>
+            <a:off x="548640" y="6473952"/>
+            <a:ext cx="8229600" cy="320040"/>
+          </a:xfrm>
+          <a:prstGeom prst="rect">
+            <a:avLst/>
+          </a:prstGeom>
+          <a:noFill/>
+        </p:spPr>
+        <p:txBody>
+          <a:bodyPr wrap="square" anchor="t">
+            <a:spAutoFit/>
+          </a:bodyPr>
+          <a:lstStyle/>
+          <a:p>
+            <a:pPr algn="l">
+              <a:lnSpc>
+                <a:spcPct val="115000"/>
+              </a:lnSpc>
+            </a:pPr>
+            <a:r>
+              <a:rPr sz="1000" b="0" i="0">
+                <a:solidFill>
+                  <a:srgbClr val="8A9399"/>
+                </a:solidFill>
+                <a:latin typeface="Calibri"/>
+              </a:rPr>
+              <a:t>Clínica Médica MVP · Equipe 01 · AV2 Engenharia de Software Moderna</a:t>
+            </a:r>
+          </a:p>
+        </p:txBody>
+      </p:sp>
+      <p:sp>
+        <p:nvSpPr>
+          <p:cNvPr id="21" name="TextBox 20"/>
+          <p:cNvSpPr txBox="1"/>
+          <p:nvPr/>
+        </p:nvSpPr>
+        <p:spPr>
+          <a:xfrm>
+            <a:off x="548640" y="1444752"/>
+            <a:ext cx="11091672" cy="365760"/>
+          </a:xfrm>
+          <a:prstGeom prst="rect">
+            <a:avLst/>
+          </a:prstGeom>
+          <a:noFill/>
+        </p:spPr>
+        <p:txBody>
+          <a:bodyPr wrap="square">
+            <a:spAutoFit/>
+          </a:bodyPr>
+          <a:lstStyle/>
+          <a:p>
+            <a:pPr>
+              <a:lnSpc>
+                <a:spcPct val="115000"/>
+              </a:lnSpc>
+            </a:pPr>
+            <a:r>
+              <a:rPr sz="1400" b="1" i="0">
+                <a:solidFill>
+                  <a:srgbClr val="212529"/>
+                </a:solidFill>
+                <a:latin typeface="Calibri"/>
+              </a:rPr>
+              <a:t>Evidência IF03 · 03/08/2026 · JoaoVitorML-BR — </a:t>
+            </a:r>
+            <a:r>
+              <a:rPr sz="1400" b="0" i="0">
+                <a:solidFill>
+                  <a:srgbClr val="495257"/>
+                </a:solidFill>
+                <a:latin typeface="Calibri"/>
+              </a:rPr>
+              <a:t>a falha foi provocada de propósito: print de PR bloqueado prova mais que print de PR verde.</a:t>
+            </a:r>
+          </a:p>
+        </p:txBody>
+      </p:sp>
+      <p:sp>
+        <p:nvSpPr>
+          <p:cNvPr id="22" name="Rounded Rectangle 21"/>
+          <p:cNvSpPr/>
+          <p:nvPr/>
+        </p:nvSpPr>
+        <p:spPr>
+          <a:xfrm>
+            <a:off x="548640" y="1938528"/>
+            <a:ext cx="3438144" cy="1737360"/>
+          </a:xfrm>
+          <a:prstGeom prst="roundRect">
+            <a:avLst/>
+          </a:prstGeom>
+          <a:solidFill>
+            <a:srgbClr val="C92A2A"/>
+          </a:solidFill>
+          <a:ln>
+            <a:noFill/>
+          </a:ln>
+          <a:effectLst/>
+        </p:spPr>
+        <p:style>
+          <a:lnRef idx="1">
+            <a:schemeClr val="accent1"/>
+          </a:lnRef>
+          <a:fillRef idx="3">
+            <a:schemeClr val="accent1"/>
+          </a:fillRef>
+          <a:effectRef idx="2">
+            <a:schemeClr val="accent1"/>
+          </a:effectRef>
+          <a:fontRef idx="minor">
+            <a:schemeClr val="lt1"/>
+          </a:fontRef>
+        </p:style>
+        <p:txBody>
+          <a:bodyPr rtlCol="0" anchor="ctr"/>
+          <a:lstStyle/>
+          <a:p>
+            <a:pPr algn="ctr"/>
+          </a:p>
+        </p:txBody>
+      </p:sp>
+      <p:sp>
+        <p:nvSpPr>
+          <p:cNvPr id="23" name="TextBox 22"/>
+          <p:cNvSpPr txBox="1"/>
+          <p:nvPr/>
+        </p:nvSpPr>
+        <p:spPr>
+          <a:xfrm>
+            <a:off x="731520" y="2011680"/>
+            <a:ext cx="3072384" cy="347472"/>
+          </a:xfrm>
+          <a:prstGeom prst="rect">
+            <a:avLst/>
+          </a:prstGeom>
+          <a:noFill/>
+        </p:spPr>
+        <p:txBody>
+          <a:bodyPr wrap="square">
+            <a:spAutoFit/>
+          </a:bodyPr>
+          <a:lstStyle/>
+          <a:p>
+            <a:pPr>
+              <a:lnSpc>
+                <a:spcPct val="115000"/>
+              </a:lnSpc>
+            </a:pPr>
+            <a:r>
+              <a:rPr sz="1400" b="1" i="0">
+                <a:solidFill>
+                  <a:srgbClr val="FFFFFF"/>
+                </a:solidFill>
+                <a:latin typeface="Calibri"/>
+              </a:rPr>
+              <a:t>PR #21 · reprovado</a:t>
+            </a:r>
+          </a:p>
+        </p:txBody>
+      </p:sp>
+      <p:sp>
+        <p:nvSpPr>
+          <p:cNvPr id="24" name="TextBox 23"/>
+          <p:cNvSpPr txBox="1"/>
+          <p:nvPr/>
+        </p:nvSpPr>
+        <p:spPr>
+          <a:xfrm>
+            <a:off x="731520" y="2414016"/>
+            <a:ext cx="3072384" cy="960120"/>
+          </a:xfrm>
+          <a:prstGeom prst="rect">
+            <a:avLst/>
+          </a:prstGeom>
+          <a:noFill/>
+        </p:spPr>
+        <p:txBody>
+          <a:bodyPr wrap="square">
+            <a:spAutoFit/>
+          </a:bodyPr>
+          <a:lstStyle/>
+          <a:p>
+            <a:pPr>
+              <a:lnSpc>
+                <a:spcPct val="130000"/>
+              </a:lnSpc>
+            </a:pPr>
+            <a:r>
+              <a:rPr sz="1050" b="0" i="0">
+                <a:solidFill>
+                  <a:srgbClr val="E7F5F4"/>
+                </a:solidFill>
+                <a:latin typeface="Calibri"/>
+              </a:rPr>
+              <a:t>•  Frontend (Next.js + Vitest) vermelho</a:t>
+            </a:r>
+          </a:p>
+          <a:p>
+            <a:pPr>
+              <a:lnSpc>
+                <a:spcPct val="130000"/>
+              </a:lnSpc>
+            </a:pPr>
+            <a:r>
+              <a:rPr sz="1050" b="0" i="0">
+                <a:solidFill>
+                  <a:srgbClr val="E7F5F4"/>
+                </a:solidFill>
+                <a:latin typeface="Calibri"/>
+              </a:rPr>
+              <a:t>•  AssertionError em login.test.tsx (L74)</a:t>
+            </a:r>
+          </a:p>
+          <a:p>
+            <a:pPr>
+              <a:lnSpc>
+                <a:spcPct val="130000"/>
+              </a:lnSpc>
+            </a:pPr>
+            <a:r>
+              <a:rPr sz="1050" b="0" i="0">
+                <a:solidFill>
+                  <a:srgbClr val="E7F5F4"/>
+                </a:solidFill>
+                <a:latin typeface="Calibri"/>
+              </a:rPr>
+              <a:t>•  4 errors e 3 warnings nas annotations</a:t>
+            </a:r>
+          </a:p>
+          <a:p>
+            <a:pPr>
+              <a:lnSpc>
+                <a:spcPct val="130000"/>
+              </a:lnSpc>
+            </a:pPr>
+            <a:r>
+              <a:rPr sz="1050" b="0" i="0">
+                <a:solidFill>
+                  <a:srgbClr val="E7F5F4"/>
+                </a:solidFill>
+                <a:latin typeface="Calibri"/>
+              </a:rPr>
+              <a:t>•  Quality Gate vermelho → merge bloqueado</a:t>
+            </a:r>
+          </a:p>
+        </p:txBody>
+      </p:sp>
+      <p:sp>
+        <p:nvSpPr>
+          <p:cNvPr id="25" name="Rounded Rectangle 24"/>
+          <p:cNvSpPr/>
+          <p:nvPr/>
+        </p:nvSpPr>
+        <p:spPr>
+          <a:xfrm>
+            <a:off x="4370832" y="1938528"/>
+            <a:ext cx="3438144" cy="1737360"/>
+          </a:xfrm>
+          <a:prstGeom prst="roundRect">
+            <a:avLst/>
+          </a:prstGeom>
+          <a:solidFill>
+            <a:srgbClr val="44938F"/>
+          </a:solidFill>
+          <a:ln>
+            <a:noFill/>
+          </a:ln>
+          <a:effectLst/>
+        </p:spPr>
+        <p:style>
+          <a:lnRef idx="1">
+            <a:schemeClr val="accent1"/>
+          </a:lnRef>
+          <a:fillRef idx="3">
+            <a:schemeClr val="accent1"/>
+          </a:fillRef>
+          <a:effectRef idx="2">
+            <a:schemeClr val="accent1"/>
+          </a:effectRef>
+          <a:fontRef idx="minor">
+            <a:schemeClr val="lt1"/>
+          </a:fontRef>
+        </p:style>
+        <p:txBody>
+          <a:bodyPr rtlCol="0" anchor="ctr"/>
+          <a:lstStyle/>
+          <a:p>
+            <a:pPr algn="ctr"/>
+          </a:p>
+        </p:txBody>
+      </p:sp>
+      <p:sp>
+        <p:nvSpPr>
+          <p:cNvPr id="26" name="TextBox 25"/>
+          <p:cNvSpPr txBox="1"/>
+          <p:nvPr/>
+        </p:nvSpPr>
+        <p:spPr>
+          <a:xfrm>
+            <a:off x="4553712" y="2011680"/>
+            <a:ext cx="3072384" cy="347472"/>
+          </a:xfrm>
+          <a:prstGeom prst="rect">
+            <a:avLst/>
+          </a:prstGeom>
+          <a:noFill/>
+        </p:spPr>
+        <p:txBody>
+          <a:bodyPr wrap="square">
+            <a:spAutoFit/>
+          </a:bodyPr>
+          <a:lstStyle/>
+          <a:p>
+            <a:pPr>
+              <a:lnSpc>
+                <a:spcPct val="115000"/>
+              </a:lnSpc>
+            </a:pPr>
+            <a:r>
+              <a:rPr sz="1400" b="1" i="0">
+                <a:solidFill>
+                  <a:srgbClr val="FFFFFF"/>
+                </a:solidFill>
+                <a:latin typeface="Calibri"/>
+              </a:rPr>
+              <a:t>Correção na mesma branch</a:t>
+            </a:r>
+          </a:p>
+        </p:txBody>
+      </p:sp>
+      <p:sp>
+        <p:nvSpPr>
+          <p:cNvPr id="27" name="TextBox 26"/>
+          <p:cNvSpPr txBox="1"/>
+          <p:nvPr/>
+        </p:nvSpPr>
+        <p:spPr>
+          <a:xfrm>
+            <a:off x="4553712" y="2414016"/>
+            <a:ext cx="3072384" cy="960120"/>
+          </a:xfrm>
+          <a:prstGeom prst="rect">
+            <a:avLst/>
+          </a:prstGeom>
+          <a:noFill/>
+        </p:spPr>
+        <p:txBody>
+          <a:bodyPr wrap="square">
+            <a:spAutoFit/>
+          </a:bodyPr>
+          <a:lstStyle/>
+          <a:p>
+            <a:pPr>
+              <a:lnSpc>
+                <a:spcPct val="130000"/>
+              </a:lnSpc>
+            </a:pPr>
+            <a:r>
+              <a:rPr sz="1050" b="0" i="0">
+                <a:solidFill>
+                  <a:srgbClr val="E7F5F4"/>
+                </a:solidFill>
+                <a:latin typeface="Calibri"/>
+              </a:rPr>
+              <a:t>•  feature/us02-tela-medicos, sync #62</a:t>
+            </a:r>
+          </a:p>
+          <a:p>
+            <a:pPr>
+              <a:lnSpc>
+                <a:spcPct val="130000"/>
+              </a:lnSpc>
+            </a:pPr>
+            <a:r>
+              <a:rPr sz="1050" b="0" i="0">
+                <a:solidFill>
+                  <a:srgbClr val="E7F5F4"/>
+                </a:solidFill>
+                <a:latin typeface="Calibri"/>
+              </a:rPr>
+              <a:t>•  o push re-dispara o pipeline inteiro</a:t>
+            </a:r>
+          </a:p>
+          <a:p>
+            <a:pPr>
+              <a:lnSpc>
+                <a:spcPct val="130000"/>
+              </a:lnSpc>
+            </a:pPr>
+            <a:r>
+              <a:rPr sz="1050" b="0" i="0">
+                <a:solidFill>
+                  <a:srgbClr val="E7F5F4"/>
+                </a:solidFill>
+                <a:latin typeface="Calibri"/>
+              </a:rPr>
+              <a:t>•  nada é liberado por aprovação manual</a:t>
+            </a:r>
+          </a:p>
+          <a:p>
+            <a:pPr>
+              <a:lnSpc>
+                <a:spcPct val="130000"/>
+              </a:lnSpc>
+            </a:pPr>
+            <a:r>
+              <a:rPr sz="1050" b="0" i="0">
+                <a:solidFill>
+                  <a:srgbClr val="E7F5F4"/>
+                </a:solidFill>
+                <a:latin typeface="Calibri"/>
+              </a:rPr>
+              <a:t>•  o gate não aceita override do autor</a:t>
+            </a:r>
+          </a:p>
+        </p:txBody>
+      </p:sp>
+      <p:sp>
+        <p:nvSpPr>
+          <p:cNvPr id="28" name="Rounded Rectangle 27"/>
+          <p:cNvSpPr/>
+          <p:nvPr/>
+        </p:nvSpPr>
+        <p:spPr>
+          <a:xfrm>
+            <a:off x="8193024" y="1938528"/>
+            <a:ext cx="3438144" cy="1737360"/>
+          </a:xfrm>
+          <a:prstGeom prst="roundRect">
+            <a:avLst/>
+          </a:prstGeom>
+          <a:solidFill>
+            <a:srgbClr val="28726F"/>
+          </a:solidFill>
+          <a:ln>
+            <a:noFill/>
+          </a:ln>
+          <a:effectLst/>
+        </p:spPr>
+        <p:style>
+          <a:lnRef idx="1">
+            <a:schemeClr val="accent1"/>
+          </a:lnRef>
+          <a:fillRef idx="3">
+            <a:schemeClr val="accent1"/>
+          </a:fillRef>
+          <a:effectRef idx="2">
+            <a:schemeClr val="accent1"/>
+          </a:effectRef>
+          <a:fontRef idx="minor">
+            <a:schemeClr val="lt1"/>
+          </a:fontRef>
+        </p:style>
+        <p:txBody>
+          <a:bodyPr rtlCol="0" anchor="ctr"/>
+          <a:lstStyle/>
+          <a:p>
+            <a:pPr algn="ctr"/>
+          </a:p>
+        </p:txBody>
+      </p:sp>
+      <p:sp>
+        <p:nvSpPr>
+          <p:cNvPr id="29" name="TextBox 28"/>
+          <p:cNvSpPr txBox="1"/>
+          <p:nvPr/>
+        </p:nvSpPr>
+        <p:spPr>
+          <a:xfrm>
+            <a:off x="8375904" y="2011680"/>
+            <a:ext cx="3072384" cy="347472"/>
+          </a:xfrm>
+          <a:prstGeom prst="rect">
+            <a:avLst/>
+          </a:prstGeom>
+          <a:noFill/>
+        </p:spPr>
+        <p:txBody>
+          <a:bodyPr wrap="square">
+            <a:spAutoFit/>
+          </a:bodyPr>
+          <a:lstStyle/>
+          <a:p>
+            <a:pPr>
+              <a:lnSpc>
+                <a:spcPct val="115000"/>
+              </a:lnSpc>
+            </a:pPr>
+            <a:r>
+              <a:rPr sz="1400" b="1" i="0">
+                <a:solidFill>
+                  <a:srgbClr val="FFFFFF"/>
+                </a:solidFill>
+                <a:latin typeface="Calibri"/>
+              </a:rPr>
+              <a:t>PR #25 · aprovado</a:t>
+            </a:r>
+          </a:p>
+        </p:txBody>
+      </p:sp>
+      <p:sp>
+        <p:nvSpPr>
+          <p:cNvPr id="30" name="TextBox 29"/>
+          <p:cNvSpPr txBox="1"/>
+          <p:nvPr/>
+        </p:nvSpPr>
+        <p:spPr>
+          <a:xfrm>
+            <a:off x="8375904" y="2414016"/>
+            <a:ext cx="3072384" cy="960120"/>
+          </a:xfrm>
+          <a:prstGeom prst="rect">
+            <a:avLst/>
+          </a:prstGeom>
+          <a:noFill/>
+        </p:spPr>
+        <p:txBody>
+          <a:bodyPr wrap="square">
+            <a:spAutoFit/>
+          </a:bodyPr>
+          <a:lstStyle/>
+          <a:p>
+            <a:pPr>
+              <a:lnSpc>
+                <a:spcPct val="130000"/>
+              </a:lnSpc>
+            </a:pPr>
+            <a:r>
+              <a:rPr sz="1050" b="0" i="0">
+                <a:solidFill>
+                  <a:srgbClr val="E7F5F4"/>
+                </a:solidFill>
+                <a:latin typeface="Calibri"/>
+              </a:rPr>
+              <a:t>•  os 4 jobs verdes na re-execução</a:t>
+            </a:r>
+          </a:p>
+          <a:p>
+            <a:pPr>
+              <a:lnSpc>
+                <a:spcPct val="130000"/>
+              </a:lnSpc>
+            </a:pPr>
+            <a:r>
+              <a:rPr sz="1050" b="0" i="0">
+                <a:solidFill>
+                  <a:srgbClr val="E7F5F4"/>
+                </a:solidFill>
+                <a:latin typeface="Calibri"/>
+              </a:rPr>
+              <a:t>•  Quality Gate verde → merge liberado</a:t>
+            </a:r>
+          </a:p>
+          <a:p>
+            <a:pPr>
+              <a:lnSpc>
+                <a:spcPct val="130000"/>
+              </a:lnSpc>
+            </a:pPr>
+            <a:r>
+              <a:rPr sz="1050" b="0" i="0">
+                <a:solidFill>
+                  <a:srgbClr val="E7F5F4"/>
+                </a:solidFill>
+                <a:latin typeface="Calibri"/>
+              </a:rPr>
+              <a:t>•  restam avisos de Node 20 deprecado</a:t>
+            </a:r>
+          </a:p>
+          <a:p>
+            <a:pPr>
+              <a:lnSpc>
+                <a:spcPct val="130000"/>
+              </a:lnSpc>
+            </a:pPr>
+            <a:r>
+              <a:rPr sz="1050" b="0" i="0">
+                <a:solidFill>
+                  <a:srgbClr val="E7F5F4"/>
+                </a:solidFill>
+                <a:latin typeface="Calibri"/>
+              </a:rPr>
+              <a:t>•  avisos não bloqueiam o pipeline</a:t>
+            </a:r>
+          </a:p>
+        </p:txBody>
+      </p:sp>
+      <p:sp>
+        <p:nvSpPr>
+          <p:cNvPr id="31" name="Right Arrow 30"/>
+          <p:cNvSpPr/>
+          <p:nvPr/>
+        </p:nvSpPr>
+        <p:spPr>
+          <a:xfrm>
+            <a:off x="4078224" y="2688336"/>
+            <a:ext cx="201168" cy="237744"/>
+          </a:xfrm>
+          <a:prstGeom prst="rightArrow">
+            <a:avLst/>
+          </a:prstGeom>
+          <a:solidFill>
             <a:srgbClr val="B1D1CF"/>
           </a:solidFill>
           <a:ln>
@@ -16514,92 +17885,58 @@
       </p:sp>
       <p:sp>
         <p:nvSpPr>
-          <p:cNvPr id="3" name="TextBox 2"/>
-          <p:cNvSpPr txBox="1"/>
-          <p:nvPr/>
-        </p:nvSpPr>
-        <p:spPr>
-          <a:xfrm>
-            <a:off x="548640" y="457200"/>
-            <a:ext cx="9144000" cy="365760"/>
-          </a:xfrm>
-          <a:prstGeom prst="rect">
-            <a:avLst/>
-          </a:prstGeom>
-          <a:noFill/>
-        </p:spPr>
-        <p:txBody>
-          <a:bodyPr wrap="square" anchor="t">
-            <a:spAutoFit/>
-          </a:bodyPr>
-          <a:lstStyle/>
-          <a:p>
-            <a:pPr algn="l">
-              <a:lnSpc>
-                <a:spcPct val="115000"/>
-              </a:lnSpc>
-            </a:pPr>
-            <a:r>
-              <a:rPr sz="1500" b="1" i="0">
-                <a:solidFill>
-                  <a:srgbClr val="B1D1CF"/>
-                </a:solidFill>
-                <a:latin typeface="Calibri"/>
-              </a:rPr>
-              <a:t>AO VIVO</a:t>
-            </a:r>
-          </a:p>
-        </p:txBody>
-      </p:sp>
-      <p:sp>
-        <p:nvSpPr>
-          <p:cNvPr id="4" name="TextBox 3"/>
-          <p:cNvSpPr txBox="1"/>
-          <p:nvPr/>
-        </p:nvSpPr>
-        <p:spPr>
-          <a:xfrm>
-            <a:off x="548640" y="868680"/>
-            <a:ext cx="10515600" cy="914400"/>
-          </a:xfrm>
-          <a:prstGeom prst="rect">
-            <a:avLst/>
-          </a:prstGeom>
-          <a:noFill/>
-        </p:spPr>
-        <p:txBody>
-          <a:bodyPr wrap="square" anchor="t">
-            <a:spAutoFit/>
-          </a:bodyPr>
-          <a:lstStyle/>
-          <a:p>
-            <a:pPr algn="l">
-              <a:lnSpc>
-                <a:spcPct val="115000"/>
-              </a:lnSpc>
-            </a:pPr>
-            <a:r>
-              <a:rPr sz="4000" b="1" i="0">
-                <a:solidFill>
-                  <a:srgbClr val="FFFFFF"/>
-                </a:solidFill>
-                <a:latin typeface="Calibri"/>
-              </a:rPr>
-              <a:t>Demonstração</a:t>
-            </a:r>
-          </a:p>
-        </p:txBody>
-      </p:sp>
-      <p:sp>
-        <p:nvSpPr>
-          <p:cNvPr id="5" name="TextBox 4"/>
-          <p:cNvSpPr txBox="1"/>
-          <p:nvPr/>
-        </p:nvSpPr>
-        <p:spPr>
-          <a:xfrm>
-            <a:off x="548640" y="2103120"/>
-            <a:ext cx="8686800" cy="3657600"/>
+          <p:cNvPr id="32" name="Right Arrow 31"/>
+          <p:cNvSpPr/>
+          <p:nvPr/>
+        </p:nvSpPr>
+        <p:spPr>
+          <a:xfrm>
+            <a:off x="7900416" y="2688336"/>
+            <a:ext cx="201168" cy="237744"/>
+          </a:xfrm>
+          <a:prstGeom prst="rightArrow">
+            <a:avLst/>
+          </a:prstGeom>
+          <a:solidFill>
+            <a:srgbClr val="B1D1CF"/>
+          </a:solidFill>
+          <a:ln>
+            <a:noFill/>
+          </a:ln>
+          <a:effectLst/>
+        </p:spPr>
+        <p:style>
+          <a:lnRef idx="1">
+            <a:schemeClr val="accent1"/>
+          </a:lnRef>
+          <a:fillRef idx="3">
+            <a:schemeClr val="accent1"/>
+          </a:fillRef>
+          <a:effectRef idx="2">
+            <a:schemeClr val="accent1"/>
+          </a:effectRef>
+          <a:fontRef idx="minor">
+            <a:schemeClr val="lt1"/>
+          </a:fontRef>
+        </p:style>
+        <p:txBody>
+          <a:bodyPr rtlCol="0" anchor="ctr"/>
+          <a:lstStyle/>
+          <a:p>
+            <a:pPr algn="ctr"/>
+          </a:p>
+        </p:txBody>
+      </p:sp>
+      <p:sp>
+        <p:nvSpPr>
+          <p:cNvPr id="33" name="TextBox 32"/>
+          <p:cNvSpPr txBox="1"/>
+          <p:nvPr/>
+        </p:nvSpPr>
+        <p:spPr>
+          <a:xfrm>
+            <a:off x="548640" y="3858768"/>
+            <a:ext cx="5394960" cy="329184"/>
           </a:xfrm>
           <a:prstGeom prst="rect">
             <a:avLst/>
@@ -16614,154 +17951,1041 @@
           <a:p>
             <a:pPr>
               <a:lnSpc>
-                <a:spcPct val="112000"/>
-              </a:lnSpc>
-              <a:spcAft>
-                <a:spcPts val="1600"/>
-              </a:spcAft>
-            </a:pPr>
-            <a:r>
-              <a:rPr sz="1700">
+                <a:spcPct val="115000"/>
+              </a:lnSpc>
+            </a:pPr>
+            <a:r>
+              <a:rPr sz="1350" b="1" i="0">
+                <a:solidFill>
+                  <a:srgbClr val="212529"/>
+                </a:solidFill>
+                <a:latin typeface="Calibri"/>
+              </a:rPr>
+              <a:t>Duração real do run aprovado</a:t>
+            </a:r>
+          </a:p>
+        </p:txBody>
+      </p:sp>
+      <p:sp>
+        <p:nvSpPr>
+          <p:cNvPr id="34" name="Rounded Rectangle 33"/>
+          <p:cNvSpPr/>
+          <p:nvPr/>
+        </p:nvSpPr>
+        <p:spPr>
+          <a:xfrm>
+            <a:off x="548640" y="4261104"/>
+            <a:ext cx="1280160" cy="868680"/>
+          </a:xfrm>
+          <a:prstGeom prst="roundRect">
+            <a:avLst/>
+          </a:prstGeom>
+          <a:solidFill>
+            <a:srgbClr val="12635F"/>
+          </a:solidFill>
+          <a:ln>
+            <a:noFill/>
+          </a:ln>
+          <a:effectLst/>
+        </p:spPr>
+        <p:style>
+          <a:lnRef idx="1">
+            <a:schemeClr val="accent1"/>
+          </a:lnRef>
+          <a:fillRef idx="3">
+            <a:schemeClr val="accent1"/>
+          </a:fillRef>
+          <a:effectRef idx="2">
+            <a:schemeClr val="accent1"/>
+          </a:effectRef>
+          <a:fontRef idx="minor">
+            <a:schemeClr val="lt1"/>
+          </a:fontRef>
+        </p:style>
+        <p:txBody>
+          <a:bodyPr rtlCol="0" anchor="ctr"/>
+          <a:lstStyle/>
+          <a:p>
+            <a:pPr algn="ctr"/>
+          </a:p>
+        </p:txBody>
+      </p:sp>
+      <p:sp>
+        <p:nvSpPr>
+          <p:cNvPr id="35" name="TextBox 34"/>
+          <p:cNvSpPr txBox="1"/>
+          <p:nvPr/>
+        </p:nvSpPr>
+        <p:spPr>
+          <a:xfrm>
+            <a:off x="548640" y="4334256"/>
+            <a:ext cx="1280160" cy="411480"/>
+          </a:xfrm>
+          <a:prstGeom prst="rect">
+            <a:avLst/>
+          </a:prstGeom>
+          <a:noFill/>
+        </p:spPr>
+        <p:txBody>
+          <a:bodyPr wrap="square">
+            <a:spAutoFit/>
+          </a:bodyPr>
+          <a:lstStyle/>
+          <a:p>
+            <a:pPr algn="ctr">
+              <a:lnSpc>
+                <a:spcPct val="115000"/>
+              </a:lnSpc>
+            </a:pPr>
+            <a:r>
+              <a:rPr sz="1800" b="1" i="0">
+                <a:solidFill>
+                  <a:srgbClr val="FFFFFF"/>
+                </a:solidFill>
+                <a:latin typeface="Calibri"/>
+              </a:rPr>
+              <a:t>44s</a:t>
+            </a:r>
+          </a:p>
+        </p:txBody>
+      </p:sp>
+      <p:sp>
+        <p:nvSpPr>
+          <p:cNvPr id="36" name="TextBox 35"/>
+          <p:cNvSpPr txBox="1"/>
+          <p:nvPr/>
+        </p:nvSpPr>
+        <p:spPr>
+          <a:xfrm>
+            <a:off x="548640" y="4764024"/>
+            <a:ext cx="1280160" cy="274320"/>
+          </a:xfrm>
+          <a:prstGeom prst="rect">
+            <a:avLst/>
+          </a:prstGeom>
+          <a:noFill/>
+        </p:spPr>
+        <p:txBody>
+          <a:bodyPr wrap="square">
+            <a:spAutoFit/>
+          </a:bodyPr>
+          <a:lstStyle/>
+          <a:p>
+            <a:pPr algn="ctr">
+              <a:lnSpc>
+                <a:spcPct val="115000"/>
+              </a:lnSpc>
+            </a:pPr>
+            <a:r>
+              <a:rPr sz="1050" b="0" i="0">
                 <a:solidFill>
                   <a:srgbClr val="E7F5F4"/>
                 </a:solidFill>
                 <a:latin typeface="Calibri"/>
               </a:rPr>
-              <a:t>•  1. Atendente — cadastra especialidade, médico, paciente e lança agenda</a:t>
-            </a:r>
-          </a:p>
+              <a:t>Backend</a:t>
+            </a:r>
+          </a:p>
+        </p:txBody>
+      </p:sp>
+      <p:sp>
+        <p:nvSpPr>
+          <p:cNvPr id="37" name="Rounded Rectangle 36"/>
+          <p:cNvSpPr/>
+          <p:nvPr/>
+        </p:nvSpPr>
+        <p:spPr>
+          <a:xfrm>
+            <a:off x="1975103" y="4261104"/>
+            <a:ext cx="1280160" cy="868680"/>
+          </a:xfrm>
+          <a:prstGeom prst="roundRect">
+            <a:avLst/>
+          </a:prstGeom>
+          <a:solidFill>
+            <a:srgbClr val="28726F"/>
+          </a:solidFill>
+          <a:ln>
+            <a:noFill/>
+          </a:ln>
+          <a:effectLst/>
+        </p:spPr>
+        <p:style>
+          <a:lnRef idx="1">
+            <a:schemeClr val="accent1"/>
+          </a:lnRef>
+          <a:fillRef idx="3">
+            <a:schemeClr val="accent1"/>
+          </a:fillRef>
+          <a:effectRef idx="2">
+            <a:schemeClr val="accent1"/>
+          </a:effectRef>
+          <a:fontRef idx="minor">
+            <a:schemeClr val="lt1"/>
+          </a:fontRef>
+        </p:style>
+        <p:txBody>
+          <a:bodyPr rtlCol="0" anchor="ctr"/>
+          <a:lstStyle/>
+          <a:p>
+            <a:pPr algn="ctr"/>
+          </a:p>
+        </p:txBody>
+      </p:sp>
+      <p:sp>
+        <p:nvSpPr>
+          <p:cNvPr id="38" name="TextBox 37"/>
+          <p:cNvSpPr txBox="1"/>
+          <p:nvPr/>
+        </p:nvSpPr>
+        <p:spPr>
+          <a:xfrm>
+            <a:off x="1975103" y="4334256"/>
+            <a:ext cx="1280160" cy="411480"/>
+          </a:xfrm>
+          <a:prstGeom prst="rect">
+            <a:avLst/>
+          </a:prstGeom>
+          <a:noFill/>
+        </p:spPr>
+        <p:txBody>
+          <a:bodyPr wrap="square">
+            <a:spAutoFit/>
+          </a:bodyPr>
+          <a:lstStyle/>
+          <a:p>
+            <a:pPr algn="ctr">
+              <a:lnSpc>
+                <a:spcPct val="115000"/>
+              </a:lnSpc>
+            </a:pPr>
+            <a:r>
+              <a:rPr sz="1800" b="1" i="0">
+                <a:solidFill>
+                  <a:srgbClr val="FFFFFF"/>
+                </a:solidFill>
+                <a:latin typeface="Calibri"/>
+              </a:rPr>
+              <a:t>1m16s</a:t>
+            </a:r>
+          </a:p>
+        </p:txBody>
+      </p:sp>
+      <p:sp>
+        <p:nvSpPr>
+          <p:cNvPr id="39" name="TextBox 38"/>
+          <p:cNvSpPr txBox="1"/>
+          <p:nvPr/>
+        </p:nvSpPr>
+        <p:spPr>
+          <a:xfrm>
+            <a:off x="1975103" y="4764024"/>
+            <a:ext cx="1280160" cy="274320"/>
+          </a:xfrm>
+          <a:prstGeom prst="rect">
+            <a:avLst/>
+          </a:prstGeom>
+          <a:noFill/>
+        </p:spPr>
+        <p:txBody>
+          <a:bodyPr wrap="square">
+            <a:spAutoFit/>
+          </a:bodyPr>
+          <a:lstStyle/>
+          <a:p>
+            <a:pPr algn="ctr">
+              <a:lnSpc>
+                <a:spcPct val="115000"/>
+              </a:lnSpc>
+            </a:pPr>
+            <a:r>
+              <a:rPr sz="1050" b="0" i="0">
+                <a:solidFill>
+                  <a:srgbClr val="E7F5F4"/>
+                </a:solidFill>
+                <a:latin typeface="Calibri"/>
+              </a:rPr>
+              <a:t>Frontend</a:t>
+            </a:r>
+          </a:p>
+        </p:txBody>
+      </p:sp>
+      <p:sp>
+        <p:nvSpPr>
+          <p:cNvPr id="40" name="Rounded Rectangle 39"/>
+          <p:cNvSpPr/>
+          <p:nvPr/>
+        </p:nvSpPr>
+        <p:spPr>
+          <a:xfrm>
+            <a:off x="3401568" y="4261104"/>
+            <a:ext cx="1280160" cy="868680"/>
+          </a:xfrm>
+          <a:prstGeom prst="roundRect">
+            <a:avLst/>
+          </a:prstGeom>
+          <a:solidFill>
+            <a:srgbClr val="44938F"/>
+          </a:solidFill>
+          <a:ln>
+            <a:noFill/>
+          </a:ln>
+          <a:effectLst/>
+        </p:spPr>
+        <p:style>
+          <a:lnRef idx="1">
+            <a:schemeClr val="accent1"/>
+          </a:lnRef>
+          <a:fillRef idx="3">
+            <a:schemeClr val="accent1"/>
+          </a:fillRef>
+          <a:effectRef idx="2">
+            <a:schemeClr val="accent1"/>
+          </a:effectRef>
+          <a:fontRef idx="minor">
+            <a:schemeClr val="lt1"/>
+          </a:fontRef>
+        </p:style>
+        <p:txBody>
+          <a:bodyPr rtlCol="0" anchor="ctr"/>
+          <a:lstStyle/>
+          <a:p>
+            <a:pPr algn="ctr"/>
+          </a:p>
+        </p:txBody>
+      </p:sp>
+      <p:sp>
+        <p:nvSpPr>
+          <p:cNvPr id="41" name="TextBox 40"/>
+          <p:cNvSpPr txBox="1"/>
+          <p:nvPr/>
+        </p:nvSpPr>
+        <p:spPr>
+          <a:xfrm>
+            <a:off x="3401568" y="4334256"/>
+            <a:ext cx="1280160" cy="411480"/>
+          </a:xfrm>
+          <a:prstGeom prst="rect">
+            <a:avLst/>
+          </a:prstGeom>
+          <a:noFill/>
+        </p:spPr>
+        <p:txBody>
+          <a:bodyPr wrap="square">
+            <a:spAutoFit/>
+          </a:bodyPr>
+          <a:lstStyle/>
+          <a:p>
+            <a:pPr algn="ctr">
+              <a:lnSpc>
+                <a:spcPct val="115000"/>
+              </a:lnSpc>
+            </a:pPr>
+            <a:r>
+              <a:rPr sz="1800" b="1" i="0">
+                <a:solidFill>
+                  <a:srgbClr val="FFFFFF"/>
+                </a:solidFill>
+                <a:latin typeface="Calibri"/>
+              </a:rPr>
+              <a:t>55s</a:t>
+            </a:r>
+          </a:p>
+        </p:txBody>
+      </p:sp>
+      <p:sp>
+        <p:nvSpPr>
+          <p:cNvPr id="42" name="TextBox 41"/>
+          <p:cNvSpPr txBox="1"/>
+          <p:nvPr/>
+        </p:nvSpPr>
+        <p:spPr>
+          <a:xfrm>
+            <a:off x="3401568" y="4764024"/>
+            <a:ext cx="1280160" cy="274320"/>
+          </a:xfrm>
+          <a:prstGeom prst="rect">
+            <a:avLst/>
+          </a:prstGeom>
+          <a:noFill/>
+        </p:spPr>
+        <p:txBody>
+          <a:bodyPr wrap="square">
+            <a:spAutoFit/>
+          </a:bodyPr>
+          <a:lstStyle/>
+          <a:p>
+            <a:pPr algn="ctr">
+              <a:lnSpc>
+                <a:spcPct val="115000"/>
+              </a:lnSpc>
+            </a:pPr>
+            <a:r>
+              <a:rPr sz="1050" b="0" i="0">
+                <a:solidFill>
+                  <a:srgbClr val="E7F5F4"/>
+                </a:solidFill>
+                <a:latin typeface="Calibri"/>
+              </a:rPr>
+              <a:t>Docker</a:t>
+            </a:r>
+          </a:p>
+        </p:txBody>
+      </p:sp>
+      <p:sp>
+        <p:nvSpPr>
+          <p:cNvPr id="43" name="Rounded Rectangle 42"/>
+          <p:cNvSpPr/>
+          <p:nvPr/>
+        </p:nvSpPr>
+        <p:spPr>
+          <a:xfrm>
+            <a:off x="4828031" y="4261104"/>
+            <a:ext cx="1280160" cy="868680"/>
+          </a:xfrm>
+          <a:prstGeom prst="roundRect">
+            <a:avLst/>
+          </a:prstGeom>
+          <a:solidFill>
+            <a:srgbClr val="12635F"/>
+          </a:solidFill>
+          <a:ln>
+            <a:noFill/>
+          </a:ln>
+          <a:effectLst/>
+        </p:spPr>
+        <p:style>
+          <a:lnRef idx="1">
+            <a:schemeClr val="accent1"/>
+          </a:lnRef>
+          <a:fillRef idx="3">
+            <a:schemeClr val="accent1"/>
+          </a:fillRef>
+          <a:effectRef idx="2">
+            <a:schemeClr val="accent1"/>
+          </a:effectRef>
+          <a:fontRef idx="minor">
+            <a:schemeClr val="lt1"/>
+          </a:fontRef>
+        </p:style>
+        <p:txBody>
+          <a:bodyPr rtlCol="0" anchor="ctr"/>
+          <a:lstStyle/>
+          <a:p>
+            <a:pPr algn="ctr"/>
+          </a:p>
+        </p:txBody>
+      </p:sp>
+      <p:sp>
+        <p:nvSpPr>
+          <p:cNvPr id="44" name="TextBox 43"/>
+          <p:cNvSpPr txBox="1"/>
+          <p:nvPr/>
+        </p:nvSpPr>
+        <p:spPr>
+          <a:xfrm>
+            <a:off x="4828031" y="4334256"/>
+            <a:ext cx="1280160" cy="411480"/>
+          </a:xfrm>
+          <a:prstGeom prst="rect">
+            <a:avLst/>
+          </a:prstGeom>
+          <a:noFill/>
+        </p:spPr>
+        <p:txBody>
+          <a:bodyPr wrap="square">
+            <a:spAutoFit/>
+          </a:bodyPr>
+          <a:lstStyle/>
+          <a:p>
+            <a:pPr algn="ctr">
+              <a:lnSpc>
+                <a:spcPct val="115000"/>
+              </a:lnSpc>
+            </a:pPr>
+            <a:r>
+              <a:rPr sz="1800" b="1" i="0">
+                <a:solidFill>
+                  <a:srgbClr val="FFFFFF"/>
+                </a:solidFill>
+                <a:latin typeface="Calibri"/>
+              </a:rPr>
+              <a:t>4s</a:t>
+            </a:r>
+          </a:p>
+        </p:txBody>
+      </p:sp>
+      <p:sp>
+        <p:nvSpPr>
+          <p:cNvPr id="45" name="TextBox 44"/>
+          <p:cNvSpPr txBox="1"/>
+          <p:nvPr/>
+        </p:nvSpPr>
+        <p:spPr>
+          <a:xfrm>
+            <a:off x="4828031" y="4764024"/>
+            <a:ext cx="1280160" cy="274320"/>
+          </a:xfrm>
+          <a:prstGeom prst="rect">
+            <a:avLst/>
+          </a:prstGeom>
+          <a:noFill/>
+        </p:spPr>
+        <p:txBody>
+          <a:bodyPr wrap="square">
+            <a:spAutoFit/>
+          </a:bodyPr>
+          <a:lstStyle/>
+          <a:p>
+            <a:pPr algn="ctr">
+              <a:lnSpc>
+                <a:spcPct val="115000"/>
+              </a:lnSpc>
+            </a:pPr>
+            <a:r>
+              <a:rPr sz="1050" b="0" i="0">
+                <a:solidFill>
+                  <a:srgbClr val="E7F5F4"/>
+                </a:solidFill>
+                <a:latin typeface="Calibri"/>
+              </a:rPr>
+              <a:t>Gate</a:t>
+            </a:r>
+          </a:p>
+        </p:txBody>
+      </p:sp>
+      <p:sp>
+        <p:nvSpPr>
+          <p:cNvPr id="46" name="Rounded Rectangle 45"/>
+          <p:cNvSpPr/>
+          <p:nvPr/>
+        </p:nvSpPr>
+        <p:spPr>
+          <a:xfrm>
+            <a:off x="548640" y="5212080"/>
+            <a:ext cx="5394960" cy="713232"/>
+          </a:xfrm>
+          <a:prstGeom prst="roundRect">
+            <a:avLst/>
+          </a:prstGeom>
+          <a:solidFill>
+            <a:srgbClr val="E7F5F4"/>
+          </a:solidFill>
+          <a:ln>
+            <a:noFill/>
+          </a:ln>
+          <a:effectLst/>
+        </p:spPr>
+        <p:style>
+          <a:lnRef idx="1">
+            <a:schemeClr val="accent1"/>
+          </a:lnRef>
+          <a:fillRef idx="3">
+            <a:schemeClr val="accent1"/>
+          </a:fillRef>
+          <a:effectRef idx="2">
+            <a:schemeClr val="accent1"/>
+          </a:effectRef>
+          <a:fontRef idx="minor">
+            <a:schemeClr val="lt1"/>
+          </a:fontRef>
+        </p:style>
+        <p:txBody>
+          <a:bodyPr rtlCol="0" anchor="ctr"/>
+          <a:lstStyle/>
+          <a:p>
+            <a:pPr algn="ctr"/>
+          </a:p>
+        </p:txBody>
+      </p:sp>
+      <p:sp>
+        <p:nvSpPr>
+          <p:cNvPr id="47" name="TextBox 46"/>
+          <p:cNvSpPr txBox="1"/>
+          <p:nvPr/>
+        </p:nvSpPr>
+        <p:spPr>
+          <a:xfrm>
+            <a:off x="822960" y="5276088"/>
+            <a:ext cx="4892040" cy="566928"/>
+          </a:xfrm>
+          <a:prstGeom prst="rect">
+            <a:avLst/>
+          </a:prstGeom>
+          <a:noFill/>
+        </p:spPr>
+        <p:txBody>
+          <a:bodyPr wrap="square">
+            <a:spAutoFit/>
+          </a:bodyPr>
+          <a:lstStyle/>
           <a:p>
             <a:pPr>
               <a:lnSpc>
-                <a:spcPct val="112000"/>
-              </a:lnSpc>
-              <a:spcAft>
-                <a:spcPts val="1600"/>
-              </a:spcAft>
-            </a:pPr>
-            <a:r>
-              <a:rPr sz="1700">
-                <a:solidFill>
-                  <a:srgbClr val="E7F5F4"/>
-                </a:solidFill>
-                <a:latin typeface="Calibri"/>
-              </a:rPr>
-              <a:t>•  2. Paciente — primeiro acesso pelo CPF, busca médico, agenda consulta (SOLICITADA)</a:t>
-            </a:r>
-          </a:p>
+                <a:spcPct val="115000"/>
+              </a:lnSpc>
+            </a:pPr>
+            <a:r>
+              <a:rPr sz="1150" b="1" i="0">
+                <a:solidFill>
+                  <a:srgbClr val="212529"/>
+                </a:solidFill>
+                <a:latin typeface="Calibri"/>
+              </a:rPr>
+              <a:t>Total: 1m 38s. </a:t>
+            </a:r>
+            <a:r>
+              <a:rPr sz="1150" b="0" i="0">
+                <a:solidFill>
+                  <a:srgbClr val="495257"/>
+                </a:solidFill>
+                <a:latin typeface="Calibri"/>
+              </a:rPr>
+              <a:t>Menos que a soma das partes porque os três jobs correm juntos — a quebra aparece antes de a pessoa trocar de contexto.</a:t>
+            </a:r>
+          </a:p>
+        </p:txBody>
+      </p:sp>
+      <p:sp>
+        <p:nvSpPr>
+          <p:cNvPr id="48" name="TextBox 47"/>
+          <p:cNvSpPr txBox="1"/>
+          <p:nvPr/>
+        </p:nvSpPr>
+        <p:spPr>
+          <a:xfrm>
+            <a:off x="6263640" y="3858768"/>
+            <a:ext cx="5376672" cy="329184"/>
+          </a:xfrm>
+          <a:prstGeom prst="rect">
+            <a:avLst/>
+          </a:prstGeom>
+          <a:noFill/>
+        </p:spPr>
+        <p:txBody>
+          <a:bodyPr wrap="square">
+            <a:spAutoFit/>
+          </a:bodyPr>
+          <a:lstStyle/>
           <a:p>
             <a:pPr>
               <a:lnSpc>
-                <a:spcPct val="112000"/>
-              </a:lnSpc>
-              <a:spcAft>
-                <a:spcPts val="1600"/>
-              </a:spcAft>
-            </a:pPr>
-            <a:r>
-              <a:rPr sz="1700">
-                <a:solidFill>
-                  <a:srgbClr val="E7F5F4"/>
-                </a:solidFill>
-                <a:latin typeface="Calibri"/>
-              </a:rPr>
-              <a:t>•  3. Atendente — confirma e finaliza a consulta (RN06/RN10)</a:t>
-            </a:r>
-          </a:p>
+                <a:spcPct val="115000"/>
+              </a:lnSpc>
+            </a:pPr>
+            <a:r>
+              <a:rPr sz="1350" b="1" i="0">
+                <a:solidFill>
+                  <a:srgbClr val="212529"/>
+                </a:solidFill>
+                <a:latin typeface="Calibri"/>
+              </a:rPr>
+              <a:t>O que ficou de fora — ausência é escolha, não esquecimento</a:t>
+            </a:r>
+          </a:p>
+        </p:txBody>
+      </p:sp>
+      <p:sp>
+        <p:nvSpPr>
+          <p:cNvPr id="49" name="Rounded Rectangle 48"/>
+          <p:cNvSpPr/>
+          <p:nvPr/>
+        </p:nvSpPr>
+        <p:spPr>
+          <a:xfrm>
+            <a:off x="6263640" y="4261104"/>
+            <a:ext cx="5376672" cy="640080"/>
+          </a:xfrm>
+          <a:prstGeom prst="roundRect">
+            <a:avLst/>
+          </a:prstGeom>
+          <a:solidFill>
+            <a:srgbClr val="E7F5F4"/>
+          </a:solidFill>
+          <a:ln>
+            <a:noFill/>
+          </a:ln>
+          <a:effectLst/>
+        </p:spPr>
+        <p:style>
+          <a:lnRef idx="1">
+            <a:schemeClr val="accent1"/>
+          </a:lnRef>
+          <a:fillRef idx="3">
+            <a:schemeClr val="accent1"/>
+          </a:fillRef>
+          <a:effectRef idx="2">
+            <a:schemeClr val="accent1"/>
+          </a:effectRef>
+          <a:fontRef idx="minor">
+            <a:schemeClr val="lt1"/>
+          </a:fontRef>
+        </p:style>
+        <p:txBody>
+          <a:bodyPr rtlCol="0" anchor="ctr"/>
+          <a:lstStyle/>
+          <a:p>
+            <a:pPr algn="ctr"/>
+          </a:p>
+        </p:txBody>
+      </p:sp>
+      <p:sp>
+        <p:nvSpPr>
+          <p:cNvPr id="50" name="TextBox 49"/>
+          <p:cNvSpPr txBox="1"/>
+          <p:nvPr/>
+        </p:nvSpPr>
+        <p:spPr>
+          <a:xfrm>
+            <a:off x="6537960" y="4297680"/>
+            <a:ext cx="4919472" cy="292608"/>
+          </a:xfrm>
+          <a:prstGeom prst="rect">
+            <a:avLst/>
+          </a:prstGeom>
+          <a:noFill/>
+        </p:spPr>
+        <p:txBody>
+          <a:bodyPr wrap="square">
+            <a:spAutoFit/>
+          </a:bodyPr>
+          <a:lstStyle/>
           <a:p>
             <a:pPr>
               <a:lnSpc>
-                <a:spcPct val="112000"/>
-              </a:lnSpc>
-              <a:spcAft>
-                <a:spcPts val="1600"/>
-              </a:spcAft>
-            </a:pPr>
-            <a:r>
-              <a:rPr sz="1700">
-                <a:solidFill>
-                  <a:srgbClr val="E7F5F4"/>
-                </a:solidFill>
-                <a:latin typeface="Calibri"/>
-              </a:rPr>
-              <a:t>•  4. Paciente — tenta cancelar consulta finalizada → bloqueado (RN10)</a:t>
-            </a:r>
-          </a:p>
+                <a:spcPct val="115000"/>
+              </a:lnSpc>
+            </a:pPr>
+            <a:r>
+              <a:rPr sz="1150" b="1" i="0">
+                <a:solidFill>
+                  <a:srgbClr val="12635F"/>
+                </a:solidFill>
+                <a:latin typeface="Calibri"/>
+              </a:rPr>
+              <a:t>Deploy automático (CD)</a:t>
+            </a:r>
+          </a:p>
+        </p:txBody>
+      </p:sp>
+      <p:sp>
+        <p:nvSpPr>
+          <p:cNvPr id="51" name="TextBox 50"/>
+          <p:cNvSpPr txBox="1"/>
+          <p:nvPr/>
+        </p:nvSpPr>
+        <p:spPr>
+          <a:xfrm>
+            <a:off x="6537960" y="4599432"/>
+            <a:ext cx="4919472" cy="274320"/>
+          </a:xfrm>
+          <a:prstGeom prst="rect">
+            <a:avLst/>
+          </a:prstGeom>
+          <a:noFill/>
+        </p:spPr>
+        <p:txBody>
+          <a:bodyPr wrap="square">
+            <a:spAutoFit/>
+          </a:bodyPr>
+          <a:lstStyle/>
           <a:p>
             <a:pPr>
               <a:lnSpc>
-                <a:spcPct val="112000"/>
-              </a:lnSpc>
-              <a:spcAft>
-                <a:spcPts val="1600"/>
-              </a:spcAft>
-            </a:pPr>
-            <a:r>
-              <a:rPr sz="1700">
-                <a:solidFill>
-                  <a:srgbClr val="E7F5F4"/>
-                </a:solidFill>
-                <a:latin typeface="Calibri"/>
-              </a:rPr>
-              <a:t>•  5. Atendente — agenda 2ª consulta; tenta duplicar horário → bloqueado (RN03/RN05)</a:t>
-            </a:r>
-          </a:p>
+                <a:spcPct val="115000"/>
+              </a:lnSpc>
+            </a:pPr>
+            <a:r>
+              <a:rPr sz="1050" b="0" i="0">
+                <a:solidFill>
+                  <a:srgbClr val="495257"/>
+                </a:solidFill>
+                <a:latin typeface="Calibri"/>
+              </a:rPr>
+              <a:t>Não há ambiente de produção; a demonstração é local.</a:t>
+            </a:r>
+          </a:p>
+        </p:txBody>
+      </p:sp>
+      <p:sp>
+        <p:nvSpPr>
+          <p:cNvPr id="52" name="Rounded Rectangle 51"/>
+          <p:cNvSpPr/>
+          <p:nvPr/>
+        </p:nvSpPr>
+        <p:spPr>
+          <a:xfrm>
+            <a:off x="6263640" y="4974336"/>
+            <a:ext cx="5376672" cy="640080"/>
+          </a:xfrm>
+          <a:prstGeom prst="roundRect">
+            <a:avLst/>
+          </a:prstGeom>
+          <a:solidFill>
+            <a:srgbClr val="FAF4F4"/>
+          </a:solidFill>
+          <a:ln>
+            <a:noFill/>
+          </a:ln>
+          <a:effectLst/>
+        </p:spPr>
+        <p:style>
+          <a:lnRef idx="1">
+            <a:schemeClr val="accent1"/>
+          </a:lnRef>
+          <a:fillRef idx="3">
+            <a:schemeClr val="accent1"/>
+          </a:fillRef>
+          <a:effectRef idx="2">
+            <a:schemeClr val="accent1"/>
+          </a:effectRef>
+          <a:fontRef idx="minor">
+            <a:schemeClr val="lt1"/>
+          </a:fontRef>
+        </p:style>
+        <p:txBody>
+          <a:bodyPr rtlCol="0" anchor="ctr"/>
+          <a:lstStyle/>
+          <a:p>
+            <a:pPr algn="ctr"/>
+          </a:p>
+        </p:txBody>
+      </p:sp>
+      <p:sp>
+        <p:nvSpPr>
+          <p:cNvPr id="53" name="TextBox 52"/>
+          <p:cNvSpPr txBox="1"/>
+          <p:nvPr/>
+        </p:nvSpPr>
+        <p:spPr>
+          <a:xfrm>
+            <a:off x="6537960" y="5010912"/>
+            <a:ext cx="4919472" cy="292608"/>
+          </a:xfrm>
+          <a:prstGeom prst="rect">
+            <a:avLst/>
+          </a:prstGeom>
+          <a:noFill/>
+        </p:spPr>
+        <p:txBody>
+          <a:bodyPr wrap="square">
+            <a:spAutoFit/>
+          </a:bodyPr>
+          <a:lstStyle/>
           <a:p>
             <a:pPr>
               <a:lnSpc>
-                <a:spcPct val="112000"/>
-              </a:lnSpc>
-              <a:spcAft>
-                <a:spcPts val="1600"/>
-              </a:spcAft>
-            </a:pPr>
-            <a:r>
-              <a:rPr sz="1700">
-                <a:solidFill>
-                  <a:srgbClr val="E7F5F4"/>
-                </a:solidFill>
-                <a:latin typeface="Calibri"/>
-              </a:rPr>
-              <a:t>•  6. Sessão inválida — token corrompido força logout automático</a:t>
-            </a:r>
-          </a:p>
-        </p:txBody>
-      </p:sp>
-      <p:sp>
-        <p:nvSpPr>
-          <p:cNvPr id="6" name="TextBox 5"/>
-          <p:cNvSpPr txBox="1"/>
-          <p:nvPr/>
-        </p:nvSpPr>
-        <p:spPr>
-          <a:xfrm>
-            <a:off x="548640" y="6126480"/>
-            <a:ext cx="9144000" cy="457200"/>
-          </a:xfrm>
-          <a:prstGeom prst="rect">
-            <a:avLst/>
-          </a:prstGeom>
-          <a:noFill/>
-        </p:spPr>
-        <p:txBody>
-          <a:bodyPr wrap="square" anchor="t">
+                <a:spcPct val="115000"/>
+              </a:lnSpc>
+            </a:pPr>
+            <a:r>
+              <a:rPr sz="1150" b="1" i="0">
+                <a:solidFill>
+                  <a:srgbClr val="12635F"/>
+                </a:solidFill>
+                <a:latin typeface="Calibri"/>
+              </a:rPr>
+              <a:t>Blue-green · canary · rollback</a:t>
+            </a:r>
+          </a:p>
+        </p:txBody>
+      </p:sp>
+      <p:sp>
+        <p:nvSpPr>
+          <p:cNvPr id="54" name="TextBox 53"/>
+          <p:cNvSpPr txBox="1"/>
+          <p:nvPr/>
+        </p:nvSpPr>
+        <p:spPr>
+          <a:xfrm>
+            <a:off x="6537960" y="5312664"/>
+            <a:ext cx="4919472" cy="274320"/>
+          </a:xfrm>
+          <a:prstGeom prst="rect">
+            <a:avLst/>
+          </a:prstGeom>
+          <a:noFill/>
+        </p:spPr>
+        <p:txBody>
+          <a:bodyPr wrap="square">
             <a:spAutoFit/>
           </a:bodyPr>
           <a:lstStyle/>
           <a:p>
-            <a:pPr algn="l">
-              <a:lnSpc>
-                <a:spcPct val="115000"/>
-              </a:lnSpc>
-            </a:pPr>
-            <a:r>
-              <a:rPr sz="1300" b="0" i="1">
-                <a:solidFill>
-                  <a:srgbClr val="B1D1CF"/>
-                </a:solidFill>
-                <a:latin typeface="Calibri"/>
-              </a:rPr>
-              <a:t>localhost:3000 · Swagger em localhost:8000/docs</a:t>
+            <a:pPr>
+              <a:lnSpc>
+                <a:spcPct val="115000"/>
+              </a:lnSpc>
+            </a:pPr>
+            <a:r>
+              <a:rPr sz="1050" b="0" i="0">
+                <a:solidFill>
+                  <a:srgbClr val="495257"/>
+                </a:solidFill>
+                <a:latin typeface="Calibri"/>
+              </a:rPr>
+              <a:t>Pressupõem produção — Módulo 6 trata, mas sem aplicação aqui.</a:t>
+            </a:r>
+          </a:p>
+        </p:txBody>
+      </p:sp>
+      <p:sp>
+        <p:nvSpPr>
+          <p:cNvPr id="55" name="Rounded Rectangle 54"/>
+          <p:cNvSpPr/>
+          <p:nvPr/>
+        </p:nvSpPr>
+        <p:spPr>
+          <a:xfrm>
+            <a:off x="6263640" y="5687568"/>
+            <a:ext cx="5376672" cy="640080"/>
+          </a:xfrm>
+          <a:prstGeom prst="roundRect">
+            <a:avLst/>
+          </a:prstGeom>
+          <a:solidFill>
+            <a:srgbClr val="E7F5F4"/>
+          </a:solidFill>
+          <a:ln>
+            <a:noFill/>
+          </a:ln>
+          <a:effectLst/>
+        </p:spPr>
+        <p:style>
+          <a:lnRef idx="1">
+            <a:schemeClr val="accent1"/>
+          </a:lnRef>
+          <a:fillRef idx="3">
+            <a:schemeClr val="accent1"/>
+          </a:fillRef>
+          <a:effectRef idx="2">
+            <a:schemeClr val="accent1"/>
+          </a:effectRef>
+          <a:fontRef idx="minor">
+            <a:schemeClr val="lt1"/>
+          </a:fontRef>
+        </p:style>
+        <p:txBody>
+          <a:bodyPr rtlCol="0" anchor="ctr"/>
+          <a:lstStyle/>
+          <a:p>
+            <a:pPr algn="ctr"/>
+          </a:p>
+        </p:txBody>
+      </p:sp>
+      <p:sp>
+        <p:nvSpPr>
+          <p:cNvPr id="56" name="TextBox 55"/>
+          <p:cNvSpPr txBox="1"/>
+          <p:nvPr/>
+        </p:nvSpPr>
+        <p:spPr>
+          <a:xfrm>
+            <a:off x="6537960" y="5724144"/>
+            <a:ext cx="4919472" cy="292608"/>
+          </a:xfrm>
+          <a:prstGeom prst="rect">
+            <a:avLst/>
+          </a:prstGeom>
+          <a:noFill/>
+        </p:spPr>
+        <p:txBody>
+          <a:bodyPr wrap="square">
+            <a:spAutoFit/>
+          </a:bodyPr>
+          <a:lstStyle/>
+          <a:p>
+            <a:pPr>
+              <a:lnSpc>
+                <a:spcPct val="115000"/>
+              </a:lnSpc>
+            </a:pPr>
+            <a:r>
+              <a:rPr sz="1150" b="1" i="0">
+                <a:solidFill>
+                  <a:srgbClr val="12635F"/>
+                </a:solidFill>
+                <a:latin typeface="Calibri"/>
+              </a:rPr>
+              <a:t>SonarQube · Dependabot · matriz de versões</a:t>
+            </a:r>
+          </a:p>
+        </p:txBody>
+      </p:sp>
+      <p:sp>
+        <p:nvSpPr>
+          <p:cNvPr id="57" name="TextBox 56"/>
+          <p:cNvSpPr txBox="1"/>
+          <p:nvPr/>
+        </p:nvSpPr>
+        <p:spPr>
+          <a:xfrm>
+            <a:off x="6537960" y="6025896"/>
+            <a:ext cx="4919472" cy="274320"/>
+          </a:xfrm>
+          <a:prstGeom prst="rect">
+            <a:avLst/>
+          </a:prstGeom>
+          <a:noFill/>
+        </p:spPr>
+        <p:txBody>
+          <a:bodyPr wrap="square">
+            <a:spAutoFit/>
+          </a:bodyPr>
+          <a:lstStyle/>
+          <a:p>
+            <a:pPr>
+              <a:lnSpc>
+                <a:spcPct val="115000"/>
+              </a:lnSpc>
+            </a:pPr>
+            <a:r>
+              <a:rPr sz="1050" b="0" i="0">
+                <a:solidFill>
+                  <a:srgbClr val="495257"/>
+                </a:solidFill>
+                <a:latin typeface="Calibri"/>
+              </a:rPr>
+              <a:t>Conta externa e manutenção contínua; ruff + cobertura cobrem o essencial.</a:t>
+            </a:r>
+          </a:p>
+        </p:txBody>
+      </p:sp>
+      <p:sp>
+        <p:nvSpPr>
+          <p:cNvPr id="58" name="TextBox 57"/>
+          <p:cNvSpPr txBox="1"/>
+          <p:nvPr/>
+        </p:nvSpPr>
+        <p:spPr>
+          <a:xfrm>
+            <a:off x="548640" y="6035040"/>
+            <a:ext cx="5394960" cy="292608"/>
+          </a:xfrm>
+          <a:prstGeom prst="rect">
+            <a:avLst/>
+          </a:prstGeom>
+          <a:noFill/>
+        </p:spPr>
+        <p:txBody>
+          <a:bodyPr wrap="square">
+            <a:spAutoFit/>
+          </a:bodyPr>
+          <a:lstStyle/>
+          <a:p>
+            <a:pPr>
+              <a:lnSpc>
+                <a:spcPct val="115000"/>
+              </a:lnSpc>
+            </a:pPr>
+            <a:r>
+              <a:rPr sz="1100" b="1" i="0">
+                <a:solidFill>
+                  <a:srgbClr val="212529"/>
+                </a:solidFill>
+                <a:latin typeface="Calibri"/>
+              </a:rPr>
+              <a:t>CI é rede de segurança, não substituto de rodar o teste antes do commit.</a:t>
             </a:r>
           </a:p>
         </p:txBody>
@@ -17456,7 +19680,7 @@
     <p:bg>
       <p:bgPr>
         <a:solidFill>
-          <a:srgbClr val="FFFFFF"/>
+          <a:srgbClr val="12635F"/>
         </a:solidFill>
         <a:effectLst/>
       </p:bgPr>
@@ -17483,7 +19707,7 @@
             <a:avLst/>
           </a:prstGeom>
           <a:solidFill>
-            <a:srgbClr val="28726F"/>
+            <a:srgbClr val="B1D1CF"/>
           </a:solidFill>
           <a:ln>
             <a:noFill/>
@@ -17520,8 +19744,8 @@
         </p:nvSpPr>
         <p:spPr>
           <a:xfrm>
-            <a:off x="548640" y="292608"/>
-            <a:ext cx="9144000" cy="320040"/>
+            <a:off x="548640" y="457200"/>
+            <a:ext cx="9144000" cy="365760"/>
           </a:xfrm>
           <a:prstGeom prst="rect">
             <a:avLst/>
@@ -17540,13 +19764,13 @@
               </a:lnSpc>
             </a:pPr>
             <a:r>
-              <a:rPr sz="1300" b="1" i="0">
-                <a:solidFill>
-                  <a:srgbClr val="44938F"/>
-                </a:solidFill>
-                <a:latin typeface="Calibri"/>
-              </a:rPr>
-              <a:t>ESTADO NA ENTREGA</a:t>
+              <a:rPr sz="1500" b="1" i="0">
+                <a:solidFill>
+                  <a:srgbClr val="B1D1CF"/>
+                </a:solidFill>
+                <a:latin typeface="Calibri"/>
+              </a:rPr>
+              <a:t>AO VIVO</a:t>
             </a:r>
           </a:p>
         </p:txBody>
@@ -17559,8 +19783,8 @@
         </p:nvSpPr>
         <p:spPr>
           <a:xfrm>
-            <a:off x="548640" y="566928"/>
-            <a:ext cx="10515600" cy="822960"/>
+            <a:off x="548640" y="868680"/>
+            <a:ext cx="10515600" cy="914400"/>
           </a:xfrm>
           <a:prstGeom prst="rect">
             <a:avLst/>
@@ -17579,58 +19803,151 @@
               </a:lnSpc>
             </a:pPr>
             <a:r>
-              <a:rPr sz="3000" b="1" i="0">
-                <a:solidFill>
-                  <a:srgbClr val="212529"/>
-                </a:solidFill>
-                <a:latin typeface="Calibri"/>
-              </a:rPr>
-              <a:t>Métricas do projeto</a:t>
-            </a:r>
-          </a:p>
-        </p:txBody>
-      </p:sp>
-      <p:sp>
-        <p:nvSpPr>
-          <p:cNvPr id="5" name="Rectangle 4"/>
-          <p:cNvSpPr/>
-          <p:nvPr/>
-        </p:nvSpPr>
-        <p:spPr>
-          <a:xfrm>
-            <a:off x="548640" y="1280160"/>
-            <a:ext cx="1005840" cy="44450"/>
-          </a:xfrm>
-          <a:prstGeom prst="rect">
-            <a:avLst/>
-          </a:prstGeom>
-          <a:solidFill>
-            <a:srgbClr val="28726F"/>
-          </a:solidFill>
-          <a:ln>
-            <a:noFill/>
-          </a:ln>
-          <a:effectLst/>
-        </p:spPr>
-        <p:style>
-          <a:lnRef idx="1">
-            <a:schemeClr val="accent1"/>
-          </a:lnRef>
-          <a:fillRef idx="3">
-            <a:schemeClr val="accent1"/>
-          </a:fillRef>
-          <a:effectRef idx="2">
-            <a:schemeClr val="accent1"/>
-          </a:effectRef>
-          <a:fontRef idx="minor">
-            <a:schemeClr val="lt1"/>
-          </a:fontRef>
-        </p:style>
-        <p:txBody>
-          <a:bodyPr rtlCol="0" anchor="ctr"/>
-          <a:lstStyle/>
-          <a:p>
-            <a:pPr algn="ctr"/>
+              <a:rPr sz="4000" b="1" i="0">
+                <a:solidFill>
+                  <a:srgbClr val="FFFFFF"/>
+                </a:solidFill>
+                <a:latin typeface="Calibri"/>
+              </a:rPr>
+              <a:t>Demonstração</a:t>
+            </a:r>
+          </a:p>
+        </p:txBody>
+      </p:sp>
+      <p:sp>
+        <p:nvSpPr>
+          <p:cNvPr id="5" name="TextBox 4"/>
+          <p:cNvSpPr txBox="1"/>
+          <p:nvPr/>
+        </p:nvSpPr>
+        <p:spPr>
+          <a:xfrm>
+            <a:off x="548640" y="2103120"/>
+            <a:ext cx="8686800" cy="3657600"/>
+          </a:xfrm>
+          <a:prstGeom prst="rect">
+            <a:avLst/>
+          </a:prstGeom>
+          <a:noFill/>
+        </p:spPr>
+        <p:txBody>
+          <a:bodyPr wrap="square">
+            <a:spAutoFit/>
+          </a:bodyPr>
+          <a:lstStyle/>
+          <a:p>
+            <a:pPr>
+              <a:lnSpc>
+                <a:spcPct val="112000"/>
+              </a:lnSpc>
+              <a:spcAft>
+                <a:spcPts val="1600"/>
+              </a:spcAft>
+            </a:pPr>
+            <a:r>
+              <a:rPr sz="1700">
+                <a:solidFill>
+                  <a:srgbClr val="E7F5F4"/>
+                </a:solidFill>
+                <a:latin typeface="Calibri"/>
+              </a:rPr>
+              <a:t>•  1. Atendente — cadastra especialidade, médico, paciente e lança agenda</a:t>
+            </a:r>
+          </a:p>
+          <a:p>
+            <a:pPr>
+              <a:lnSpc>
+                <a:spcPct val="112000"/>
+              </a:lnSpc>
+              <a:spcAft>
+                <a:spcPts val="1600"/>
+              </a:spcAft>
+            </a:pPr>
+            <a:r>
+              <a:rPr sz="1700">
+                <a:solidFill>
+                  <a:srgbClr val="E7F5F4"/>
+                </a:solidFill>
+                <a:latin typeface="Calibri"/>
+              </a:rPr>
+              <a:t>•  2. Paciente — primeiro acesso pelo CPF, busca médico, agenda consulta (SOLICITADA)</a:t>
+            </a:r>
+          </a:p>
+          <a:p>
+            <a:pPr>
+              <a:lnSpc>
+                <a:spcPct val="112000"/>
+              </a:lnSpc>
+              <a:spcAft>
+                <a:spcPts val="1600"/>
+              </a:spcAft>
+            </a:pPr>
+            <a:r>
+              <a:rPr sz="1700">
+                <a:solidFill>
+                  <a:srgbClr val="E7F5F4"/>
+                </a:solidFill>
+                <a:latin typeface="Calibri"/>
+              </a:rPr>
+              <a:t>•  3. Atendente — confirma e finaliza a consulta (RN06/RN10)</a:t>
+            </a:r>
+          </a:p>
+          <a:p>
+            <a:pPr>
+              <a:lnSpc>
+                <a:spcPct val="112000"/>
+              </a:lnSpc>
+              <a:spcAft>
+                <a:spcPts val="1600"/>
+              </a:spcAft>
+            </a:pPr>
+            <a:r>
+              <a:rPr sz="1700">
+                <a:solidFill>
+                  <a:srgbClr val="E7F5F4"/>
+                </a:solidFill>
+                <a:latin typeface="Calibri"/>
+              </a:rPr>
+              <a:t>•  4. Paciente — tenta cancelar consulta finalizada → bloqueado (RN10)</a:t>
+            </a:r>
+          </a:p>
+          <a:p>
+            <a:pPr>
+              <a:lnSpc>
+                <a:spcPct val="112000"/>
+              </a:lnSpc>
+              <a:spcAft>
+                <a:spcPts val="1600"/>
+              </a:spcAft>
+            </a:pPr>
+            <a:r>
+              <a:rPr sz="1700">
+                <a:solidFill>
+                  <a:srgbClr val="E7F5F4"/>
+                </a:solidFill>
+                <a:latin typeface="Calibri"/>
+              </a:rPr>
+              <a:t>•  5. Atendente — agenda 2ª consulta; tenta duplicar horário → bloqueado (RN03/RN05)</a:t>
+            </a:r>
+          </a:p>
+          <a:p>
+            <a:pPr>
+              <a:lnSpc>
+                <a:spcPct val="112000"/>
+              </a:lnSpc>
+              <a:spcAft>
+                <a:spcPts val="1600"/>
+              </a:spcAft>
+            </a:pPr>
+            <a:r>
+              <a:rPr sz="1700">
+                <a:solidFill>
+                  <a:srgbClr val="E7F5F4"/>
+                </a:solidFill>
+                <a:latin typeface="Calibri"/>
+              </a:rPr>
+              <a:t>•  6. Sessão inválida — token corrompido força logout automático</a:t>
+            </a:r>
           </a:p>
         </p:txBody>
       </p:sp>
@@ -17642,8 +19959,8 @@
         </p:nvSpPr>
         <p:spPr>
           <a:xfrm>
-            <a:off x="11247120" y="6473952"/>
-            <a:ext cx="640080" cy="320040"/>
+            <a:off x="548640" y="6126480"/>
+            <a:ext cx="9144000" cy="457200"/>
           </a:xfrm>
           <a:prstGeom prst="rect">
             <a:avLst/>
@@ -17656,1034 +19973,19 @@
           </a:bodyPr>
           <a:lstStyle/>
           <a:p>
-            <a:pPr algn="r">
-              <a:lnSpc>
-                <a:spcPct val="115000"/>
-              </a:lnSpc>
-            </a:pPr>
-            <a:r>
-              <a:rPr sz="1100" b="0" i="0">
-                <a:solidFill>
-                  <a:srgbClr val="8A9399"/>
-                </a:solidFill>
-                <a:latin typeface="Calibri"/>
-              </a:rPr>
-              <a:t>20</a:t>
-            </a:r>
-          </a:p>
-        </p:txBody>
-      </p:sp>
-      <p:sp>
-        <p:nvSpPr>
-          <p:cNvPr id="7" name="Rounded Rectangle 6"/>
-          <p:cNvSpPr/>
-          <p:nvPr/>
-        </p:nvSpPr>
-        <p:spPr>
-          <a:xfrm>
-            <a:off x="548640" y="1645920"/>
-            <a:ext cx="2606040" cy="1554480"/>
-          </a:xfrm>
-          <a:prstGeom prst="roundRect">
-            <a:avLst/>
-          </a:prstGeom>
-          <a:solidFill>
-            <a:srgbClr val="12635F"/>
-          </a:solidFill>
-          <a:ln>
-            <a:noFill/>
-          </a:ln>
-          <a:effectLst/>
-        </p:spPr>
-        <p:style>
-          <a:lnRef idx="1">
-            <a:schemeClr val="accent1"/>
-          </a:lnRef>
-          <a:fillRef idx="3">
-            <a:schemeClr val="accent1"/>
-          </a:fillRef>
-          <a:effectRef idx="2">
-            <a:schemeClr val="accent1"/>
-          </a:effectRef>
-          <a:fontRef idx="minor">
-            <a:schemeClr val="lt1"/>
-          </a:fontRef>
-        </p:style>
-        <p:txBody>
-          <a:bodyPr rtlCol="0" anchor="ctr"/>
-          <a:lstStyle/>
-          <a:p>
-            <a:pPr algn="ctr"/>
-          </a:p>
-        </p:txBody>
-      </p:sp>
-      <p:sp>
-        <p:nvSpPr>
-          <p:cNvPr id="8" name="TextBox 7"/>
-          <p:cNvSpPr txBox="1"/>
-          <p:nvPr/>
-        </p:nvSpPr>
-        <p:spPr>
-          <a:xfrm>
-            <a:off x="548640" y="1828800"/>
-            <a:ext cx="2606040" cy="640080"/>
-          </a:xfrm>
-          <a:prstGeom prst="rect">
-            <a:avLst/>
-          </a:prstGeom>
-          <a:noFill/>
-        </p:spPr>
-        <p:txBody>
-          <a:bodyPr wrap="square" anchor="t">
-            <a:spAutoFit/>
-          </a:bodyPr>
-          <a:lstStyle/>
-          <a:p>
-            <a:pPr algn="ctr">
-              <a:lnSpc>
-                <a:spcPct val="115000"/>
-              </a:lnSpc>
-            </a:pPr>
-            <a:r>
-              <a:rPr sz="3000" b="1" i="0">
-                <a:solidFill>
-                  <a:srgbClr val="FFFFFF"/>
-                </a:solidFill>
-                <a:latin typeface="Calibri"/>
-              </a:rPr>
-              <a:t>14/14</a:t>
-            </a:r>
-          </a:p>
-        </p:txBody>
-      </p:sp>
-      <p:sp>
-        <p:nvSpPr>
-          <p:cNvPr id="9" name="TextBox 8"/>
-          <p:cNvSpPr txBox="1"/>
-          <p:nvPr/>
-        </p:nvSpPr>
-        <p:spPr>
-          <a:xfrm>
-            <a:off x="685800" y="2514600"/>
-            <a:ext cx="2331720" cy="594360"/>
-          </a:xfrm>
-          <a:prstGeom prst="rect">
-            <a:avLst/>
-          </a:prstGeom>
-          <a:noFill/>
-        </p:spPr>
-        <p:txBody>
-          <a:bodyPr wrap="square" anchor="t">
-            <a:spAutoFit/>
-          </a:bodyPr>
-          <a:lstStyle/>
-          <a:p>
-            <a:pPr algn="ctr">
-              <a:lnSpc>
-                <a:spcPct val="110000"/>
-              </a:lnSpc>
-            </a:pPr>
-            <a:r>
-              <a:rPr sz="1150" b="0" i="0">
-                <a:solidFill>
-                  <a:srgbClr val="E7F5F4"/>
-                </a:solidFill>
-                <a:latin typeface="Calibri"/>
-              </a:rPr>
-              <a:t>User Stories entregues</a:t>
-            </a:r>
-          </a:p>
-        </p:txBody>
-      </p:sp>
-      <p:sp>
-        <p:nvSpPr>
-          <p:cNvPr id="10" name="Rounded Rectangle 9"/>
-          <p:cNvSpPr/>
-          <p:nvPr/>
-        </p:nvSpPr>
-        <p:spPr>
-          <a:xfrm>
-            <a:off x="3291840" y="1645920"/>
-            <a:ext cx="2606040" cy="1554480"/>
-          </a:xfrm>
-          <a:prstGeom prst="roundRect">
-            <a:avLst/>
-          </a:prstGeom>
-          <a:solidFill>
-            <a:srgbClr val="28726F"/>
-          </a:solidFill>
-          <a:ln>
-            <a:noFill/>
-          </a:ln>
-          <a:effectLst/>
-        </p:spPr>
-        <p:style>
-          <a:lnRef idx="1">
-            <a:schemeClr val="accent1"/>
-          </a:lnRef>
-          <a:fillRef idx="3">
-            <a:schemeClr val="accent1"/>
-          </a:fillRef>
-          <a:effectRef idx="2">
-            <a:schemeClr val="accent1"/>
-          </a:effectRef>
-          <a:fontRef idx="minor">
-            <a:schemeClr val="lt1"/>
-          </a:fontRef>
-        </p:style>
-        <p:txBody>
-          <a:bodyPr rtlCol="0" anchor="ctr"/>
-          <a:lstStyle/>
-          <a:p>
-            <a:pPr algn="ctr"/>
-          </a:p>
-        </p:txBody>
-      </p:sp>
-      <p:sp>
-        <p:nvSpPr>
-          <p:cNvPr id="11" name="TextBox 10"/>
-          <p:cNvSpPr txBox="1"/>
-          <p:nvPr/>
-        </p:nvSpPr>
-        <p:spPr>
-          <a:xfrm>
-            <a:off x="3291840" y="1828800"/>
-            <a:ext cx="2606040" cy="640080"/>
-          </a:xfrm>
-          <a:prstGeom prst="rect">
-            <a:avLst/>
-          </a:prstGeom>
-          <a:noFill/>
-        </p:spPr>
-        <p:txBody>
-          <a:bodyPr wrap="square" anchor="t">
-            <a:spAutoFit/>
-          </a:bodyPr>
-          <a:lstStyle/>
-          <a:p>
-            <a:pPr algn="ctr">
-              <a:lnSpc>
-                <a:spcPct val="115000"/>
-              </a:lnSpc>
-            </a:pPr>
-            <a:r>
-              <a:rPr sz="3000" b="1" i="0">
-                <a:solidFill>
-                  <a:srgbClr val="FFFFFF"/>
-                </a:solidFill>
-                <a:latin typeface="Calibri"/>
-              </a:rPr>
-              <a:t>17/17</a:t>
-            </a:r>
-          </a:p>
-        </p:txBody>
-      </p:sp>
-      <p:sp>
-        <p:nvSpPr>
-          <p:cNvPr id="12" name="TextBox 11"/>
-          <p:cNvSpPr txBox="1"/>
-          <p:nvPr/>
-        </p:nvSpPr>
-        <p:spPr>
-          <a:xfrm>
-            <a:off x="3429000" y="2514600"/>
-            <a:ext cx="2331720" cy="594360"/>
-          </a:xfrm>
-          <a:prstGeom prst="rect">
-            <a:avLst/>
-          </a:prstGeom>
-          <a:noFill/>
-        </p:spPr>
-        <p:txBody>
-          <a:bodyPr wrap="square" anchor="t">
-            <a:spAutoFit/>
-          </a:bodyPr>
-          <a:lstStyle/>
-          <a:p>
-            <a:pPr algn="ctr">
-              <a:lnSpc>
-                <a:spcPct val="110000"/>
-              </a:lnSpc>
-            </a:pPr>
-            <a:r>
-              <a:rPr sz="1150" b="0" i="0">
-                <a:solidFill>
-                  <a:srgbClr val="E7F5F4"/>
-                </a:solidFill>
-                <a:latin typeface="Calibri"/>
-              </a:rPr>
-              <a:t>regras de negócio testadas</a:t>
-            </a:r>
-          </a:p>
-        </p:txBody>
-      </p:sp>
-      <p:sp>
-        <p:nvSpPr>
-          <p:cNvPr id="13" name="Rounded Rectangle 12"/>
-          <p:cNvSpPr/>
-          <p:nvPr/>
-        </p:nvSpPr>
-        <p:spPr>
-          <a:xfrm>
-            <a:off x="6035040" y="1645920"/>
-            <a:ext cx="2606040" cy="1554480"/>
-          </a:xfrm>
-          <a:prstGeom prst="roundRect">
-            <a:avLst/>
-          </a:prstGeom>
-          <a:solidFill>
-            <a:srgbClr val="44938F"/>
-          </a:solidFill>
-          <a:ln>
-            <a:noFill/>
-          </a:ln>
-          <a:effectLst/>
-        </p:spPr>
-        <p:style>
-          <a:lnRef idx="1">
-            <a:schemeClr val="accent1"/>
-          </a:lnRef>
-          <a:fillRef idx="3">
-            <a:schemeClr val="accent1"/>
-          </a:fillRef>
-          <a:effectRef idx="2">
-            <a:schemeClr val="accent1"/>
-          </a:effectRef>
-          <a:fontRef idx="minor">
-            <a:schemeClr val="lt1"/>
-          </a:fontRef>
-        </p:style>
-        <p:txBody>
-          <a:bodyPr rtlCol="0" anchor="ctr"/>
-          <a:lstStyle/>
-          <a:p>
-            <a:pPr algn="ctr"/>
-          </a:p>
-        </p:txBody>
-      </p:sp>
-      <p:sp>
-        <p:nvSpPr>
-          <p:cNvPr id="14" name="TextBox 13"/>
-          <p:cNvSpPr txBox="1"/>
-          <p:nvPr/>
-        </p:nvSpPr>
-        <p:spPr>
-          <a:xfrm>
-            <a:off x="6035040" y="1828800"/>
-            <a:ext cx="2606040" cy="640080"/>
-          </a:xfrm>
-          <a:prstGeom prst="rect">
-            <a:avLst/>
-          </a:prstGeom>
-          <a:noFill/>
-        </p:spPr>
-        <p:txBody>
-          <a:bodyPr wrap="square" anchor="t">
-            <a:spAutoFit/>
-          </a:bodyPr>
-          <a:lstStyle/>
-          <a:p>
-            <a:pPr algn="ctr">
-              <a:lnSpc>
-                <a:spcPct val="115000"/>
-              </a:lnSpc>
-            </a:pPr>
-            <a:r>
-              <a:rPr sz="3000" b="1" i="0">
-                <a:solidFill>
-                  <a:srgbClr val="FFFFFF"/>
-                </a:solidFill>
-                <a:latin typeface="Calibri"/>
-              </a:rPr>
-              <a:t>14/14</a:t>
-            </a:r>
-          </a:p>
-        </p:txBody>
-      </p:sp>
-      <p:sp>
-        <p:nvSpPr>
-          <p:cNvPr id="15" name="TextBox 14"/>
-          <p:cNvSpPr txBox="1"/>
-          <p:nvPr/>
-        </p:nvSpPr>
-        <p:spPr>
-          <a:xfrm>
-            <a:off x="6172200" y="2514600"/>
-            <a:ext cx="2331720" cy="594360"/>
-          </a:xfrm>
-          <a:prstGeom prst="rect">
-            <a:avLst/>
-          </a:prstGeom>
-          <a:noFill/>
-        </p:spPr>
-        <p:txBody>
-          <a:bodyPr wrap="square" anchor="t">
-            <a:spAutoFit/>
-          </a:bodyPr>
-          <a:lstStyle/>
-          <a:p>
-            <a:pPr algn="ctr">
-              <a:lnSpc>
-                <a:spcPct val="110000"/>
-              </a:lnSpc>
-            </a:pPr>
-            <a:r>
-              <a:rPr sz="1150" b="0" i="0">
-                <a:solidFill>
-                  <a:srgbClr val="E7F5F4"/>
-                </a:solidFill>
-                <a:latin typeface="Calibri"/>
-              </a:rPr>
-              <a:t>casos de teste (CT) aprovados</a:t>
-            </a:r>
-          </a:p>
-        </p:txBody>
-      </p:sp>
-      <p:sp>
-        <p:nvSpPr>
-          <p:cNvPr id="16" name="Rounded Rectangle 15"/>
-          <p:cNvSpPr/>
-          <p:nvPr/>
-        </p:nvSpPr>
-        <p:spPr>
-          <a:xfrm>
-            <a:off x="8778240" y="1645920"/>
-            <a:ext cx="2606040" cy="1554480"/>
-          </a:xfrm>
-          <a:prstGeom prst="roundRect">
-            <a:avLst/>
-          </a:prstGeom>
-          <a:solidFill>
-            <a:srgbClr val="12635F"/>
-          </a:solidFill>
-          <a:ln>
-            <a:noFill/>
-          </a:ln>
-          <a:effectLst/>
-        </p:spPr>
-        <p:style>
-          <a:lnRef idx="1">
-            <a:schemeClr val="accent1"/>
-          </a:lnRef>
-          <a:fillRef idx="3">
-            <a:schemeClr val="accent1"/>
-          </a:fillRef>
-          <a:effectRef idx="2">
-            <a:schemeClr val="accent1"/>
-          </a:effectRef>
-          <a:fontRef idx="minor">
-            <a:schemeClr val="lt1"/>
-          </a:fontRef>
-        </p:style>
-        <p:txBody>
-          <a:bodyPr rtlCol="0" anchor="ctr"/>
-          <a:lstStyle/>
-          <a:p>
-            <a:pPr algn="ctr"/>
-          </a:p>
-        </p:txBody>
-      </p:sp>
-      <p:sp>
-        <p:nvSpPr>
-          <p:cNvPr id="17" name="TextBox 16"/>
-          <p:cNvSpPr txBox="1"/>
-          <p:nvPr/>
-        </p:nvSpPr>
-        <p:spPr>
-          <a:xfrm>
-            <a:off x="8778240" y="1828800"/>
-            <a:ext cx="2606040" cy="640080"/>
-          </a:xfrm>
-          <a:prstGeom prst="rect">
-            <a:avLst/>
-          </a:prstGeom>
-          <a:noFill/>
-        </p:spPr>
-        <p:txBody>
-          <a:bodyPr wrap="square" anchor="t">
-            <a:spAutoFit/>
-          </a:bodyPr>
-          <a:lstStyle/>
-          <a:p>
-            <a:pPr algn="ctr">
-              <a:lnSpc>
-                <a:spcPct val="115000"/>
-              </a:lnSpc>
-            </a:pPr>
-            <a:r>
-              <a:rPr sz="3000" b="1" i="0">
-                <a:solidFill>
-                  <a:srgbClr val="FFFFFF"/>
-                </a:solidFill>
-                <a:latin typeface="Calibri"/>
-              </a:rPr>
-              <a:t>95 + 116</a:t>
-            </a:r>
-          </a:p>
-        </p:txBody>
-      </p:sp>
-      <p:sp>
-        <p:nvSpPr>
-          <p:cNvPr id="18" name="TextBox 17"/>
-          <p:cNvSpPr txBox="1"/>
-          <p:nvPr/>
-        </p:nvSpPr>
-        <p:spPr>
-          <a:xfrm>
-            <a:off x="8915400" y="2514600"/>
-            <a:ext cx="2331720" cy="594360"/>
-          </a:xfrm>
-          <a:prstGeom prst="rect">
-            <a:avLst/>
-          </a:prstGeom>
-          <a:noFill/>
-        </p:spPr>
-        <p:txBody>
-          <a:bodyPr wrap="square" anchor="t">
-            <a:spAutoFit/>
-          </a:bodyPr>
-          <a:lstStyle/>
-          <a:p>
-            <a:pPr algn="ctr">
-              <a:lnSpc>
-                <a:spcPct val="110000"/>
-              </a:lnSpc>
-            </a:pPr>
-            <a:r>
-              <a:rPr sz="1150" b="0" i="0">
-                <a:solidFill>
-                  <a:srgbClr val="E7F5F4"/>
-                </a:solidFill>
-                <a:latin typeface="Calibri"/>
-              </a:rPr>
-              <a:t>testes automatizados (back + front)</a:t>
-            </a:r>
-          </a:p>
-        </p:txBody>
-      </p:sp>
-      <p:sp>
-        <p:nvSpPr>
-          <p:cNvPr id="19" name="Rounded Rectangle 18"/>
-          <p:cNvSpPr/>
-          <p:nvPr/>
-        </p:nvSpPr>
-        <p:spPr>
-          <a:xfrm>
-            <a:off x="548640" y="3429000"/>
-            <a:ext cx="2606040" cy="1554480"/>
-          </a:xfrm>
-          <a:prstGeom prst="roundRect">
-            <a:avLst/>
-          </a:prstGeom>
-          <a:solidFill>
-            <a:srgbClr val="28726F"/>
-          </a:solidFill>
-          <a:ln>
-            <a:noFill/>
-          </a:ln>
-          <a:effectLst/>
-        </p:spPr>
-        <p:style>
-          <a:lnRef idx="1">
-            <a:schemeClr val="accent1"/>
-          </a:lnRef>
-          <a:fillRef idx="3">
-            <a:schemeClr val="accent1"/>
-          </a:fillRef>
-          <a:effectRef idx="2">
-            <a:schemeClr val="accent1"/>
-          </a:effectRef>
-          <a:fontRef idx="minor">
-            <a:schemeClr val="lt1"/>
-          </a:fontRef>
-        </p:style>
-        <p:txBody>
-          <a:bodyPr rtlCol="0" anchor="ctr"/>
-          <a:lstStyle/>
-          <a:p>
-            <a:pPr algn="ctr"/>
-          </a:p>
-        </p:txBody>
-      </p:sp>
-      <p:sp>
-        <p:nvSpPr>
-          <p:cNvPr id="20" name="TextBox 19"/>
-          <p:cNvSpPr txBox="1"/>
-          <p:nvPr/>
-        </p:nvSpPr>
-        <p:spPr>
-          <a:xfrm>
-            <a:off x="548640" y="3611880"/>
-            <a:ext cx="2606040" cy="640080"/>
-          </a:xfrm>
-          <a:prstGeom prst="rect">
-            <a:avLst/>
-          </a:prstGeom>
-          <a:noFill/>
-        </p:spPr>
-        <p:txBody>
-          <a:bodyPr wrap="square" anchor="t">
-            <a:spAutoFit/>
-          </a:bodyPr>
-          <a:lstStyle/>
-          <a:p>
-            <a:pPr algn="ctr">
-              <a:lnSpc>
-                <a:spcPct val="115000"/>
-              </a:lnSpc>
-            </a:pPr>
-            <a:r>
-              <a:rPr sz="3000" b="1" i="0">
-                <a:solidFill>
-                  <a:srgbClr val="FFFFFF"/>
-                </a:solidFill>
-                <a:latin typeface="Calibri"/>
-              </a:rPr>
-              <a:t>84%</a:t>
-            </a:r>
-          </a:p>
-        </p:txBody>
-      </p:sp>
-      <p:sp>
-        <p:nvSpPr>
-          <p:cNvPr id="21" name="TextBox 20"/>
-          <p:cNvSpPr txBox="1"/>
-          <p:nvPr/>
-        </p:nvSpPr>
-        <p:spPr>
-          <a:xfrm>
-            <a:off x="685800" y="4297680"/>
-            <a:ext cx="2331720" cy="594360"/>
-          </a:xfrm>
-          <a:prstGeom prst="rect">
-            <a:avLst/>
-          </a:prstGeom>
-          <a:noFill/>
-        </p:spPr>
-        <p:txBody>
-          <a:bodyPr wrap="square" anchor="t">
-            <a:spAutoFit/>
-          </a:bodyPr>
-          <a:lstStyle/>
-          <a:p>
-            <a:pPr algn="ctr">
-              <a:lnSpc>
-                <a:spcPct val="110000"/>
-              </a:lnSpc>
-            </a:pPr>
-            <a:r>
-              <a:rPr sz="1150" b="0" i="0">
-                <a:solidFill>
-                  <a:srgbClr val="E7F5F4"/>
-                </a:solidFill>
-                <a:latin typeface="Calibri"/>
-              </a:rPr>
-              <a:t>cobertura de código no backend</a:t>
-            </a:r>
-          </a:p>
-        </p:txBody>
-      </p:sp>
-      <p:sp>
-        <p:nvSpPr>
-          <p:cNvPr id="22" name="Rounded Rectangle 21"/>
-          <p:cNvSpPr/>
-          <p:nvPr/>
-        </p:nvSpPr>
-        <p:spPr>
-          <a:xfrm>
-            <a:off x="3291840" y="3429000"/>
-            <a:ext cx="2606040" cy="1554480"/>
-          </a:xfrm>
-          <a:prstGeom prst="roundRect">
-            <a:avLst/>
-          </a:prstGeom>
-          <a:solidFill>
-            <a:srgbClr val="44938F"/>
-          </a:solidFill>
-          <a:ln>
-            <a:noFill/>
-          </a:ln>
-          <a:effectLst/>
-        </p:spPr>
-        <p:style>
-          <a:lnRef idx="1">
-            <a:schemeClr val="accent1"/>
-          </a:lnRef>
-          <a:fillRef idx="3">
-            <a:schemeClr val="accent1"/>
-          </a:fillRef>
-          <a:effectRef idx="2">
-            <a:schemeClr val="accent1"/>
-          </a:effectRef>
-          <a:fontRef idx="minor">
-            <a:schemeClr val="lt1"/>
-          </a:fontRef>
-        </p:style>
-        <p:txBody>
-          <a:bodyPr rtlCol="0" anchor="ctr"/>
-          <a:lstStyle/>
-          <a:p>
-            <a:pPr algn="ctr"/>
-          </a:p>
-        </p:txBody>
-      </p:sp>
-      <p:sp>
-        <p:nvSpPr>
-          <p:cNvPr id="23" name="TextBox 22"/>
-          <p:cNvSpPr txBox="1"/>
-          <p:nvPr/>
-        </p:nvSpPr>
-        <p:spPr>
-          <a:xfrm>
-            <a:off x="3291840" y="3611880"/>
-            <a:ext cx="2606040" cy="640080"/>
-          </a:xfrm>
-          <a:prstGeom prst="rect">
-            <a:avLst/>
-          </a:prstGeom>
-          <a:noFill/>
-        </p:spPr>
-        <p:txBody>
-          <a:bodyPr wrap="square" anchor="t">
-            <a:spAutoFit/>
-          </a:bodyPr>
-          <a:lstStyle/>
-          <a:p>
-            <a:pPr algn="ctr">
-              <a:lnSpc>
-                <a:spcPct val="115000"/>
-              </a:lnSpc>
-            </a:pPr>
-            <a:r>
-              <a:rPr sz="3000" b="1" i="0">
-                <a:solidFill>
-                  <a:srgbClr val="FFFFFF"/>
-                </a:solidFill>
-                <a:latin typeface="Calibri"/>
-              </a:rPr>
-              <a:t>9</a:t>
-            </a:r>
-          </a:p>
-        </p:txBody>
-      </p:sp>
-      <p:sp>
-        <p:nvSpPr>
-          <p:cNvPr id="24" name="TextBox 23"/>
-          <p:cNvSpPr txBox="1"/>
-          <p:nvPr/>
-        </p:nvSpPr>
-        <p:spPr>
-          <a:xfrm>
-            <a:off x="3429000" y="4297680"/>
-            <a:ext cx="2331720" cy="594360"/>
-          </a:xfrm>
-          <a:prstGeom prst="rect">
-            <a:avLst/>
-          </a:prstGeom>
-          <a:noFill/>
-        </p:spPr>
-        <p:txBody>
-          <a:bodyPr wrap="square" anchor="t">
-            <a:spAutoFit/>
-          </a:bodyPr>
-          <a:lstStyle/>
-          <a:p>
-            <a:pPr algn="ctr">
-              <a:lnSpc>
-                <a:spcPct val="110000"/>
-              </a:lnSpc>
-            </a:pPr>
-            <a:r>
-              <a:rPr sz="1150" b="0" i="0">
-                <a:solidFill>
-                  <a:srgbClr val="E7F5F4"/>
-                </a:solidFill>
-                <a:latin typeface="Calibri"/>
-              </a:rPr>
-              <a:t>ADRs registrados</a:t>
-            </a:r>
-          </a:p>
-        </p:txBody>
-      </p:sp>
-      <p:sp>
-        <p:nvSpPr>
-          <p:cNvPr id="25" name="Rounded Rectangle 24"/>
-          <p:cNvSpPr/>
-          <p:nvPr/>
-        </p:nvSpPr>
-        <p:spPr>
-          <a:xfrm>
-            <a:off x="6035040" y="3429000"/>
-            <a:ext cx="2606040" cy="1554480"/>
-          </a:xfrm>
-          <a:prstGeom prst="roundRect">
-            <a:avLst/>
-          </a:prstGeom>
-          <a:solidFill>
-            <a:srgbClr val="12635F"/>
-          </a:solidFill>
-          <a:ln>
-            <a:noFill/>
-          </a:ln>
-          <a:effectLst/>
-        </p:spPr>
-        <p:style>
-          <a:lnRef idx="1">
-            <a:schemeClr val="accent1"/>
-          </a:lnRef>
-          <a:fillRef idx="3">
-            <a:schemeClr val="accent1"/>
-          </a:fillRef>
-          <a:effectRef idx="2">
-            <a:schemeClr val="accent1"/>
-          </a:effectRef>
-          <a:fontRef idx="minor">
-            <a:schemeClr val="lt1"/>
-          </a:fontRef>
-        </p:style>
-        <p:txBody>
-          <a:bodyPr rtlCol="0" anchor="ctr"/>
-          <a:lstStyle/>
-          <a:p>
-            <a:pPr algn="ctr"/>
-          </a:p>
-        </p:txBody>
-      </p:sp>
-      <p:sp>
-        <p:nvSpPr>
-          <p:cNvPr id="26" name="TextBox 25"/>
-          <p:cNvSpPr txBox="1"/>
-          <p:nvPr/>
-        </p:nvSpPr>
-        <p:spPr>
-          <a:xfrm>
-            <a:off x="6035040" y="3611880"/>
-            <a:ext cx="2606040" cy="640080"/>
-          </a:xfrm>
-          <a:prstGeom prst="rect">
-            <a:avLst/>
-          </a:prstGeom>
-          <a:noFill/>
-        </p:spPr>
-        <p:txBody>
-          <a:bodyPr wrap="square" anchor="t">
-            <a:spAutoFit/>
-          </a:bodyPr>
-          <a:lstStyle/>
-          <a:p>
-            <a:pPr algn="ctr">
-              <a:lnSpc>
-                <a:spcPct val="115000"/>
-              </a:lnSpc>
-            </a:pPr>
-            <a:r>
-              <a:rPr sz="3000" b="1" i="0">
-                <a:solidFill>
-                  <a:srgbClr val="FFFFFF"/>
-                </a:solidFill>
-                <a:latin typeface="Calibri"/>
-              </a:rPr>
-              <a:t>1</a:t>
-            </a:r>
-          </a:p>
-        </p:txBody>
-      </p:sp>
-      <p:sp>
-        <p:nvSpPr>
-          <p:cNvPr id="27" name="TextBox 26"/>
-          <p:cNvSpPr txBox="1"/>
-          <p:nvPr/>
-        </p:nvSpPr>
-        <p:spPr>
-          <a:xfrm>
-            <a:off x="6172200" y="4297680"/>
-            <a:ext cx="2331720" cy="594360"/>
-          </a:xfrm>
-          <a:prstGeom prst="rect">
-            <a:avLst/>
-          </a:prstGeom>
-          <a:noFill/>
-        </p:spPr>
-        <p:txBody>
-          <a:bodyPr wrap="square" anchor="t">
-            <a:spAutoFit/>
-          </a:bodyPr>
-          <a:lstStyle/>
-          <a:p>
-            <a:pPr algn="ctr">
-              <a:lnSpc>
-                <a:spcPct val="110000"/>
-              </a:lnSpc>
-            </a:pPr>
-            <a:r>
-              <a:rPr sz="1150" b="0" i="0">
-                <a:solidFill>
-                  <a:srgbClr val="E7F5F4"/>
-                </a:solidFill>
-                <a:latin typeface="Calibri"/>
-              </a:rPr>
-              <a:t>bug de robustez em aberto (Alta — validação de senha, EXP-01)</a:t>
-            </a:r>
-          </a:p>
-        </p:txBody>
-      </p:sp>
-      <p:sp>
-        <p:nvSpPr>
-          <p:cNvPr id="28" name="Rounded Rectangle 27"/>
-          <p:cNvSpPr/>
-          <p:nvPr/>
-        </p:nvSpPr>
-        <p:spPr>
-          <a:xfrm>
-            <a:off x="8778240" y="3429000"/>
-            <a:ext cx="2606040" cy="1554480"/>
-          </a:xfrm>
-          <a:prstGeom prst="roundRect">
-            <a:avLst/>
-          </a:prstGeom>
-          <a:solidFill>
-            <a:srgbClr val="28726F"/>
-          </a:solidFill>
-          <a:ln>
-            <a:noFill/>
-          </a:ln>
-          <a:effectLst/>
-        </p:spPr>
-        <p:style>
-          <a:lnRef idx="1">
-            <a:schemeClr val="accent1"/>
-          </a:lnRef>
-          <a:fillRef idx="3">
-            <a:schemeClr val="accent1"/>
-          </a:fillRef>
-          <a:effectRef idx="2">
-            <a:schemeClr val="accent1"/>
-          </a:effectRef>
-          <a:fontRef idx="minor">
-            <a:schemeClr val="lt1"/>
-          </a:fontRef>
-        </p:style>
-        <p:txBody>
-          <a:bodyPr rtlCol="0" anchor="ctr"/>
-          <a:lstStyle/>
-          <a:p>
-            <a:pPr algn="ctr"/>
-          </a:p>
-        </p:txBody>
-      </p:sp>
-      <p:sp>
-        <p:nvSpPr>
-          <p:cNvPr id="29" name="TextBox 28"/>
-          <p:cNvSpPr txBox="1"/>
-          <p:nvPr/>
-        </p:nvSpPr>
-        <p:spPr>
-          <a:xfrm>
-            <a:off x="8778240" y="3611880"/>
-            <a:ext cx="2606040" cy="640080"/>
-          </a:xfrm>
-          <a:prstGeom prst="rect">
-            <a:avLst/>
-          </a:prstGeom>
-          <a:noFill/>
-        </p:spPr>
-        <p:txBody>
-          <a:bodyPr wrap="square" anchor="t">
-            <a:spAutoFit/>
-          </a:bodyPr>
-          <a:lstStyle/>
-          <a:p>
-            <a:pPr algn="ctr">
-              <a:lnSpc>
-                <a:spcPct val="115000"/>
-              </a:lnSpc>
-            </a:pPr>
-            <a:r>
-              <a:rPr sz="3000" b="1" i="0">
-                <a:solidFill>
-                  <a:srgbClr val="FFFFFF"/>
-                </a:solidFill>
-                <a:latin typeface="Calibri"/>
-              </a:rPr>
-              <a:t>3</a:t>
-            </a:r>
-          </a:p>
-        </p:txBody>
-      </p:sp>
-      <p:sp>
-        <p:nvSpPr>
-          <p:cNvPr id="30" name="TextBox 29"/>
-          <p:cNvSpPr txBox="1"/>
-          <p:nvPr/>
-        </p:nvSpPr>
-        <p:spPr>
-          <a:xfrm>
-            <a:off x="8915400" y="4297680"/>
-            <a:ext cx="2331720" cy="594360"/>
-          </a:xfrm>
-          <a:prstGeom prst="rect">
-            <a:avLst/>
-          </a:prstGeom>
-          <a:noFill/>
-        </p:spPr>
-        <p:txBody>
-          <a:bodyPr wrap="square" anchor="t">
-            <a:spAutoFit/>
-          </a:bodyPr>
-          <a:lstStyle/>
-          <a:p>
-            <a:pPr algn="ctr">
-              <a:lnSpc>
-                <a:spcPct val="110000"/>
-              </a:lnSpc>
-            </a:pPr>
-            <a:r>
-              <a:rPr sz="1150" b="0" i="0">
-                <a:solidFill>
-                  <a:srgbClr val="E7F5F4"/>
-                </a:solidFill>
-                <a:latin typeface="Calibri"/>
-              </a:rPr>
-              <a:t>bugs de concorrência achados e corrigidos (EXP-02)</a:t>
-            </a:r>
-          </a:p>
-        </p:txBody>
-      </p:sp>
-      <p:sp>
-        <p:nvSpPr>
-          <p:cNvPr id="31" name="TextBox 30"/>
-          <p:cNvSpPr txBox="1"/>
-          <p:nvPr/>
-        </p:nvSpPr>
-        <p:spPr>
-          <a:xfrm>
-            <a:off x="548640" y="6473952"/>
-            <a:ext cx="8229600" cy="320040"/>
-          </a:xfrm>
-          <a:prstGeom prst="rect">
-            <a:avLst/>
-          </a:prstGeom>
-          <a:noFill/>
-        </p:spPr>
-        <p:txBody>
-          <a:bodyPr wrap="square" anchor="t">
-            <a:spAutoFit/>
-          </a:bodyPr>
-          <a:lstStyle/>
-          <a:p>
             <a:pPr algn="l">
               <a:lnSpc>
                 <a:spcPct val="115000"/>
               </a:lnSpc>
             </a:pPr>
             <a:r>
-              <a:rPr sz="1000" b="0" i="0">
-                <a:solidFill>
-                  <a:srgbClr val="8A9399"/>
-                </a:solidFill>
-                <a:latin typeface="Calibri"/>
-              </a:rPr>
-              <a:t>Clínica Médica MVP · Equipe 01 · AV2 Engenharia de Software Moderna</a:t>
+              <a:rPr sz="1300" b="0" i="1">
+                <a:solidFill>
+                  <a:srgbClr val="B1D1CF"/>
+                </a:solidFill>
+                <a:latin typeface="Calibri"/>
+              </a:rPr>
+              <a:t>localhost:3000 · Swagger em localhost:8000/docs</a:t>
             </a:r>
           </a:p>
         </p:txBody>
@@ -18792,7 +20094,7 @@
                 </a:solidFill>
                 <a:latin typeface="Calibri"/>
               </a:rPr>
-              <a:t>BACKLOG DE EVOLUÇÃO</a:t>
+              <a:t>ESTADO NA ENTREGA</a:t>
             </a:r>
           </a:p>
         </p:txBody>
@@ -18831,7 +20133,7 @@
                 </a:solidFill>
                 <a:latin typeface="Calibri"/>
               </a:rPr>
-              <a:t>Melhorias futuras — o que ficou fora, por quê</a:t>
+              <a:t>Métricas do projeto</a:t>
             </a:r>
           </a:p>
         </p:txBody>
@@ -18927,8 +20229,130 @@
         </p:nvSpPr>
         <p:spPr>
           <a:xfrm>
-            <a:off x="548640" y="1600200"/>
-            <a:ext cx="1005840" cy="777240"/>
+            <a:off x="548640" y="1645920"/>
+            <a:ext cx="2606040" cy="1554480"/>
+          </a:xfrm>
+          <a:prstGeom prst="roundRect">
+            <a:avLst/>
+          </a:prstGeom>
+          <a:solidFill>
+            <a:srgbClr val="12635F"/>
+          </a:solidFill>
+          <a:ln>
+            <a:noFill/>
+          </a:ln>
+          <a:effectLst/>
+        </p:spPr>
+        <p:style>
+          <a:lnRef idx="1">
+            <a:schemeClr val="accent1"/>
+          </a:lnRef>
+          <a:fillRef idx="3">
+            <a:schemeClr val="accent1"/>
+          </a:fillRef>
+          <a:effectRef idx="2">
+            <a:schemeClr val="accent1"/>
+          </a:effectRef>
+          <a:fontRef idx="minor">
+            <a:schemeClr val="lt1"/>
+          </a:fontRef>
+        </p:style>
+        <p:txBody>
+          <a:bodyPr rtlCol="0" anchor="ctr"/>
+          <a:lstStyle/>
+          <a:p>
+            <a:pPr algn="ctr"/>
+          </a:p>
+        </p:txBody>
+      </p:sp>
+      <p:sp>
+        <p:nvSpPr>
+          <p:cNvPr id="8" name="TextBox 7"/>
+          <p:cNvSpPr txBox="1"/>
+          <p:nvPr/>
+        </p:nvSpPr>
+        <p:spPr>
+          <a:xfrm>
+            <a:off x="548640" y="1828800"/>
+            <a:ext cx="2606040" cy="640080"/>
+          </a:xfrm>
+          <a:prstGeom prst="rect">
+            <a:avLst/>
+          </a:prstGeom>
+          <a:noFill/>
+        </p:spPr>
+        <p:txBody>
+          <a:bodyPr wrap="square" anchor="t">
+            <a:spAutoFit/>
+          </a:bodyPr>
+          <a:lstStyle/>
+          <a:p>
+            <a:pPr algn="ctr">
+              <a:lnSpc>
+                <a:spcPct val="115000"/>
+              </a:lnSpc>
+            </a:pPr>
+            <a:r>
+              <a:rPr sz="3000" b="1" i="0">
+                <a:solidFill>
+                  <a:srgbClr val="FFFFFF"/>
+                </a:solidFill>
+                <a:latin typeface="Calibri"/>
+              </a:rPr>
+              <a:t>14/14</a:t>
+            </a:r>
+          </a:p>
+        </p:txBody>
+      </p:sp>
+      <p:sp>
+        <p:nvSpPr>
+          <p:cNvPr id="9" name="TextBox 8"/>
+          <p:cNvSpPr txBox="1"/>
+          <p:nvPr/>
+        </p:nvSpPr>
+        <p:spPr>
+          <a:xfrm>
+            <a:off x="685800" y="2514600"/>
+            <a:ext cx="2331720" cy="594360"/>
+          </a:xfrm>
+          <a:prstGeom prst="rect">
+            <a:avLst/>
+          </a:prstGeom>
+          <a:noFill/>
+        </p:spPr>
+        <p:txBody>
+          <a:bodyPr wrap="square" anchor="t">
+            <a:spAutoFit/>
+          </a:bodyPr>
+          <a:lstStyle/>
+          <a:p>
+            <a:pPr algn="ctr">
+              <a:lnSpc>
+                <a:spcPct val="110000"/>
+              </a:lnSpc>
+            </a:pPr>
+            <a:r>
+              <a:rPr sz="1150" b="0" i="0">
+                <a:solidFill>
+                  <a:srgbClr val="E7F5F4"/>
+                </a:solidFill>
+                <a:latin typeface="Calibri"/>
+              </a:rPr>
+              <a:t>User Stories entregues</a:t>
+            </a:r>
+          </a:p>
+        </p:txBody>
+      </p:sp>
+      <p:sp>
+        <p:nvSpPr>
+          <p:cNvPr id="10" name="Rounded Rectangle 9"/>
+          <p:cNvSpPr/>
+          <p:nvPr/>
+        </p:nvSpPr>
+        <p:spPr>
+          <a:xfrm>
+            <a:off x="3291840" y="1645920"/>
+            <a:ext cx="2606040" cy="1554480"/>
           </a:xfrm>
           <a:prstGeom prst="roundRect">
             <a:avLst/>
@@ -18965,14 +20389,14 @@
       </p:sp>
       <p:sp>
         <p:nvSpPr>
-          <p:cNvPr id="8" name="TextBox 7"/>
-          <p:cNvSpPr txBox="1"/>
-          <p:nvPr/>
-        </p:nvSpPr>
-        <p:spPr>
-          <a:xfrm>
-            <a:off x="548640" y="1819656"/>
-            <a:ext cx="1005840" cy="365760"/>
+          <p:cNvPr id="11" name="TextBox 10"/>
+          <p:cNvSpPr txBox="1"/>
+          <p:nvPr/>
+        </p:nvSpPr>
+        <p:spPr>
+          <a:xfrm>
+            <a:off x="3291840" y="1828800"/>
+            <a:ext cx="2606040" cy="640080"/>
           </a:xfrm>
           <a:prstGeom prst="rect">
             <a:avLst/>
@@ -18991,27 +20415,27 @@
               </a:lnSpc>
             </a:pPr>
             <a:r>
-              <a:rPr sz="1400" b="1" i="0">
+              <a:rPr sz="3000" b="1" i="0">
                 <a:solidFill>
                   <a:srgbClr val="FFFFFF"/>
                 </a:solidFill>
                 <a:latin typeface="Calibri"/>
               </a:rPr>
-              <a:t>MF01</a:t>
-            </a:r>
-          </a:p>
-        </p:txBody>
-      </p:sp>
-      <p:sp>
-        <p:nvSpPr>
-          <p:cNvPr id="9" name="TextBox 8"/>
-          <p:cNvSpPr txBox="1"/>
-          <p:nvPr/>
-        </p:nvSpPr>
-        <p:spPr>
-          <a:xfrm>
-            <a:off x="1691640" y="1627632"/>
-            <a:ext cx="3749039" cy="365760"/>
+              <a:t>17/17</a:t>
+            </a:r>
+          </a:p>
+        </p:txBody>
+      </p:sp>
+      <p:sp>
+        <p:nvSpPr>
+          <p:cNvPr id="12" name="TextBox 11"/>
+          <p:cNvSpPr txBox="1"/>
+          <p:nvPr/>
+        </p:nvSpPr>
+        <p:spPr>
+          <a:xfrm>
+            <a:off x="3429000" y="2514600"/>
+            <a:ext cx="2331720" cy="594360"/>
           </a:xfrm>
           <a:prstGeom prst="rect">
             <a:avLst/>
@@ -19024,33 +20448,77 @@
           </a:bodyPr>
           <a:lstStyle/>
           <a:p>
-            <a:pPr algn="l">
-              <a:lnSpc>
-                <a:spcPct val="115000"/>
-              </a:lnSpc>
-            </a:pPr>
-            <a:r>
-              <a:rPr sz="1400" b="1" i="0">
-                <a:solidFill>
-                  <a:srgbClr val="212529"/>
-                </a:solidFill>
-                <a:latin typeface="Calibri"/>
-              </a:rPr>
-              <a:t>Agenda geral consolidada</a:t>
-            </a:r>
-          </a:p>
-        </p:txBody>
-      </p:sp>
-      <p:sp>
-        <p:nvSpPr>
-          <p:cNvPr id="10" name="TextBox 9"/>
-          <p:cNvSpPr txBox="1"/>
-          <p:nvPr/>
-        </p:nvSpPr>
-        <p:spPr>
-          <a:xfrm>
-            <a:off x="1691640" y="1984248"/>
-            <a:ext cx="3749039" cy="365760"/>
+            <a:pPr algn="ctr">
+              <a:lnSpc>
+                <a:spcPct val="110000"/>
+              </a:lnSpc>
+            </a:pPr>
+            <a:r>
+              <a:rPr sz="1150" b="0" i="0">
+                <a:solidFill>
+                  <a:srgbClr val="E7F5F4"/>
+                </a:solidFill>
+                <a:latin typeface="Calibri"/>
+              </a:rPr>
+              <a:t>regras de negócio testadas</a:t>
+            </a:r>
+          </a:p>
+        </p:txBody>
+      </p:sp>
+      <p:sp>
+        <p:nvSpPr>
+          <p:cNvPr id="13" name="Rounded Rectangle 12"/>
+          <p:cNvSpPr/>
+          <p:nvPr/>
+        </p:nvSpPr>
+        <p:spPr>
+          <a:xfrm>
+            <a:off x="6035040" y="1645920"/>
+            <a:ext cx="2606040" cy="1554480"/>
+          </a:xfrm>
+          <a:prstGeom prst="roundRect">
+            <a:avLst/>
+          </a:prstGeom>
+          <a:solidFill>
+            <a:srgbClr val="44938F"/>
+          </a:solidFill>
+          <a:ln>
+            <a:noFill/>
+          </a:ln>
+          <a:effectLst/>
+        </p:spPr>
+        <p:style>
+          <a:lnRef idx="1">
+            <a:schemeClr val="accent1"/>
+          </a:lnRef>
+          <a:fillRef idx="3">
+            <a:schemeClr val="accent1"/>
+          </a:fillRef>
+          <a:effectRef idx="2">
+            <a:schemeClr val="accent1"/>
+          </a:effectRef>
+          <a:fontRef idx="minor">
+            <a:schemeClr val="lt1"/>
+          </a:fontRef>
+        </p:style>
+        <p:txBody>
+          <a:bodyPr rtlCol="0" anchor="ctr"/>
+          <a:lstStyle/>
+          <a:p>
+            <a:pPr algn="ctr"/>
+          </a:p>
+        </p:txBody>
+      </p:sp>
+      <p:sp>
+        <p:nvSpPr>
+          <p:cNvPr id="14" name="TextBox 13"/>
+          <p:cNvSpPr txBox="1"/>
+          <p:nvPr/>
+        </p:nvSpPr>
+        <p:spPr>
+          <a:xfrm>
+            <a:off x="6035040" y="1828800"/>
+            <a:ext cx="2606040" cy="640080"/>
           </a:xfrm>
           <a:prstGeom prst="rect">
             <a:avLst/>
@@ -19063,72 +20531,194 @@
           </a:bodyPr>
           <a:lstStyle/>
           <a:p>
-            <a:pPr algn="l">
-              <a:lnSpc>
-                <a:spcPct val="115000"/>
-              </a:lnSpc>
-            </a:pPr>
-            <a:r>
-              <a:rPr sz="1100" b="0" i="1">
-                <a:solidFill>
-                  <a:srgbClr val="28726F"/>
-                </a:solidFill>
-                <a:latin typeface="Calibri"/>
-              </a:rPr>
-              <a:t>alvo: v1.1</a:t>
-            </a:r>
-          </a:p>
-        </p:txBody>
-      </p:sp>
-      <p:sp>
-        <p:nvSpPr>
-          <p:cNvPr id="11" name="TextBox 10"/>
-          <p:cNvSpPr txBox="1"/>
-          <p:nvPr/>
-        </p:nvSpPr>
-        <p:spPr>
-          <a:xfrm>
-            <a:off x="5577840" y="1600200"/>
-            <a:ext cx="6035040" cy="777240"/>
-          </a:xfrm>
-          <a:prstGeom prst="rect">
-            <a:avLst/>
-          </a:prstGeom>
-          <a:noFill/>
-        </p:spPr>
-        <p:txBody>
-          <a:bodyPr wrap="square" anchor="ctr">
+            <a:pPr algn="ctr">
+              <a:lnSpc>
+                <a:spcPct val="115000"/>
+              </a:lnSpc>
+            </a:pPr>
+            <a:r>
+              <a:rPr sz="3000" b="1" i="0">
+                <a:solidFill>
+                  <a:srgbClr val="FFFFFF"/>
+                </a:solidFill>
+                <a:latin typeface="Calibri"/>
+              </a:rPr>
+              <a:t>14/14</a:t>
+            </a:r>
+          </a:p>
+        </p:txBody>
+      </p:sp>
+      <p:sp>
+        <p:nvSpPr>
+          <p:cNvPr id="15" name="TextBox 14"/>
+          <p:cNvSpPr txBox="1"/>
+          <p:nvPr/>
+        </p:nvSpPr>
+        <p:spPr>
+          <a:xfrm>
+            <a:off x="6172200" y="2514600"/>
+            <a:ext cx="2331720" cy="594360"/>
+          </a:xfrm>
+          <a:prstGeom prst="rect">
+            <a:avLst/>
+          </a:prstGeom>
+          <a:noFill/>
+        </p:spPr>
+        <p:txBody>
+          <a:bodyPr wrap="square" anchor="t">
             <a:spAutoFit/>
           </a:bodyPr>
           <a:lstStyle/>
           <a:p>
-            <a:pPr algn="l">
-              <a:lnSpc>
-                <a:spcPct val="115000"/>
-              </a:lnSpc>
-            </a:pPr>
-            <a:r>
-              <a:rPr sz="1250" b="0" i="0">
-                <a:solidFill>
-                  <a:srgbClr val="495257"/>
-                </a:solidFill>
-                <a:latin typeface="Calibri"/>
-              </a:rPr>
-              <a:t>Dado já acessível pelas telas existentes</a:t>
-            </a:r>
-          </a:p>
-        </p:txBody>
-      </p:sp>
-      <p:sp>
-        <p:nvSpPr>
-          <p:cNvPr id="12" name="Rounded Rectangle 11"/>
+            <a:pPr algn="ctr">
+              <a:lnSpc>
+                <a:spcPct val="110000"/>
+              </a:lnSpc>
+            </a:pPr>
+            <a:r>
+              <a:rPr sz="1150" b="0" i="0">
+                <a:solidFill>
+                  <a:srgbClr val="E7F5F4"/>
+                </a:solidFill>
+                <a:latin typeface="Calibri"/>
+              </a:rPr>
+              <a:t>casos de teste (CT) aprovados</a:t>
+            </a:r>
+          </a:p>
+        </p:txBody>
+      </p:sp>
+      <p:sp>
+        <p:nvSpPr>
+          <p:cNvPr id="16" name="Rounded Rectangle 15"/>
           <p:cNvSpPr/>
           <p:nvPr/>
         </p:nvSpPr>
         <p:spPr>
           <a:xfrm>
-            <a:off x="548640" y="2514600"/>
-            <a:ext cx="1005840" cy="777240"/>
+            <a:off x="8778240" y="1645920"/>
+            <a:ext cx="2606040" cy="1554480"/>
+          </a:xfrm>
+          <a:prstGeom prst="roundRect">
+            <a:avLst/>
+          </a:prstGeom>
+          <a:solidFill>
+            <a:srgbClr val="12635F"/>
+          </a:solidFill>
+          <a:ln>
+            <a:noFill/>
+          </a:ln>
+          <a:effectLst/>
+        </p:spPr>
+        <p:style>
+          <a:lnRef idx="1">
+            <a:schemeClr val="accent1"/>
+          </a:lnRef>
+          <a:fillRef idx="3">
+            <a:schemeClr val="accent1"/>
+          </a:fillRef>
+          <a:effectRef idx="2">
+            <a:schemeClr val="accent1"/>
+          </a:effectRef>
+          <a:fontRef idx="minor">
+            <a:schemeClr val="lt1"/>
+          </a:fontRef>
+        </p:style>
+        <p:txBody>
+          <a:bodyPr rtlCol="0" anchor="ctr"/>
+          <a:lstStyle/>
+          <a:p>
+            <a:pPr algn="ctr"/>
+          </a:p>
+        </p:txBody>
+      </p:sp>
+      <p:sp>
+        <p:nvSpPr>
+          <p:cNvPr id="17" name="TextBox 16"/>
+          <p:cNvSpPr txBox="1"/>
+          <p:nvPr/>
+        </p:nvSpPr>
+        <p:spPr>
+          <a:xfrm>
+            <a:off x="8778240" y="1828800"/>
+            <a:ext cx="2606040" cy="640080"/>
+          </a:xfrm>
+          <a:prstGeom prst="rect">
+            <a:avLst/>
+          </a:prstGeom>
+          <a:noFill/>
+        </p:spPr>
+        <p:txBody>
+          <a:bodyPr wrap="square" anchor="t">
+            <a:spAutoFit/>
+          </a:bodyPr>
+          <a:lstStyle/>
+          <a:p>
+            <a:pPr algn="ctr">
+              <a:lnSpc>
+                <a:spcPct val="115000"/>
+              </a:lnSpc>
+            </a:pPr>
+            <a:r>
+              <a:rPr sz="3000" b="1" i="0">
+                <a:solidFill>
+                  <a:srgbClr val="FFFFFF"/>
+                </a:solidFill>
+                <a:latin typeface="Calibri"/>
+              </a:rPr>
+              <a:t>95 + 116</a:t>
+            </a:r>
+          </a:p>
+        </p:txBody>
+      </p:sp>
+      <p:sp>
+        <p:nvSpPr>
+          <p:cNvPr id="18" name="TextBox 17"/>
+          <p:cNvSpPr txBox="1"/>
+          <p:nvPr/>
+        </p:nvSpPr>
+        <p:spPr>
+          <a:xfrm>
+            <a:off x="8915400" y="2514600"/>
+            <a:ext cx="2331720" cy="594360"/>
+          </a:xfrm>
+          <a:prstGeom prst="rect">
+            <a:avLst/>
+          </a:prstGeom>
+          <a:noFill/>
+        </p:spPr>
+        <p:txBody>
+          <a:bodyPr wrap="square" anchor="t">
+            <a:spAutoFit/>
+          </a:bodyPr>
+          <a:lstStyle/>
+          <a:p>
+            <a:pPr algn="ctr">
+              <a:lnSpc>
+                <a:spcPct val="110000"/>
+              </a:lnSpc>
+            </a:pPr>
+            <a:r>
+              <a:rPr sz="1150" b="0" i="0">
+                <a:solidFill>
+                  <a:srgbClr val="E7F5F4"/>
+                </a:solidFill>
+                <a:latin typeface="Calibri"/>
+              </a:rPr>
+              <a:t>testes automatizados (back + front)</a:t>
+            </a:r>
+          </a:p>
+        </p:txBody>
+      </p:sp>
+      <p:sp>
+        <p:nvSpPr>
+          <p:cNvPr id="19" name="Rounded Rectangle 18"/>
+          <p:cNvSpPr/>
+          <p:nvPr/>
+        </p:nvSpPr>
+        <p:spPr>
+          <a:xfrm>
+            <a:off x="548640" y="3429000"/>
+            <a:ext cx="2606040" cy="1554480"/>
           </a:xfrm>
           <a:prstGeom prst="roundRect">
             <a:avLst/>
@@ -19165,14 +20755,14 @@
       </p:sp>
       <p:sp>
         <p:nvSpPr>
-          <p:cNvPr id="13" name="TextBox 12"/>
-          <p:cNvSpPr txBox="1"/>
-          <p:nvPr/>
-        </p:nvSpPr>
-        <p:spPr>
-          <a:xfrm>
-            <a:off x="548640" y="2734056"/>
-            <a:ext cx="1005840" cy="365760"/>
+          <p:cNvPr id="20" name="TextBox 19"/>
+          <p:cNvSpPr txBox="1"/>
+          <p:nvPr/>
+        </p:nvSpPr>
+        <p:spPr>
+          <a:xfrm>
+            <a:off x="548640" y="3611880"/>
+            <a:ext cx="2606040" cy="640080"/>
           </a:xfrm>
           <a:prstGeom prst="rect">
             <a:avLst/>
@@ -19191,27 +20781,27 @@
               </a:lnSpc>
             </a:pPr>
             <a:r>
-              <a:rPr sz="1400" b="1" i="0">
+              <a:rPr sz="3000" b="1" i="0">
                 <a:solidFill>
                   <a:srgbClr val="FFFFFF"/>
                 </a:solidFill>
                 <a:latin typeface="Calibri"/>
               </a:rPr>
-              <a:t>MF02</a:t>
-            </a:r>
-          </a:p>
-        </p:txBody>
-      </p:sp>
-      <p:sp>
-        <p:nvSpPr>
-          <p:cNvPr id="14" name="TextBox 13"/>
-          <p:cNvSpPr txBox="1"/>
-          <p:nvPr/>
-        </p:nvSpPr>
-        <p:spPr>
-          <a:xfrm>
-            <a:off x="1691640" y="2542032"/>
-            <a:ext cx="3749039" cy="365760"/>
+              <a:t>84%</a:t>
+            </a:r>
+          </a:p>
+        </p:txBody>
+      </p:sp>
+      <p:sp>
+        <p:nvSpPr>
+          <p:cNvPr id="21" name="TextBox 20"/>
+          <p:cNvSpPr txBox="1"/>
+          <p:nvPr/>
+        </p:nvSpPr>
+        <p:spPr>
+          <a:xfrm>
+            <a:off x="685800" y="4297680"/>
+            <a:ext cx="2331720" cy="594360"/>
           </a:xfrm>
           <a:prstGeom prst="rect">
             <a:avLst/>
@@ -19224,33 +20814,77 @@
           </a:bodyPr>
           <a:lstStyle/>
           <a:p>
-            <a:pPr algn="l">
-              <a:lnSpc>
-                <a:spcPct val="115000"/>
-              </a:lnSpc>
-            </a:pPr>
-            <a:r>
-              <a:rPr sz="1400" b="1" i="0">
-                <a:solidFill>
-                  <a:srgbClr val="212529"/>
-                </a:solidFill>
-                <a:latin typeface="Calibri"/>
-              </a:rPr>
-              <a:t>Cadastro de atendente pela UI</a:t>
-            </a:r>
-          </a:p>
-        </p:txBody>
-      </p:sp>
-      <p:sp>
-        <p:nvSpPr>
-          <p:cNvPr id="15" name="TextBox 14"/>
-          <p:cNvSpPr txBox="1"/>
-          <p:nvPr/>
-        </p:nvSpPr>
-        <p:spPr>
-          <a:xfrm>
-            <a:off x="1691640" y="2898648"/>
-            <a:ext cx="3749039" cy="365760"/>
+            <a:pPr algn="ctr">
+              <a:lnSpc>
+                <a:spcPct val="110000"/>
+              </a:lnSpc>
+            </a:pPr>
+            <a:r>
+              <a:rPr sz="1150" b="0" i="0">
+                <a:solidFill>
+                  <a:srgbClr val="E7F5F4"/>
+                </a:solidFill>
+                <a:latin typeface="Calibri"/>
+              </a:rPr>
+              <a:t>cobertura de código no backend</a:t>
+            </a:r>
+          </a:p>
+        </p:txBody>
+      </p:sp>
+      <p:sp>
+        <p:nvSpPr>
+          <p:cNvPr id="22" name="Rounded Rectangle 21"/>
+          <p:cNvSpPr/>
+          <p:nvPr/>
+        </p:nvSpPr>
+        <p:spPr>
+          <a:xfrm>
+            <a:off x="3291840" y="3429000"/>
+            <a:ext cx="2606040" cy="1554480"/>
+          </a:xfrm>
+          <a:prstGeom prst="roundRect">
+            <a:avLst/>
+          </a:prstGeom>
+          <a:solidFill>
+            <a:srgbClr val="44938F"/>
+          </a:solidFill>
+          <a:ln>
+            <a:noFill/>
+          </a:ln>
+          <a:effectLst/>
+        </p:spPr>
+        <p:style>
+          <a:lnRef idx="1">
+            <a:schemeClr val="accent1"/>
+          </a:lnRef>
+          <a:fillRef idx="3">
+            <a:schemeClr val="accent1"/>
+          </a:fillRef>
+          <a:effectRef idx="2">
+            <a:schemeClr val="accent1"/>
+          </a:effectRef>
+          <a:fontRef idx="minor">
+            <a:schemeClr val="lt1"/>
+          </a:fontRef>
+        </p:style>
+        <p:txBody>
+          <a:bodyPr rtlCol="0" anchor="ctr"/>
+          <a:lstStyle/>
+          <a:p>
+            <a:pPr algn="ctr"/>
+          </a:p>
+        </p:txBody>
+      </p:sp>
+      <p:sp>
+        <p:nvSpPr>
+          <p:cNvPr id="23" name="TextBox 22"/>
+          <p:cNvSpPr txBox="1"/>
+          <p:nvPr/>
+        </p:nvSpPr>
+        <p:spPr>
+          <a:xfrm>
+            <a:off x="3291840" y="3611880"/>
+            <a:ext cx="2606040" cy="640080"/>
           </a:xfrm>
           <a:prstGeom prst="rect">
             <a:avLst/>
@@ -19263,72 +20897,194 @@
           </a:bodyPr>
           <a:lstStyle/>
           <a:p>
-            <a:pPr algn="l">
-              <a:lnSpc>
-                <a:spcPct val="115000"/>
-              </a:lnSpc>
-            </a:pPr>
-            <a:r>
-              <a:rPr sz="1100" b="0" i="1">
-                <a:solidFill>
-                  <a:srgbClr val="28726F"/>
-                </a:solidFill>
-                <a:latin typeface="Calibri"/>
-              </a:rPr>
-              <a:t>alvo: v1.1</a:t>
-            </a:r>
-          </a:p>
-        </p:txBody>
-      </p:sp>
-      <p:sp>
-        <p:nvSpPr>
-          <p:cNvPr id="16" name="TextBox 15"/>
-          <p:cNvSpPr txBox="1"/>
-          <p:nvPr/>
-        </p:nvSpPr>
-        <p:spPr>
-          <a:xfrm>
-            <a:off x="5577840" y="2514600"/>
-            <a:ext cx="6035040" cy="777240"/>
-          </a:xfrm>
-          <a:prstGeom prst="rect">
-            <a:avLst/>
-          </a:prstGeom>
-          <a:noFill/>
-        </p:spPr>
-        <p:txBody>
-          <a:bodyPr wrap="square" anchor="ctr">
+            <a:pPr algn="ctr">
+              <a:lnSpc>
+                <a:spcPct val="115000"/>
+              </a:lnSpc>
+            </a:pPr>
+            <a:r>
+              <a:rPr sz="3000" b="1" i="0">
+                <a:solidFill>
+                  <a:srgbClr val="FFFFFF"/>
+                </a:solidFill>
+                <a:latin typeface="Calibri"/>
+              </a:rPr>
+              <a:t>9</a:t>
+            </a:r>
+          </a:p>
+        </p:txBody>
+      </p:sp>
+      <p:sp>
+        <p:nvSpPr>
+          <p:cNvPr id="24" name="TextBox 23"/>
+          <p:cNvSpPr txBox="1"/>
+          <p:nvPr/>
+        </p:nvSpPr>
+        <p:spPr>
+          <a:xfrm>
+            <a:off x="3429000" y="4297680"/>
+            <a:ext cx="2331720" cy="594360"/>
+          </a:xfrm>
+          <a:prstGeom prst="rect">
+            <a:avLst/>
+          </a:prstGeom>
+          <a:noFill/>
+        </p:spPr>
+        <p:txBody>
+          <a:bodyPr wrap="square" anchor="t">
             <a:spAutoFit/>
           </a:bodyPr>
           <a:lstStyle/>
           <a:p>
-            <a:pPr algn="l">
-              <a:lnSpc>
-                <a:spcPct val="115000"/>
-              </a:lnSpc>
-            </a:pPr>
-            <a:r>
-              <a:rPr sz="1250" b="0" i="0">
-                <a:solidFill>
-                  <a:srgbClr val="495257"/>
-                </a:solidFill>
-                <a:latin typeface="Calibri"/>
-              </a:rPr>
-              <a:t>Seed basta; RN14 continua testada por CT14</a:t>
-            </a:r>
-          </a:p>
-        </p:txBody>
-      </p:sp>
-      <p:sp>
-        <p:nvSpPr>
-          <p:cNvPr id="17" name="Rounded Rectangle 16"/>
+            <a:pPr algn="ctr">
+              <a:lnSpc>
+                <a:spcPct val="110000"/>
+              </a:lnSpc>
+            </a:pPr>
+            <a:r>
+              <a:rPr sz="1150" b="0" i="0">
+                <a:solidFill>
+                  <a:srgbClr val="E7F5F4"/>
+                </a:solidFill>
+                <a:latin typeface="Calibri"/>
+              </a:rPr>
+              <a:t>ADRs registrados</a:t>
+            </a:r>
+          </a:p>
+        </p:txBody>
+      </p:sp>
+      <p:sp>
+        <p:nvSpPr>
+          <p:cNvPr id="25" name="Rounded Rectangle 24"/>
           <p:cNvSpPr/>
           <p:nvPr/>
         </p:nvSpPr>
         <p:spPr>
           <a:xfrm>
-            <a:off x="548640" y="3429000"/>
-            <a:ext cx="1005840" cy="777240"/>
+            <a:off x="6035040" y="3429000"/>
+            <a:ext cx="2606040" cy="1554480"/>
+          </a:xfrm>
+          <a:prstGeom prst="roundRect">
+            <a:avLst/>
+          </a:prstGeom>
+          <a:solidFill>
+            <a:srgbClr val="12635F"/>
+          </a:solidFill>
+          <a:ln>
+            <a:noFill/>
+          </a:ln>
+          <a:effectLst/>
+        </p:spPr>
+        <p:style>
+          <a:lnRef idx="1">
+            <a:schemeClr val="accent1"/>
+          </a:lnRef>
+          <a:fillRef idx="3">
+            <a:schemeClr val="accent1"/>
+          </a:fillRef>
+          <a:effectRef idx="2">
+            <a:schemeClr val="accent1"/>
+          </a:effectRef>
+          <a:fontRef idx="minor">
+            <a:schemeClr val="lt1"/>
+          </a:fontRef>
+        </p:style>
+        <p:txBody>
+          <a:bodyPr rtlCol="0" anchor="ctr"/>
+          <a:lstStyle/>
+          <a:p>
+            <a:pPr algn="ctr"/>
+          </a:p>
+        </p:txBody>
+      </p:sp>
+      <p:sp>
+        <p:nvSpPr>
+          <p:cNvPr id="26" name="TextBox 25"/>
+          <p:cNvSpPr txBox="1"/>
+          <p:nvPr/>
+        </p:nvSpPr>
+        <p:spPr>
+          <a:xfrm>
+            <a:off x="6035040" y="3611880"/>
+            <a:ext cx="2606040" cy="640080"/>
+          </a:xfrm>
+          <a:prstGeom prst="rect">
+            <a:avLst/>
+          </a:prstGeom>
+          <a:noFill/>
+        </p:spPr>
+        <p:txBody>
+          <a:bodyPr wrap="square" anchor="t">
+            <a:spAutoFit/>
+          </a:bodyPr>
+          <a:lstStyle/>
+          <a:p>
+            <a:pPr algn="ctr">
+              <a:lnSpc>
+                <a:spcPct val="115000"/>
+              </a:lnSpc>
+            </a:pPr>
+            <a:r>
+              <a:rPr sz="3000" b="1" i="0">
+                <a:solidFill>
+                  <a:srgbClr val="FFFFFF"/>
+                </a:solidFill>
+                <a:latin typeface="Calibri"/>
+              </a:rPr>
+              <a:t>1</a:t>
+            </a:r>
+          </a:p>
+        </p:txBody>
+      </p:sp>
+      <p:sp>
+        <p:nvSpPr>
+          <p:cNvPr id="27" name="TextBox 26"/>
+          <p:cNvSpPr txBox="1"/>
+          <p:nvPr/>
+        </p:nvSpPr>
+        <p:spPr>
+          <a:xfrm>
+            <a:off x="6172200" y="4297680"/>
+            <a:ext cx="2331720" cy="594360"/>
+          </a:xfrm>
+          <a:prstGeom prst="rect">
+            <a:avLst/>
+          </a:prstGeom>
+          <a:noFill/>
+        </p:spPr>
+        <p:txBody>
+          <a:bodyPr wrap="square" anchor="t">
+            <a:spAutoFit/>
+          </a:bodyPr>
+          <a:lstStyle/>
+          <a:p>
+            <a:pPr algn="ctr">
+              <a:lnSpc>
+                <a:spcPct val="110000"/>
+              </a:lnSpc>
+            </a:pPr>
+            <a:r>
+              <a:rPr sz="1150" b="0" i="0">
+                <a:solidFill>
+                  <a:srgbClr val="E7F5F4"/>
+                </a:solidFill>
+                <a:latin typeface="Calibri"/>
+              </a:rPr>
+              <a:t>bug de robustez em aberto (Alta — validação de senha, EXP-01)</a:t>
+            </a:r>
+          </a:p>
+        </p:txBody>
+      </p:sp>
+      <p:sp>
+        <p:nvSpPr>
+          <p:cNvPr id="28" name="Rounded Rectangle 27"/>
+          <p:cNvSpPr/>
+          <p:nvPr/>
+        </p:nvSpPr>
+        <p:spPr>
+          <a:xfrm>
+            <a:off x="8778240" y="3429000"/>
+            <a:ext cx="2606040" cy="1554480"/>
           </a:xfrm>
           <a:prstGeom prst="roundRect">
             <a:avLst/>
@@ -19365,14 +21121,14 @@
       </p:sp>
       <p:sp>
         <p:nvSpPr>
-          <p:cNvPr id="18" name="TextBox 17"/>
-          <p:cNvSpPr txBox="1"/>
-          <p:nvPr/>
-        </p:nvSpPr>
-        <p:spPr>
-          <a:xfrm>
-            <a:off x="548640" y="3648456"/>
-            <a:ext cx="1005840" cy="365760"/>
+          <p:cNvPr id="29" name="TextBox 28"/>
+          <p:cNvSpPr txBox="1"/>
+          <p:nvPr/>
+        </p:nvSpPr>
+        <p:spPr>
+          <a:xfrm>
+            <a:off x="8778240" y="3611880"/>
+            <a:ext cx="2606040" cy="640080"/>
           </a:xfrm>
           <a:prstGeom prst="rect">
             <a:avLst/>
@@ -19391,27 +21147,27 @@
               </a:lnSpc>
             </a:pPr>
             <a:r>
-              <a:rPr sz="1400" b="1" i="0">
+              <a:rPr sz="3000" b="1" i="0">
                 <a:solidFill>
                   <a:srgbClr val="FFFFFF"/>
                 </a:solidFill>
                 <a:latin typeface="Calibri"/>
               </a:rPr>
-              <a:t>MF09</a:t>
-            </a:r>
-          </a:p>
-        </p:txBody>
-      </p:sp>
-      <p:sp>
-        <p:nvSpPr>
-          <p:cNvPr id="19" name="TextBox 18"/>
-          <p:cNvSpPr txBox="1"/>
-          <p:nvPr/>
-        </p:nvSpPr>
-        <p:spPr>
-          <a:xfrm>
-            <a:off x="1691640" y="3456432"/>
-            <a:ext cx="3749039" cy="365760"/>
+              <a:t>3</a:t>
+            </a:r>
+          </a:p>
+        </p:txBody>
+      </p:sp>
+      <p:sp>
+        <p:nvSpPr>
+          <p:cNvPr id="30" name="TextBox 29"/>
+          <p:cNvSpPr txBox="1"/>
+          <p:nvPr/>
+        </p:nvSpPr>
+        <p:spPr>
+          <a:xfrm>
+            <a:off x="8915400" y="4297680"/>
+            <a:ext cx="2331720" cy="594360"/>
           </a:xfrm>
           <a:prstGeom prst="rect">
             <a:avLst/>
@@ -19424,33 +21180,33 @@
           </a:bodyPr>
           <a:lstStyle/>
           <a:p>
-            <a:pPr algn="l">
-              <a:lnSpc>
-                <a:spcPct val="115000"/>
-              </a:lnSpc>
-            </a:pPr>
-            <a:r>
-              <a:rPr sz="1400" b="1" i="0">
-                <a:solidFill>
-                  <a:srgbClr val="212529"/>
-                </a:solidFill>
-                <a:latin typeface="Calibri"/>
-              </a:rPr>
-              <a:t>Perfil de Médico com login</a:t>
-            </a:r>
-          </a:p>
-        </p:txBody>
-      </p:sp>
-      <p:sp>
-        <p:nvSpPr>
-          <p:cNvPr id="20" name="TextBox 19"/>
-          <p:cNvSpPr txBox="1"/>
-          <p:nvPr/>
-        </p:nvSpPr>
-        <p:spPr>
-          <a:xfrm>
-            <a:off x="1691640" y="3813048"/>
-            <a:ext cx="3749039" cy="365760"/>
+            <a:pPr algn="ctr">
+              <a:lnSpc>
+                <a:spcPct val="110000"/>
+              </a:lnSpc>
+            </a:pPr>
+            <a:r>
+              <a:rPr sz="1150" b="0" i="0">
+                <a:solidFill>
+                  <a:srgbClr val="E7F5F4"/>
+                </a:solidFill>
+                <a:latin typeface="Calibri"/>
+              </a:rPr>
+              <a:t>bugs de concorrência achados e corrigidos (EXP-02)</a:t>
+            </a:r>
+          </a:p>
+        </p:txBody>
+      </p:sp>
+      <p:sp>
+        <p:nvSpPr>
+          <p:cNvPr id="31" name="TextBox 30"/>
+          <p:cNvSpPr txBox="1"/>
+          <p:nvPr/>
+        </p:nvSpPr>
+        <p:spPr>
+          <a:xfrm>
+            <a:off x="548640" y="6473952"/>
+            <a:ext cx="8229600" cy="320040"/>
           </a:xfrm>
           <a:prstGeom prst="rect">
             <a:avLst/>
@@ -19469,491 +21225,13 @@
               </a:lnSpc>
             </a:pPr>
             <a:r>
-              <a:rPr sz="1100" b="0" i="1">
-                <a:solidFill>
-                  <a:srgbClr val="28726F"/>
-                </a:solidFill>
-                <a:latin typeface="Calibri"/>
-              </a:rPr>
-              <a:t>alvo: v2.0</a:t>
-            </a:r>
-          </a:p>
-        </p:txBody>
-      </p:sp>
-      <p:sp>
-        <p:nvSpPr>
-          <p:cNvPr id="21" name="TextBox 20"/>
-          <p:cNvSpPr txBox="1"/>
-          <p:nvPr/>
-        </p:nvSpPr>
-        <p:spPr>
-          <a:xfrm>
-            <a:off x="5577840" y="3429000"/>
-            <a:ext cx="6035040" cy="777240"/>
-          </a:xfrm>
-          <a:prstGeom prst="rect">
-            <a:avLst/>
-          </a:prstGeom>
-          <a:noFill/>
-        </p:spPr>
-        <p:txBody>
-          <a:bodyPr wrap="square" anchor="ctr">
-            <a:spAutoFit/>
-          </a:bodyPr>
-          <a:lstStyle/>
-          <a:p>
-            <a:pPr algn="l">
-              <a:lnSpc>
-                <a:spcPct val="115000"/>
-              </a:lnSpc>
-            </a:pPr>
-            <a:r>
-              <a:rPr sz="1250" b="0" i="0">
-                <a:solidFill>
-                  <a:srgbClr val="495257"/>
-                </a:solidFill>
-                <a:latin typeface="Calibri"/>
-              </a:rPr>
-              <a:t>Mudaria todo o modelo de autorização</a:t>
-            </a:r>
-          </a:p>
-        </p:txBody>
-      </p:sp>
-      <p:sp>
-        <p:nvSpPr>
-          <p:cNvPr id="22" name="Rounded Rectangle 21"/>
-          <p:cNvSpPr/>
-          <p:nvPr/>
-        </p:nvSpPr>
-        <p:spPr>
-          <a:xfrm>
-            <a:off x="548640" y="4343400"/>
-            <a:ext cx="1005840" cy="777240"/>
-          </a:xfrm>
-          <a:prstGeom prst="roundRect">
-            <a:avLst/>
-          </a:prstGeom>
-          <a:solidFill>
-            <a:srgbClr val="28726F"/>
-          </a:solidFill>
-          <a:ln>
-            <a:noFill/>
-          </a:ln>
-          <a:effectLst/>
-        </p:spPr>
-        <p:style>
-          <a:lnRef idx="1">
-            <a:schemeClr val="accent1"/>
-          </a:lnRef>
-          <a:fillRef idx="3">
-            <a:schemeClr val="accent1"/>
-          </a:fillRef>
-          <a:effectRef idx="2">
-            <a:schemeClr val="accent1"/>
-          </a:effectRef>
-          <a:fontRef idx="minor">
-            <a:schemeClr val="lt1"/>
-          </a:fontRef>
-        </p:style>
-        <p:txBody>
-          <a:bodyPr rtlCol="0" anchor="ctr"/>
-          <a:lstStyle/>
-          <a:p>
-            <a:pPr algn="ctr"/>
-          </a:p>
-        </p:txBody>
-      </p:sp>
-      <p:sp>
-        <p:nvSpPr>
-          <p:cNvPr id="23" name="TextBox 22"/>
-          <p:cNvSpPr txBox="1"/>
-          <p:nvPr/>
-        </p:nvSpPr>
-        <p:spPr>
-          <a:xfrm>
-            <a:off x="548640" y="4562856"/>
-            <a:ext cx="1005840" cy="365760"/>
-          </a:xfrm>
-          <a:prstGeom prst="rect">
-            <a:avLst/>
-          </a:prstGeom>
-          <a:noFill/>
-        </p:spPr>
-        <p:txBody>
-          <a:bodyPr wrap="square" anchor="t">
-            <a:spAutoFit/>
-          </a:bodyPr>
-          <a:lstStyle/>
-          <a:p>
-            <a:pPr algn="ctr">
-              <a:lnSpc>
-                <a:spcPct val="115000"/>
-              </a:lnSpc>
-            </a:pPr>
-            <a:r>
-              <a:rPr sz="1400" b="1" i="0">
-                <a:solidFill>
-                  <a:srgbClr val="FFFFFF"/>
-                </a:solidFill>
-                <a:latin typeface="Calibri"/>
-              </a:rPr>
-              <a:t>MF14</a:t>
-            </a:r>
-          </a:p>
-        </p:txBody>
-      </p:sp>
-      <p:sp>
-        <p:nvSpPr>
-          <p:cNvPr id="24" name="TextBox 23"/>
-          <p:cNvSpPr txBox="1"/>
-          <p:nvPr/>
-        </p:nvSpPr>
-        <p:spPr>
-          <a:xfrm>
-            <a:off x="1691640" y="4370832"/>
-            <a:ext cx="3749039" cy="365760"/>
-          </a:xfrm>
-          <a:prstGeom prst="rect">
-            <a:avLst/>
-          </a:prstGeom>
-          <a:noFill/>
-        </p:spPr>
-        <p:txBody>
-          <a:bodyPr wrap="square" anchor="t">
-            <a:spAutoFit/>
-          </a:bodyPr>
-          <a:lstStyle/>
-          <a:p>
-            <a:pPr algn="l">
-              <a:lnSpc>
-                <a:spcPct val="115000"/>
-              </a:lnSpc>
-            </a:pPr>
-            <a:r>
-              <a:rPr sz="1400" b="1" i="0">
-                <a:solidFill>
-                  <a:srgbClr val="212529"/>
-                </a:solidFill>
-                <a:latin typeface="Calibri"/>
-              </a:rPr>
-              <a:t>Testes end-to-end automatizados</a:t>
-            </a:r>
-          </a:p>
-        </p:txBody>
-      </p:sp>
-      <p:sp>
-        <p:nvSpPr>
-          <p:cNvPr id="25" name="TextBox 24"/>
-          <p:cNvSpPr txBox="1"/>
-          <p:nvPr/>
-        </p:nvSpPr>
-        <p:spPr>
-          <a:xfrm>
-            <a:off x="1691640" y="4727448"/>
-            <a:ext cx="3749039" cy="365760"/>
-          </a:xfrm>
-          <a:prstGeom prst="rect">
-            <a:avLst/>
-          </a:prstGeom>
-          <a:noFill/>
-        </p:spPr>
-        <p:txBody>
-          <a:bodyPr wrap="square" anchor="t">
-            <a:spAutoFit/>
-          </a:bodyPr>
-          <a:lstStyle/>
-          <a:p>
-            <a:pPr algn="l">
-              <a:lnSpc>
-                <a:spcPct val="115000"/>
-              </a:lnSpc>
-            </a:pPr>
-            <a:r>
-              <a:rPr sz="1100" b="0" i="1">
-                <a:solidFill>
-                  <a:srgbClr val="28726F"/>
-                </a:solidFill>
-                <a:latin typeface="Calibri"/>
-              </a:rPr>
-              <a:t>alvo: v1.2</a:t>
-            </a:r>
-          </a:p>
-        </p:txBody>
-      </p:sp>
-      <p:sp>
-        <p:nvSpPr>
-          <p:cNvPr id="26" name="TextBox 25"/>
-          <p:cNvSpPr txBox="1"/>
-          <p:nvPr/>
-        </p:nvSpPr>
-        <p:spPr>
-          <a:xfrm>
-            <a:off x="5577840" y="4343400"/>
-            <a:ext cx="6035040" cy="777240"/>
-          </a:xfrm>
-          <a:prstGeom prst="rect">
-            <a:avLst/>
-          </a:prstGeom>
-          <a:noFill/>
-        </p:spPr>
-        <p:txBody>
-          <a:bodyPr wrap="square" anchor="ctr">
-            <a:spAutoFit/>
-          </a:bodyPr>
-          <a:lstStyle/>
-          <a:p>
-            <a:pPr algn="l">
-              <a:lnSpc>
-                <a:spcPct val="115000"/>
-              </a:lnSpc>
-            </a:pPr>
-            <a:r>
-              <a:rPr sz="1250" b="0" i="0">
-                <a:solidFill>
-                  <a:srgbClr val="495257"/>
-                </a:solidFill>
-                <a:latin typeface="Calibri"/>
-              </a:rPr>
-              <a:t>Competiria com o próprio desenvolvimento em 11 dias</a:t>
-            </a:r>
-          </a:p>
-        </p:txBody>
-      </p:sp>
-      <p:sp>
-        <p:nvSpPr>
-          <p:cNvPr id="27" name="Rounded Rectangle 26"/>
-          <p:cNvSpPr/>
-          <p:nvPr/>
-        </p:nvSpPr>
-        <p:spPr>
-          <a:xfrm>
-            <a:off x="548640" y="5257800"/>
-            <a:ext cx="1005840" cy="777240"/>
-          </a:xfrm>
-          <a:prstGeom prst="roundRect">
-            <a:avLst/>
-          </a:prstGeom>
-          <a:solidFill>
-            <a:srgbClr val="28726F"/>
-          </a:solidFill>
-          <a:ln>
-            <a:noFill/>
-          </a:ln>
-          <a:effectLst/>
-        </p:spPr>
-        <p:style>
-          <a:lnRef idx="1">
-            <a:schemeClr val="accent1"/>
-          </a:lnRef>
-          <a:fillRef idx="3">
-            <a:schemeClr val="accent1"/>
-          </a:fillRef>
-          <a:effectRef idx="2">
-            <a:schemeClr val="accent1"/>
-          </a:effectRef>
-          <a:fontRef idx="minor">
-            <a:schemeClr val="lt1"/>
-          </a:fontRef>
-        </p:style>
-        <p:txBody>
-          <a:bodyPr rtlCol="0" anchor="ctr"/>
-          <a:lstStyle/>
-          <a:p>
-            <a:pPr algn="ctr"/>
-          </a:p>
-        </p:txBody>
-      </p:sp>
-      <p:sp>
-        <p:nvSpPr>
-          <p:cNvPr id="28" name="TextBox 27"/>
-          <p:cNvSpPr txBox="1"/>
-          <p:nvPr/>
-        </p:nvSpPr>
-        <p:spPr>
-          <a:xfrm>
-            <a:off x="548640" y="5477256"/>
-            <a:ext cx="1005840" cy="365760"/>
-          </a:xfrm>
-          <a:prstGeom prst="rect">
-            <a:avLst/>
-          </a:prstGeom>
-          <a:noFill/>
-        </p:spPr>
-        <p:txBody>
-          <a:bodyPr wrap="square" anchor="t">
-            <a:spAutoFit/>
-          </a:bodyPr>
-          <a:lstStyle/>
-          <a:p>
-            <a:pPr algn="ctr">
-              <a:lnSpc>
-                <a:spcPct val="115000"/>
-              </a:lnSpc>
-            </a:pPr>
-            <a:r>
-              <a:rPr sz="1400" b="1" i="0">
-                <a:solidFill>
-                  <a:srgbClr val="FFFFFF"/>
-                </a:solidFill>
-                <a:latin typeface="Calibri"/>
-              </a:rPr>
-              <a:t>MF03/04</a:t>
-            </a:r>
-          </a:p>
-        </p:txBody>
-      </p:sp>
-      <p:sp>
-        <p:nvSpPr>
-          <p:cNvPr id="29" name="TextBox 28"/>
-          <p:cNvSpPr txBox="1"/>
-          <p:nvPr/>
-        </p:nvSpPr>
-        <p:spPr>
-          <a:xfrm>
-            <a:off x="1691640" y="5285232"/>
-            <a:ext cx="3749039" cy="365760"/>
-          </a:xfrm>
-          <a:prstGeom prst="rect">
-            <a:avLst/>
-          </a:prstGeom>
-          <a:noFill/>
-        </p:spPr>
-        <p:txBody>
-          <a:bodyPr wrap="square" anchor="t">
-            <a:spAutoFit/>
-          </a:bodyPr>
-          <a:lstStyle/>
-          <a:p>
-            <a:pPr algn="l">
-              <a:lnSpc>
-                <a:spcPct val="115000"/>
-              </a:lnSpc>
-            </a:pPr>
-            <a:r>
-              <a:rPr sz="1400" b="1" i="0">
-                <a:solidFill>
-                  <a:srgbClr val="212529"/>
-                </a:solidFill>
-                <a:latin typeface="Calibri"/>
-              </a:rPr>
-              <a:t>Editar e excluir especialidade/médico</a:t>
-            </a:r>
-          </a:p>
-        </p:txBody>
-      </p:sp>
-      <p:sp>
-        <p:nvSpPr>
-          <p:cNvPr id="30" name="TextBox 29"/>
-          <p:cNvSpPr txBox="1"/>
-          <p:nvPr/>
-        </p:nvSpPr>
-        <p:spPr>
-          <a:xfrm>
-            <a:off x="1691640" y="5641848"/>
-            <a:ext cx="3749039" cy="365760"/>
-          </a:xfrm>
-          <a:prstGeom prst="rect">
-            <a:avLst/>
-          </a:prstGeom>
-          <a:noFill/>
-        </p:spPr>
-        <p:txBody>
-          <a:bodyPr wrap="square" anchor="t">
-            <a:spAutoFit/>
-          </a:bodyPr>
-          <a:lstStyle/>
-          <a:p>
-            <a:pPr algn="l">
-              <a:lnSpc>
-                <a:spcPct val="115000"/>
-              </a:lnSpc>
-            </a:pPr>
-            <a:r>
-              <a:rPr sz="1100" b="0" i="1">
-                <a:solidFill>
-                  <a:srgbClr val="28726F"/>
-                </a:solidFill>
-                <a:latin typeface="Calibri"/>
-              </a:rPr>
-              <a:t>alvo: v1.1</a:t>
-            </a:r>
-          </a:p>
-        </p:txBody>
-      </p:sp>
-      <p:sp>
-        <p:nvSpPr>
-          <p:cNvPr id="31" name="TextBox 30"/>
-          <p:cNvSpPr txBox="1"/>
-          <p:nvPr/>
-        </p:nvSpPr>
-        <p:spPr>
-          <a:xfrm>
-            <a:off x="5577840" y="5257800"/>
-            <a:ext cx="6035040" cy="777240"/>
-          </a:xfrm>
-          <a:prstGeom prst="rect">
-            <a:avLst/>
-          </a:prstGeom>
-          <a:noFill/>
-        </p:spPr>
-        <p:txBody>
-          <a:bodyPr wrap="square" anchor="ctr">
-            <a:spAutoFit/>
-          </a:bodyPr>
-          <a:lstStyle/>
-          <a:p>
-            <a:pPr algn="l">
-              <a:lnSpc>
-                <a:spcPct val="115000"/>
-              </a:lnSpc>
-            </a:pPr>
-            <a:r>
-              <a:rPr sz="1250" b="0" i="0">
-                <a:solidFill>
-                  <a:srgbClr val="495257"/>
-                </a:solidFill>
-                <a:latin typeface="Calibri"/>
-              </a:rPr>
-              <a:t>A inativação entrou no MVP (ADR-009); excluir quebraria o histórico</a:t>
-            </a:r>
-          </a:p>
-        </p:txBody>
-      </p:sp>
-      <p:sp>
-        <p:nvSpPr>
-          <p:cNvPr id="32" name="TextBox 31"/>
-          <p:cNvSpPr txBox="1"/>
-          <p:nvPr/>
-        </p:nvSpPr>
-        <p:spPr>
-          <a:xfrm>
-            <a:off x="548640" y="6263640"/>
-            <a:ext cx="10972800" cy="365760"/>
-          </a:xfrm>
-          <a:prstGeom prst="rect">
-            <a:avLst/>
-          </a:prstGeom>
-          <a:noFill/>
-        </p:spPr>
-        <p:txBody>
-          <a:bodyPr wrap="square" anchor="t">
-            <a:spAutoFit/>
-          </a:bodyPr>
-          <a:lstStyle/>
-          <a:p>
-            <a:pPr algn="l">
-              <a:lnSpc>
-                <a:spcPct val="115000"/>
-              </a:lnSpc>
-            </a:pPr>
-            <a:r>
-              <a:rPr sz="1300" b="1" i="1">
-                <a:solidFill>
-                  <a:srgbClr val="12635F"/>
-                </a:solidFill>
-                <a:latin typeface="Calibri"/>
-              </a:rPr>
-              <a:t>Escopo controlado é competência de Engenharia de Software, não limitação.</a:t>
+              <a:rPr sz="1000" b="0" i="0">
+                <a:solidFill>
+                  <a:srgbClr val="8A9399"/>
+                </a:solidFill>
+                <a:latin typeface="Calibri"/>
+              </a:rPr>
+              <a:t>Clínica Médica MVP · Equipe 01 · AV2 Engenharia de Software Moderna</a:t>
             </a:r>
           </a:p>
         </p:txBody>
@@ -20062,7 +21340,7 @@
                 </a:solidFill>
                 <a:latin typeface="Calibri"/>
               </a:rPr>
-              <a:t>O QUE A EQUIPE LEVOU DO PROJETO</a:t>
+              <a:t>BACKLOG DE EVOLUÇÃO</a:t>
             </a:r>
           </a:p>
         </p:txBody>
@@ -20101,7 +21379,7 @@
                 </a:solidFill>
                 <a:latin typeface="Calibri"/>
               </a:rPr>
-              <a:t>Retrospectiva</a:t>
+              <a:t>Melhorias futuras — o que ficou fora, por quê</a:t>
             </a:r>
           </a:p>
         </p:txBody>
@@ -20185,6 +21463,1276 @@
                 <a:latin typeface="Calibri"/>
               </a:rPr>
               <a:t>22</a:t>
+            </a:r>
+          </a:p>
+        </p:txBody>
+      </p:sp>
+      <p:sp>
+        <p:nvSpPr>
+          <p:cNvPr id="7" name="Rounded Rectangle 6"/>
+          <p:cNvSpPr/>
+          <p:nvPr/>
+        </p:nvSpPr>
+        <p:spPr>
+          <a:xfrm>
+            <a:off x="548640" y="1600200"/>
+            <a:ext cx="1005840" cy="777240"/>
+          </a:xfrm>
+          <a:prstGeom prst="roundRect">
+            <a:avLst/>
+          </a:prstGeom>
+          <a:solidFill>
+            <a:srgbClr val="28726F"/>
+          </a:solidFill>
+          <a:ln>
+            <a:noFill/>
+          </a:ln>
+          <a:effectLst/>
+        </p:spPr>
+        <p:style>
+          <a:lnRef idx="1">
+            <a:schemeClr val="accent1"/>
+          </a:lnRef>
+          <a:fillRef idx="3">
+            <a:schemeClr val="accent1"/>
+          </a:fillRef>
+          <a:effectRef idx="2">
+            <a:schemeClr val="accent1"/>
+          </a:effectRef>
+          <a:fontRef idx="minor">
+            <a:schemeClr val="lt1"/>
+          </a:fontRef>
+        </p:style>
+        <p:txBody>
+          <a:bodyPr rtlCol="0" anchor="ctr"/>
+          <a:lstStyle/>
+          <a:p>
+            <a:pPr algn="ctr"/>
+          </a:p>
+        </p:txBody>
+      </p:sp>
+      <p:sp>
+        <p:nvSpPr>
+          <p:cNvPr id="8" name="TextBox 7"/>
+          <p:cNvSpPr txBox="1"/>
+          <p:nvPr/>
+        </p:nvSpPr>
+        <p:spPr>
+          <a:xfrm>
+            <a:off x="548640" y="1819656"/>
+            <a:ext cx="1005840" cy="365760"/>
+          </a:xfrm>
+          <a:prstGeom prst="rect">
+            <a:avLst/>
+          </a:prstGeom>
+          <a:noFill/>
+        </p:spPr>
+        <p:txBody>
+          <a:bodyPr wrap="square" anchor="t">
+            <a:spAutoFit/>
+          </a:bodyPr>
+          <a:lstStyle/>
+          <a:p>
+            <a:pPr algn="ctr">
+              <a:lnSpc>
+                <a:spcPct val="115000"/>
+              </a:lnSpc>
+            </a:pPr>
+            <a:r>
+              <a:rPr sz="1400" b="1" i="0">
+                <a:solidFill>
+                  <a:srgbClr val="FFFFFF"/>
+                </a:solidFill>
+                <a:latin typeface="Calibri"/>
+              </a:rPr>
+              <a:t>MF01</a:t>
+            </a:r>
+          </a:p>
+        </p:txBody>
+      </p:sp>
+      <p:sp>
+        <p:nvSpPr>
+          <p:cNvPr id="9" name="TextBox 8"/>
+          <p:cNvSpPr txBox="1"/>
+          <p:nvPr/>
+        </p:nvSpPr>
+        <p:spPr>
+          <a:xfrm>
+            <a:off x="1691640" y="1627632"/>
+            <a:ext cx="3749039" cy="365760"/>
+          </a:xfrm>
+          <a:prstGeom prst="rect">
+            <a:avLst/>
+          </a:prstGeom>
+          <a:noFill/>
+        </p:spPr>
+        <p:txBody>
+          <a:bodyPr wrap="square" anchor="t">
+            <a:spAutoFit/>
+          </a:bodyPr>
+          <a:lstStyle/>
+          <a:p>
+            <a:pPr algn="l">
+              <a:lnSpc>
+                <a:spcPct val="115000"/>
+              </a:lnSpc>
+            </a:pPr>
+            <a:r>
+              <a:rPr sz="1400" b="1" i="0">
+                <a:solidFill>
+                  <a:srgbClr val="212529"/>
+                </a:solidFill>
+                <a:latin typeface="Calibri"/>
+              </a:rPr>
+              <a:t>Agenda geral consolidada</a:t>
+            </a:r>
+          </a:p>
+        </p:txBody>
+      </p:sp>
+      <p:sp>
+        <p:nvSpPr>
+          <p:cNvPr id="10" name="TextBox 9"/>
+          <p:cNvSpPr txBox="1"/>
+          <p:nvPr/>
+        </p:nvSpPr>
+        <p:spPr>
+          <a:xfrm>
+            <a:off x="1691640" y="1984248"/>
+            <a:ext cx="3749039" cy="365760"/>
+          </a:xfrm>
+          <a:prstGeom prst="rect">
+            <a:avLst/>
+          </a:prstGeom>
+          <a:noFill/>
+        </p:spPr>
+        <p:txBody>
+          <a:bodyPr wrap="square" anchor="t">
+            <a:spAutoFit/>
+          </a:bodyPr>
+          <a:lstStyle/>
+          <a:p>
+            <a:pPr algn="l">
+              <a:lnSpc>
+                <a:spcPct val="115000"/>
+              </a:lnSpc>
+            </a:pPr>
+            <a:r>
+              <a:rPr sz="1100" b="0" i="1">
+                <a:solidFill>
+                  <a:srgbClr val="28726F"/>
+                </a:solidFill>
+                <a:latin typeface="Calibri"/>
+              </a:rPr>
+              <a:t>alvo: v1.1</a:t>
+            </a:r>
+          </a:p>
+        </p:txBody>
+      </p:sp>
+      <p:sp>
+        <p:nvSpPr>
+          <p:cNvPr id="11" name="TextBox 10"/>
+          <p:cNvSpPr txBox="1"/>
+          <p:nvPr/>
+        </p:nvSpPr>
+        <p:spPr>
+          <a:xfrm>
+            <a:off x="5577840" y="1600200"/>
+            <a:ext cx="6035040" cy="777240"/>
+          </a:xfrm>
+          <a:prstGeom prst="rect">
+            <a:avLst/>
+          </a:prstGeom>
+          <a:noFill/>
+        </p:spPr>
+        <p:txBody>
+          <a:bodyPr wrap="square" anchor="ctr">
+            <a:spAutoFit/>
+          </a:bodyPr>
+          <a:lstStyle/>
+          <a:p>
+            <a:pPr algn="l">
+              <a:lnSpc>
+                <a:spcPct val="115000"/>
+              </a:lnSpc>
+            </a:pPr>
+            <a:r>
+              <a:rPr sz="1250" b="0" i="0">
+                <a:solidFill>
+                  <a:srgbClr val="495257"/>
+                </a:solidFill>
+                <a:latin typeface="Calibri"/>
+              </a:rPr>
+              <a:t>Dado já acessível pelas telas existentes</a:t>
+            </a:r>
+          </a:p>
+        </p:txBody>
+      </p:sp>
+      <p:sp>
+        <p:nvSpPr>
+          <p:cNvPr id="12" name="Rounded Rectangle 11"/>
+          <p:cNvSpPr/>
+          <p:nvPr/>
+        </p:nvSpPr>
+        <p:spPr>
+          <a:xfrm>
+            <a:off x="548640" y="2514600"/>
+            <a:ext cx="1005840" cy="777240"/>
+          </a:xfrm>
+          <a:prstGeom prst="roundRect">
+            <a:avLst/>
+          </a:prstGeom>
+          <a:solidFill>
+            <a:srgbClr val="28726F"/>
+          </a:solidFill>
+          <a:ln>
+            <a:noFill/>
+          </a:ln>
+          <a:effectLst/>
+        </p:spPr>
+        <p:style>
+          <a:lnRef idx="1">
+            <a:schemeClr val="accent1"/>
+          </a:lnRef>
+          <a:fillRef idx="3">
+            <a:schemeClr val="accent1"/>
+          </a:fillRef>
+          <a:effectRef idx="2">
+            <a:schemeClr val="accent1"/>
+          </a:effectRef>
+          <a:fontRef idx="minor">
+            <a:schemeClr val="lt1"/>
+          </a:fontRef>
+        </p:style>
+        <p:txBody>
+          <a:bodyPr rtlCol="0" anchor="ctr"/>
+          <a:lstStyle/>
+          <a:p>
+            <a:pPr algn="ctr"/>
+          </a:p>
+        </p:txBody>
+      </p:sp>
+      <p:sp>
+        <p:nvSpPr>
+          <p:cNvPr id="13" name="TextBox 12"/>
+          <p:cNvSpPr txBox="1"/>
+          <p:nvPr/>
+        </p:nvSpPr>
+        <p:spPr>
+          <a:xfrm>
+            <a:off x="548640" y="2734056"/>
+            <a:ext cx="1005840" cy="365760"/>
+          </a:xfrm>
+          <a:prstGeom prst="rect">
+            <a:avLst/>
+          </a:prstGeom>
+          <a:noFill/>
+        </p:spPr>
+        <p:txBody>
+          <a:bodyPr wrap="square" anchor="t">
+            <a:spAutoFit/>
+          </a:bodyPr>
+          <a:lstStyle/>
+          <a:p>
+            <a:pPr algn="ctr">
+              <a:lnSpc>
+                <a:spcPct val="115000"/>
+              </a:lnSpc>
+            </a:pPr>
+            <a:r>
+              <a:rPr sz="1400" b="1" i="0">
+                <a:solidFill>
+                  <a:srgbClr val="FFFFFF"/>
+                </a:solidFill>
+                <a:latin typeface="Calibri"/>
+              </a:rPr>
+              <a:t>MF02</a:t>
+            </a:r>
+          </a:p>
+        </p:txBody>
+      </p:sp>
+      <p:sp>
+        <p:nvSpPr>
+          <p:cNvPr id="14" name="TextBox 13"/>
+          <p:cNvSpPr txBox="1"/>
+          <p:nvPr/>
+        </p:nvSpPr>
+        <p:spPr>
+          <a:xfrm>
+            <a:off x="1691640" y="2542032"/>
+            <a:ext cx="3749039" cy="365760"/>
+          </a:xfrm>
+          <a:prstGeom prst="rect">
+            <a:avLst/>
+          </a:prstGeom>
+          <a:noFill/>
+        </p:spPr>
+        <p:txBody>
+          <a:bodyPr wrap="square" anchor="t">
+            <a:spAutoFit/>
+          </a:bodyPr>
+          <a:lstStyle/>
+          <a:p>
+            <a:pPr algn="l">
+              <a:lnSpc>
+                <a:spcPct val="115000"/>
+              </a:lnSpc>
+            </a:pPr>
+            <a:r>
+              <a:rPr sz="1400" b="1" i="0">
+                <a:solidFill>
+                  <a:srgbClr val="212529"/>
+                </a:solidFill>
+                <a:latin typeface="Calibri"/>
+              </a:rPr>
+              <a:t>Cadastro de atendente pela UI</a:t>
+            </a:r>
+          </a:p>
+        </p:txBody>
+      </p:sp>
+      <p:sp>
+        <p:nvSpPr>
+          <p:cNvPr id="15" name="TextBox 14"/>
+          <p:cNvSpPr txBox="1"/>
+          <p:nvPr/>
+        </p:nvSpPr>
+        <p:spPr>
+          <a:xfrm>
+            <a:off x="1691640" y="2898648"/>
+            <a:ext cx="3749039" cy="365760"/>
+          </a:xfrm>
+          <a:prstGeom prst="rect">
+            <a:avLst/>
+          </a:prstGeom>
+          <a:noFill/>
+        </p:spPr>
+        <p:txBody>
+          <a:bodyPr wrap="square" anchor="t">
+            <a:spAutoFit/>
+          </a:bodyPr>
+          <a:lstStyle/>
+          <a:p>
+            <a:pPr algn="l">
+              <a:lnSpc>
+                <a:spcPct val="115000"/>
+              </a:lnSpc>
+            </a:pPr>
+            <a:r>
+              <a:rPr sz="1100" b="0" i="1">
+                <a:solidFill>
+                  <a:srgbClr val="28726F"/>
+                </a:solidFill>
+                <a:latin typeface="Calibri"/>
+              </a:rPr>
+              <a:t>alvo: v1.1</a:t>
+            </a:r>
+          </a:p>
+        </p:txBody>
+      </p:sp>
+      <p:sp>
+        <p:nvSpPr>
+          <p:cNvPr id="16" name="TextBox 15"/>
+          <p:cNvSpPr txBox="1"/>
+          <p:nvPr/>
+        </p:nvSpPr>
+        <p:spPr>
+          <a:xfrm>
+            <a:off x="5577840" y="2514600"/>
+            <a:ext cx="6035040" cy="777240"/>
+          </a:xfrm>
+          <a:prstGeom prst="rect">
+            <a:avLst/>
+          </a:prstGeom>
+          <a:noFill/>
+        </p:spPr>
+        <p:txBody>
+          <a:bodyPr wrap="square" anchor="ctr">
+            <a:spAutoFit/>
+          </a:bodyPr>
+          <a:lstStyle/>
+          <a:p>
+            <a:pPr algn="l">
+              <a:lnSpc>
+                <a:spcPct val="115000"/>
+              </a:lnSpc>
+            </a:pPr>
+            <a:r>
+              <a:rPr sz="1250" b="0" i="0">
+                <a:solidFill>
+                  <a:srgbClr val="495257"/>
+                </a:solidFill>
+                <a:latin typeface="Calibri"/>
+              </a:rPr>
+              <a:t>Seed basta; RN14 continua testada por CT14</a:t>
+            </a:r>
+          </a:p>
+        </p:txBody>
+      </p:sp>
+      <p:sp>
+        <p:nvSpPr>
+          <p:cNvPr id="17" name="Rounded Rectangle 16"/>
+          <p:cNvSpPr/>
+          <p:nvPr/>
+        </p:nvSpPr>
+        <p:spPr>
+          <a:xfrm>
+            <a:off x="548640" y="3429000"/>
+            <a:ext cx="1005840" cy="777240"/>
+          </a:xfrm>
+          <a:prstGeom prst="roundRect">
+            <a:avLst/>
+          </a:prstGeom>
+          <a:solidFill>
+            <a:srgbClr val="28726F"/>
+          </a:solidFill>
+          <a:ln>
+            <a:noFill/>
+          </a:ln>
+          <a:effectLst/>
+        </p:spPr>
+        <p:style>
+          <a:lnRef idx="1">
+            <a:schemeClr val="accent1"/>
+          </a:lnRef>
+          <a:fillRef idx="3">
+            <a:schemeClr val="accent1"/>
+          </a:fillRef>
+          <a:effectRef idx="2">
+            <a:schemeClr val="accent1"/>
+          </a:effectRef>
+          <a:fontRef idx="minor">
+            <a:schemeClr val="lt1"/>
+          </a:fontRef>
+        </p:style>
+        <p:txBody>
+          <a:bodyPr rtlCol="0" anchor="ctr"/>
+          <a:lstStyle/>
+          <a:p>
+            <a:pPr algn="ctr"/>
+          </a:p>
+        </p:txBody>
+      </p:sp>
+      <p:sp>
+        <p:nvSpPr>
+          <p:cNvPr id="18" name="TextBox 17"/>
+          <p:cNvSpPr txBox="1"/>
+          <p:nvPr/>
+        </p:nvSpPr>
+        <p:spPr>
+          <a:xfrm>
+            <a:off x="548640" y="3648456"/>
+            <a:ext cx="1005840" cy="365760"/>
+          </a:xfrm>
+          <a:prstGeom prst="rect">
+            <a:avLst/>
+          </a:prstGeom>
+          <a:noFill/>
+        </p:spPr>
+        <p:txBody>
+          <a:bodyPr wrap="square" anchor="t">
+            <a:spAutoFit/>
+          </a:bodyPr>
+          <a:lstStyle/>
+          <a:p>
+            <a:pPr algn="ctr">
+              <a:lnSpc>
+                <a:spcPct val="115000"/>
+              </a:lnSpc>
+            </a:pPr>
+            <a:r>
+              <a:rPr sz="1400" b="1" i="0">
+                <a:solidFill>
+                  <a:srgbClr val="FFFFFF"/>
+                </a:solidFill>
+                <a:latin typeface="Calibri"/>
+              </a:rPr>
+              <a:t>MF09</a:t>
+            </a:r>
+          </a:p>
+        </p:txBody>
+      </p:sp>
+      <p:sp>
+        <p:nvSpPr>
+          <p:cNvPr id="19" name="TextBox 18"/>
+          <p:cNvSpPr txBox="1"/>
+          <p:nvPr/>
+        </p:nvSpPr>
+        <p:spPr>
+          <a:xfrm>
+            <a:off x="1691640" y="3456432"/>
+            <a:ext cx="3749039" cy="365760"/>
+          </a:xfrm>
+          <a:prstGeom prst="rect">
+            <a:avLst/>
+          </a:prstGeom>
+          <a:noFill/>
+        </p:spPr>
+        <p:txBody>
+          <a:bodyPr wrap="square" anchor="t">
+            <a:spAutoFit/>
+          </a:bodyPr>
+          <a:lstStyle/>
+          <a:p>
+            <a:pPr algn="l">
+              <a:lnSpc>
+                <a:spcPct val="115000"/>
+              </a:lnSpc>
+            </a:pPr>
+            <a:r>
+              <a:rPr sz="1400" b="1" i="0">
+                <a:solidFill>
+                  <a:srgbClr val="212529"/>
+                </a:solidFill>
+                <a:latin typeface="Calibri"/>
+              </a:rPr>
+              <a:t>Perfil de Médico com login</a:t>
+            </a:r>
+          </a:p>
+        </p:txBody>
+      </p:sp>
+      <p:sp>
+        <p:nvSpPr>
+          <p:cNvPr id="20" name="TextBox 19"/>
+          <p:cNvSpPr txBox="1"/>
+          <p:nvPr/>
+        </p:nvSpPr>
+        <p:spPr>
+          <a:xfrm>
+            <a:off x="1691640" y="3813048"/>
+            <a:ext cx="3749039" cy="365760"/>
+          </a:xfrm>
+          <a:prstGeom prst="rect">
+            <a:avLst/>
+          </a:prstGeom>
+          <a:noFill/>
+        </p:spPr>
+        <p:txBody>
+          <a:bodyPr wrap="square" anchor="t">
+            <a:spAutoFit/>
+          </a:bodyPr>
+          <a:lstStyle/>
+          <a:p>
+            <a:pPr algn="l">
+              <a:lnSpc>
+                <a:spcPct val="115000"/>
+              </a:lnSpc>
+            </a:pPr>
+            <a:r>
+              <a:rPr sz="1100" b="0" i="1">
+                <a:solidFill>
+                  <a:srgbClr val="28726F"/>
+                </a:solidFill>
+                <a:latin typeface="Calibri"/>
+              </a:rPr>
+              <a:t>alvo: v2.0</a:t>
+            </a:r>
+          </a:p>
+        </p:txBody>
+      </p:sp>
+      <p:sp>
+        <p:nvSpPr>
+          <p:cNvPr id="21" name="TextBox 20"/>
+          <p:cNvSpPr txBox="1"/>
+          <p:nvPr/>
+        </p:nvSpPr>
+        <p:spPr>
+          <a:xfrm>
+            <a:off x="5577840" y="3429000"/>
+            <a:ext cx="6035040" cy="777240"/>
+          </a:xfrm>
+          <a:prstGeom prst="rect">
+            <a:avLst/>
+          </a:prstGeom>
+          <a:noFill/>
+        </p:spPr>
+        <p:txBody>
+          <a:bodyPr wrap="square" anchor="ctr">
+            <a:spAutoFit/>
+          </a:bodyPr>
+          <a:lstStyle/>
+          <a:p>
+            <a:pPr algn="l">
+              <a:lnSpc>
+                <a:spcPct val="115000"/>
+              </a:lnSpc>
+            </a:pPr>
+            <a:r>
+              <a:rPr sz="1250" b="0" i="0">
+                <a:solidFill>
+                  <a:srgbClr val="495257"/>
+                </a:solidFill>
+                <a:latin typeface="Calibri"/>
+              </a:rPr>
+              <a:t>Mudaria todo o modelo de autorização</a:t>
+            </a:r>
+          </a:p>
+        </p:txBody>
+      </p:sp>
+      <p:sp>
+        <p:nvSpPr>
+          <p:cNvPr id="22" name="Rounded Rectangle 21"/>
+          <p:cNvSpPr/>
+          <p:nvPr/>
+        </p:nvSpPr>
+        <p:spPr>
+          <a:xfrm>
+            <a:off x="548640" y="4343400"/>
+            <a:ext cx="1005840" cy="777240"/>
+          </a:xfrm>
+          <a:prstGeom prst="roundRect">
+            <a:avLst/>
+          </a:prstGeom>
+          <a:solidFill>
+            <a:srgbClr val="28726F"/>
+          </a:solidFill>
+          <a:ln>
+            <a:noFill/>
+          </a:ln>
+          <a:effectLst/>
+        </p:spPr>
+        <p:style>
+          <a:lnRef idx="1">
+            <a:schemeClr val="accent1"/>
+          </a:lnRef>
+          <a:fillRef idx="3">
+            <a:schemeClr val="accent1"/>
+          </a:fillRef>
+          <a:effectRef idx="2">
+            <a:schemeClr val="accent1"/>
+          </a:effectRef>
+          <a:fontRef idx="minor">
+            <a:schemeClr val="lt1"/>
+          </a:fontRef>
+        </p:style>
+        <p:txBody>
+          <a:bodyPr rtlCol="0" anchor="ctr"/>
+          <a:lstStyle/>
+          <a:p>
+            <a:pPr algn="ctr"/>
+          </a:p>
+        </p:txBody>
+      </p:sp>
+      <p:sp>
+        <p:nvSpPr>
+          <p:cNvPr id="23" name="TextBox 22"/>
+          <p:cNvSpPr txBox="1"/>
+          <p:nvPr/>
+        </p:nvSpPr>
+        <p:spPr>
+          <a:xfrm>
+            <a:off x="548640" y="4562856"/>
+            <a:ext cx="1005840" cy="365760"/>
+          </a:xfrm>
+          <a:prstGeom prst="rect">
+            <a:avLst/>
+          </a:prstGeom>
+          <a:noFill/>
+        </p:spPr>
+        <p:txBody>
+          <a:bodyPr wrap="square" anchor="t">
+            <a:spAutoFit/>
+          </a:bodyPr>
+          <a:lstStyle/>
+          <a:p>
+            <a:pPr algn="ctr">
+              <a:lnSpc>
+                <a:spcPct val="115000"/>
+              </a:lnSpc>
+            </a:pPr>
+            <a:r>
+              <a:rPr sz="1400" b="1" i="0">
+                <a:solidFill>
+                  <a:srgbClr val="FFFFFF"/>
+                </a:solidFill>
+                <a:latin typeface="Calibri"/>
+              </a:rPr>
+              <a:t>MF14</a:t>
+            </a:r>
+          </a:p>
+        </p:txBody>
+      </p:sp>
+      <p:sp>
+        <p:nvSpPr>
+          <p:cNvPr id="24" name="TextBox 23"/>
+          <p:cNvSpPr txBox="1"/>
+          <p:nvPr/>
+        </p:nvSpPr>
+        <p:spPr>
+          <a:xfrm>
+            <a:off x="1691640" y="4370832"/>
+            <a:ext cx="3749039" cy="365760"/>
+          </a:xfrm>
+          <a:prstGeom prst="rect">
+            <a:avLst/>
+          </a:prstGeom>
+          <a:noFill/>
+        </p:spPr>
+        <p:txBody>
+          <a:bodyPr wrap="square" anchor="t">
+            <a:spAutoFit/>
+          </a:bodyPr>
+          <a:lstStyle/>
+          <a:p>
+            <a:pPr algn="l">
+              <a:lnSpc>
+                <a:spcPct val="115000"/>
+              </a:lnSpc>
+            </a:pPr>
+            <a:r>
+              <a:rPr sz="1400" b="1" i="0">
+                <a:solidFill>
+                  <a:srgbClr val="212529"/>
+                </a:solidFill>
+                <a:latin typeface="Calibri"/>
+              </a:rPr>
+              <a:t>Testes end-to-end automatizados</a:t>
+            </a:r>
+          </a:p>
+        </p:txBody>
+      </p:sp>
+      <p:sp>
+        <p:nvSpPr>
+          <p:cNvPr id="25" name="TextBox 24"/>
+          <p:cNvSpPr txBox="1"/>
+          <p:nvPr/>
+        </p:nvSpPr>
+        <p:spPr>
+          <a:xfrm>
+            <a:off x="1691640" y="4727448"/>
+            <a:ext cx="3749039" cy="365760"/>
+          </a:xfrm>
+          <a:prstGeom prst="rect">
+            <a:avLst/>
+          </a:prstGeom>
+          <a:noFill/>
+        </p:spPr>
+        <p:txBody>
+          <a:bodyPr wrap="square" anchor="t">
+            <a:spAutoFit/>
+          </a:bodyPr>
+          <a:lstStyle/>
+          <a:p>
+            <a:pPr algn="l">
+              <a:lnSpc>
+                <a:spcPct val="115000"/>
+              </a:lnSpc>
+            </a:pPr>
+            <a:r>
+              <a:rPr sz="1100" b="0" i="1">
+                <a:solidFill>
+                  <a:srgbClr val="28726F"/>
+                </a:solidFill>
+                <a:latin typeface="Calibri"/>
+              </a:rPr>
+              <a:t>alvo: v1.2</a:t>
+            </a:r>
+          </a:p>
+        </p:txBody>
+      </p:sp>
+      <p:sp>
+        <p:nvSpPr>
+          <p:cNvPr id="26" name="TextBox 25"/>
+          <p:cNvSpPr txBox="1"/>
+          <p:nvPr/>
+        </p:nvSpPr>
+        <p:spPr>
+          <a:xfrm>
+            <a:off x="5577840" y="4343400"/>
+            <a:ext cx="6035040" cy="777240"/>
+          </a:xfrm>
+          <a:prstGeom prst="rect">
+            <a:avLst/>
+          </a:prstGeom>
+          <a:noFill/>
+        </p:spPr>
+        <p:txBody>
+          <a:bodyPr wrap="square" anchor="ctr">
+            <a:spAutoFit/>
+          </a:bodyPr>
+          <a:lstStyle/>
+          <a:p>
+            <a:pPr algn="l">
+              <a:lnSpc>
+                <a:spcPct val="115000"/>
+              </a:lnSpc>
+            </a:pPr>
+            <a:r>
+              <a:rPr sz="1250" b="0" i="0">
+                <a:solidFill>
+                  <a:srgbClr val="495257"/>
+                </a:solidFill>
+                <a:latin typeface="Calibri"/>
+              </a:rPr>
+              <a:t>Competiria com o próprio desenvolvimento em 11 dias</a:t>
+            </a:r>
+          </a:p>
+        </p:txBody>
+      </p:sp>
+      <p:sp>
+        <p:nvSpPr>
+          <p:cNvPr id="27" name="Rounded Rectangle 26"/>
+          <p:cNvSpPr/>
+          <p:nvPr/>
+        </p:nvSpPr>
+        <p:spPr>
+          <a:xfrm>
+            <a:off x="548640" y="5257800"/>
+            <a:ext cx="1005840" cy="777240"/>
+          </a:xfrm>
+          <a:prstGeom prst="roundRect">
+            <a:avLst/>
+          </a:prstGeom>
+          <a:solidFill>
+            <a:srgbClr val="28726F"/>
+          </a:solidFill>
+          <a:ln>
+            <a:noFill/>
+          </a:ln>
+          <a:effectLst/>
+        </p:spPr>
+        <p:style>
+          <a:lnRef idx="1">
+            <a:schemeClr val="accent1"/>
+          </a:lnRef>
+          <a:fillRef idx="3">
+            <a:schemeClr val="accent1"/>
+          </a:fillRef>
+          <a:effectRef idx="2">
+            <a:schemeClr val="accent1"/>
+          </a:effectRef>
+          <a:fontRef idx="minor">
+            <a:schemeClr val="lt1"/>
+          </a:fontRef>
+        </p:style>
+        <p:txBody>
+          <a:bodyPr rtlCol="0" anchor="ctr"/>
+          <a:lstStyle/>
+          <a:p>
+            <a:pPr algn="ctr"/>
+          </a:p>
+        </p:txBody>
+      </p:sp>
+      <p:sp>
+        <p:nvSpPr>
+          <p:cNvPr id="28" name="TextBox 27"/>
+          <p:cNvSpPr txBox="1"/>
+          <p:nvPr/>
+        </p:nvSpPr>
+        <p:spPr>
+          <a:xfrm>
+            <a:off x="548640" y="5477256"/>
+            <a:ext cx="1005840" cy="365760"/>
+          </a:xfrm>
+          <a:prstGeom prst="rect">
+            <a:avLst/>
+          </a:prstGeom>
+          <a:noFill/>
+        </p:spPr>
+        <p:txBody>
+          <a:bodyPr wrap="square" anchor="t">
+            <a:spAutoFit/>
+          </a:bodyPr>
+          <a:lstStyle/>
+          <a:p>
+            <a:pPr algn="ctr">
+              <a:lnSpc>
+                <a:spcPct val="115000"/>
+              </a:lnSpc>
+            </a:pPr>
+            <a:r>
+              <a:rPr sz="1400" b="1" i="0">
+                <a:solidFill>
+                  <a:srgbClr val="FFFFFF"/>
+                </a:solidFill>
+                <a:latin typeface="Calibri"/>
+              </a:rPr>
+              <a:t>MF03/04</a:t>
+            </a:r>
+          </a:p>
+        </p:txBody>
+      </p:sp>
+      <p:sp>
+        <p:nvSpPr>
+          <p:cNvPr id="29" name="TextBox 28"/>
+          <p:cNvSpPr txBox="1"/>
+          <p:nvPr/>
+        </p:nvSpPr>
+        <p:spPr>
+          <a:xfrm>
+            <a:off x="1691640" y="5285232"/>
+            <a:ext cx="3749039" cy="365760"/>
+          </a:xfrm>
+          <a:prstGeom prst="rect">
+            <a:avLst/>
+          </a:prstGeom>
+          <a:noFill/>
+        </p:spPr>
+        <p:txBody>
+          <a:bodyPr wrap="square" anchor="t">
+            <a:spAutoFit/>
+          </a:bodyPr>
+          <a:lstStyle/>
+          <a:p>
+            <a:pPr algn="l">
+              <a:lnSpc>
+                <a:spcPct val="115000"/>
+              </a:lnSpc>
+            </a:pPr>
+            <a:r>
+              <a:rPr sz="1400" b="1" i="0">
+                <a:solidFill>
+                  <a:srgbClr val="212529"/>
+                </a:solidFill>
+                <a:latin typeface="Calibri"/>
+              </a:rPr>
+              <a:t>Editar e excluir especialidade/médico</a:t>
+            </a:r>
+          </a:p>
+        </p:txBody>
+      </p:sp>
+      <p:sp>
+        <p:nvSpPr>
+          <p:cNvPr id="30" name="TextBox 29"/>
+          <p:cNvSpPr txBox="1"/>
+          <p:nvPr/>
+        </p:nvSpPr>
+        <p:spPr>
+          <a:xfrm>
+            <a:off x="1691640" y="5641848"/>
+            <a:ext cx="3749039" cy="365760"/>
+          </a:xfrm>
+          <a:prstGeom prst="rect">
+            <a:avLst/>
+          </a:prstGeom>
+          <a:noFill/>
+        </p:spPr>
+        <p:txBody>
+          <a:bodyPr wrap="square" anchor="t">
+            <a:spAutoFit/>
+          </a:bodyPr>
+          <a:lstStyle/>
+          <a:p>
+            <a:pPr algn="l">
+              <a:lnSpc>
+                <a:spcPct val="115000"/>
+              </a:lnSpc>
+            </a:pPr>
+            <a:r>
+              <a:rPr sz="1100" b="0" i="1">
+                <a:solidFill>
+                  <a:srgbClr val="28726F"/>
+                </a:solidFill>
+                <a:latin typeface="Calibri"/>
+              </a:rPr>
+              <a:t>alvo: v1.1</a:t>
+            </a:r>
+          </a:p>
+        </p:txBody>
+      </p:sp>
+      <p:sp>
+        <p:nvSpPr>
+          <p:cNvPr id="31" name="TextBox 30"/>
+          <p:cNvSpPr txBox="1"/>
+          <p:nvPr/>
+        </p:nvSpPr>
+        <p:spPr>
+          <a:xfrm>
+            <a:off x="5577840" y="5257800"/>
+            <a:ext cx="6035040" cy="777240"/>
+          </a:xfrm>
+          <a:prstGeom prst="rect">
+            <a:avLst/>
+          </a:prstGeom>
+          <a:noFill/>
+        </p:spPr>
+        <p:txBody>
+          <a:bodyPr wrap="square" anchor="ctr">
+            <a:spAutoFit/>
+          </a:bodyPr>
+          <a:lstStyle/>
+          <a:p>
+            <a:pPr algn="l">
+              <a:lnSpc>
+                <a:spcPct val="115000"/>
+              </a:lnSpc>
+            </a:pPr>
+            <a:r>
+              <a:rPr sz="1250" b="0" i="0">
+                <a:solidFill>
+                  <a:srgbClr val="495257"/>
+                </a:solidFill>
+                <a:latin typeface="Calibri"/>
+              </a:rPr>
+              <a:t>A inativação entrou no MVP (ADR-009); excluir quebraria o histórico</a:t>
+            </a:r>
+          </a:p>
+        </p:txBody>
+      </p:sp>
+      <p:sp>
+        <p:nvSpPr>
+          <p:cNvPr id="32" name="TextBox 31"/>
+          <p:cNvSpPr txBox="1"/>
+          <p:nvPr/>
+        </p:nvSpPr>
+        <p:spPr>
+          <a:xfrm>
+            <a:off x="548640" y="6263640"/>
+            <a:ext cx="10972800" cy="365760"/>
+          </a:xfrm>
+          <a:prstGeom prst="rect">
+            <a:avLst/>
+          </a:prstGeom>
+          <a:noFill/>
+        </p:spPr>
+        <p:txBody>
+          <a:bodyPr wrap="square" anchor="t">
+            <a:spAutoFit/>
+          </a:bodyPr>
+          <a:lstStyle/>
+          <a:p>
+            <a:pPr algn="l">
+              <a:lnSpc>
+                <a:spcPct val="115000"/>
+              </a:lnSpc>
+            </a:pPr>
+            <a:r>
+              <a:rPr sz="1300" b="1" i="1">
+                <a:solidFill>
+                  <a:srgbClr val="12635F"/>
+                </a:solidFill>
+                <a:latin typeface="Calibri"/>
+              </a:rPr>
+              <a:t>Escopo controlado é competência de Engenharia de Software, não limitação.</a:t>
+            </a:r>
+          </a:p>
+        </p:txBody>
+      </p:sp>
+    </p:spTree>
+  </p:cSld>
+  <p:clrMapOvr>
+    <a:masterClrMapping/>
+  </p:clrMapOvr>
+</p:sld>
+</file>
+
+<file path=ppt/slides/slide23.xml><?xml version="1.0" encoding="utf-8"?>
+<p:sld xmlns:a="http://schemas.openxmlformats.org/drawingml/2006/main" xmlns:p="http://schemas.openxmlformats.org/presentationml/2006/main" xmlns:r="http://schemas.openxmlformats.org/officeDocument/2006/relationships">
+  <p:cSld>
+    <p:bg>
+      <p:bgPr>
+        <a:solidFill>
+          <a:srgbClr val="FFFFFF"/>
+        </a:solidFill>
+        <a:effectLst/>
+      </p:bgPr>
+    </p:bg>
+    <p:spTree>
+      <p:nvGrpSpPr>
+        <p:cNvPr id="1" name=""/>
+        <p:cNvGrpSpPr/>
+        <p:nvPr/>
+      </p:nvGrpSpPr>
+      <p:grpSpPr/>
+      <p:sp>
+        <p:nvSpPr>
+          <p:cNvPr id="2" name="Rectangle 1"/>
+          <p:cNvSpPr/>
+          <p:nvPr/>
+        </p:nvSpPr>
+        <p:spPr>
+          <a:xfrm>
+            <a:off x="0" y="0"/>
+            <a:ext cx="12191695" cy="128016"/>
+          </a:xfrm>
+          <a:prstGeom prst="rect">
+            <a:avLst/>
+          </a:prstGeom>
+          <a:solidFill>
+            <a:srgbClr val="28726F"/>
+          </a:solidFill>
+          <a:ln>
+            <a:noFill/>
+          </a:ln>
+          <a:effectLst/>
+        </p:spPr>
+        <p:style>
+          <a:lnRef idx="1">
+            <a:schemeClr val="accent1"/>
+          </a:lnRef>
+          <a:fillRef idx="3">
+            <a:schemeClr val="accent1"/>
+          </a:fillRef>
+          <a:effectRef idx="2">
+            <a:schemeClr val="accent1"/>
+          </a:effectRef>
+          <a:fontRef idx="minor">
+            <a:schemeClr val="lt1"/>
+          </a:fontRef>
+        </p:style>
+        <p:txBody>
+          <a:bodyPr rtlCol="0" anchor="ctr"/>
+          <a:lstStyle/>
+          <a:p>
+            <a:pPr algn="ctr"/>
+          </a:p>
+        </p:txBody>
+      </p:sp>
+      <p:sp>
+        <p:nvSpPr>
+          <p:cNvPr id="3" name="TextBox 2"/>
+          <p:cNvSpPr txBox="1"/>
+          <p:nvPr/>
+        </p:nvSpPr>
+        <p:spPr>
+          <a:xfrm>
+            <a:off x="548640" y="292608"/>
+            <a:ext cx="9144000" cy="320040"/>
+          </a:xfrm>
+          <a:prstGeom prst="rect">
+            <a:avLst/>
+          </a:prstGeom>
+          <a:noFill/>
+        </p:spPr>
+        <p:txBody>
+          <a:bodyPr wrap="square" anchor="t">
+            <a:spAutoFit/>
+          </a:bodyPr>
+          <a:lstStyle/>
+          <a:p>
+            <a:pPr algn="l">
+              <a:lnSpc>
+                <a:spcPct val="115000"/>
+              </a:lnSpc>
+            </a:pPr>
+            <a:r>
+              <a:rPr sz="1300" b="1" i="0">
+                <a:solidFill>
+                  <a:srgbClr val="44938F"/>
+                </a:solidFill>
+                <a:latin typeface="Calibri"/>
+              </a:rPr>
+              <a:t>O QUE A EQUIPE LEVOU DO PROJETO</a:t>
+            </a:r>
+          </a:p>
+        </p:txBody>
+      </p:sp>
+      <p:sp>
+        <p:nvSpPr>
+          <p:cNvPr id="4" name="TextBox 3"/>
+          <p:cNvSpPr txBox="1"/>
+          <p:nvPr/>
+        </p:nvSpPr>
+        <p:spPr>
+          <a:xfrm>
+            <a:off x="548640" y="566928"/>
+            <a:ext cx="10515600" cy="822960"/>
+          </a:xfrm>
+          <a:prstGeom prst="rect">
+            <a:avLst/>
+          </a:prstGeom>
+          <a:noFill/>
+        </p:spPr>
+        <p:txBody>
+          <a:bodyPr wrap="square" anchor="t">
+            <a:spAutoFit/>
+          </a:bodyPr>
+          <a:lstStyle/>
+          <a:p>
+            <a:pPr algn="l">
+              <a:lnSpc>
+                <a:spcPct val="115000"/>
+              </a:lnSpc>
+            </a:pPr>
+            <a:r>
+              <a:rPr sz="3000" b="1" i="0">
+                <a:solidFill>
+                  <a:srgbClr val="212529"/>
+                </a:solidFill>
+                <a:latin typeface="Calibri"/>
+              </a:rPr>
+              <a:t>Retrospectiva</a:t>
+            </a:r>
+          </a:p>
+        </p:txBody>
+      </p:sp>
+      <p:sp>
+        <p:nvSpPr>
+          <p:cNvPr id="5" name="Rectangle 4"/>
+          <p:cNvSpPr/>
+          <p:nvPr/>
+        </p:nvSpPr>
+        <p:spPr>
+          <a:xfrm>
+            <a:off x="548640" y="1280160"/>
+            <a:ext cx="1005840" cy="44450"/>
+          </a:xfrm>
+          <a:prstGeom prst="rect">
+            <a:avLst/>
+          </a:prstGeom>
+          <a:solidFill>
+            <a:srgbClr val="28726F"/>
+          </a:solidFill>
+          <a:ln>
+            <a:noFill/>
+          </a:ln>
+          <a:effectLst/>
+        </p:spPr>
+        <p:style>
+          <a:lnRef idx="1">
+            <a:schemeClr val="accent1"/>
+          </a:lnRef>
+          <a:fillRef idx="3">
+            <a:schemeClr val="accent1"/>
+          </a:fillRef>
+          <a:effectRef idx="2">
+            <a:schemeClr val="accent1"/>
+          </a:effectRef>
+          <a:fontRef idx="minor">
+            <a:schemeClr val="lt1"/>
+          </a:fontRef>
+        </p:style>
+        <p:txBody>
+          <a:bodyPr rtlCol="0" anchor="ctr"/>
+          <a:lstStyle/>
+          <a:p>
+            <a:pPr algn="ctr"/>
+          </a:p>
+        </p:txBody>
+      </p:sp>
+      <p:sp>
+        <p:nvSpPr>
+          <p:cNvPr id="6" name="TextBox 5"/>
+          <p:cNvSpPr txBox="1"/>
+          <p:nvPr/>
+        </p:nvSpPr>
+        <p:spPr>
+          <a:xfrm>
+            <a:off x="11247120" y="6473952"/>
+            <a:ext cx="640080" cy="320040"/>
+          </a:xfrm>
+          <a:prstGeom prst="rect">
+            <a:avLst/>
+          </a:prstGeom>
+          <a:noFill/>
+        </p:spPr>
+        <p:txBody>
+          <a:bodyPr wrap="square" anchor="t">
+            <a:spAutoFit/>
+          </a:bodyPr>
+          <a:lstStyle/>
+          <a:p>
+            <a:pPr algn="r">
+              <a:lnSpc>
+                <a:spcPct val="115000"/>
+              </a:lnSpc>
+            </a:pPr>
+            <a:r>
+              <a:rPr sz="1100" b="0" i="0">
+                <a:solidFill>
+                  <a:srgbClr val="8A9399"/>
+                </a:solidFill>
+                <a:latin typeface="Calibri"/>
+              </a:rPr>
+              <a:t>23</a:t>
             </a:r>
           </a:p>
         </p:txBody>
